--- a/project-docs/EcoFeast.pptx
+++ b/project-docs/EcoFeast.pptx
@@ -4,6 +4,9 @@
   <p:sldMasterIdLst>
     <p:sldMasterId id="2147483648" r:id="rId1"/>
   </p:sldMasterIdLst>
+  <p:notesMasterIdLst>
+    <p:notesMasterId r:id="rId17"/>
+  </p:notesMasterIdLst>
   <p:sldIdLst>
     <p:sldId id="256" r:id="rId2"/>
     <p:sldId id="257" r:id="rId3"/>
@@ -21,9 +24,6 @@
     <p:sldId id="269" r:id="rId15"/>
     <p:sldId id="270" r:id="rId16"/>
   </p:sldIdLst>
-  <p:notesMasterIdLst>
-    <p:notesMasterId r:id="rId17"/>
-  </p:notesMasterIdLst>
   <p:sldSz cx="12192000" cy="6858000"/>
   <p:notesSz cx="6858000" cy="12192000"/>
   <p:defaultTextStyle>
@@ -118,6 +118,11 @@
       </a:defRPr>
     </a:lvl9pPr>
   </p:defaultTextStyle>
+  <p:extLst>
+    <p:ext uri="{EFAFB233-063F-42B5-8137-9DF3F51BA10A}">
+      <p15:sldGuideLst xmlns:p15="http://schemas.microsoft.com/office/powerpoint/2012/main"/>
+    </p:ext>
+  </p:extLst>
 </p:presentation>
 </file>
 
@@ -143,234 +148,10 @@
           <a:chExt cx="0" cy="0"/>
         </a:xfrm>
       </p:grpSpPr>
-      <p:sp>
-        <p:nvSpPr>
-          <p:cNvPr id="2" name="Header Placeholder 1"/>
-          <p:cNvSpPr>
-            <a:spLocks noGrp="1"/>
-          </p:cNvSpPr>
-          <p:nvPr>
-            <p:ph type="hdr" sz="quarter"/>
-          </p:nvPr>
-        </p:nvSpPr>
-        <p:spPr>
-          <a:xfrm>
-            <a:off x="0" y="0"/>
-            <a:ext cx="2971800" cy="458788"/>
-          </a:xfrm>
-          <a:prstGeom prst="rect">
-            <a:avLst/>
-          </a:prstGeom>
-        </p:spPr>
-        <p:txBody>
-          <a:bodyPr vert="horz" lIns="91440" tIns="45720" rIns="91440" bIns="45720" rtlCol="0"/>
-          <a:lstStyle>
-            <a:lvl1pPr algn="l">
-              <a:defRPr sz="1200"/>
-            </a:lvl1pPr>
-          </a:lstStyle>
-          <a:p>
-            <a:endParaRPr lang="en-US"/>
-          </a:p>
-        </p:txBody>
-      </p:sp>
-      <p:sp>
-        <p:nvSpPr>
-          <p:cNvPr id="3" name="Date Placeholder 2"/>
-          <p:cNvSpPr>
-            <a:spLocks noGrp="1"/>
-          </p:cNvSpPr>
-          <p:nvPr>
-            <p:ph type="dt" idx="1"/>
-          </p:nvPr>
-        </p:nvSpPr>
-        <p:spPr>
-          <a:xfrm>
-            <a:off x="3884613" y="0"/>
-            <a:ext cx="2971800" cy="458788"/>
-          </a:xfrm>
-          <a:prstGeom prst="rect">
-            <a:avLst/>
-          </a:prstGeom>
-        </p:spPr>
-        <p:txBody>
-          <a:bodyPr vert="horz" lIns="91440" tIns="45720" rIns="91440" bIns="45720" rtlCol="0"/>
-          <a:lstStyle>
-            <a:lvl1pPr algn="r">
-              <a:defRPr sz="1200"/>
-            </a:lvl1pPr>
-          </a:lstStyle>
-          <a:p>
-            <a:fld id="{5282F153-3F37-0F45-9E97-73ACFA13230C}" type="datetimeFigureOut">
-              <a:rPr lang="en-US"/>
-              <a:t>7/23/19</a:t>
-            </a:fld>
-            <a:endParaRPr lang="en-US"/>
-          </a:p>
-        </p:txBody>
-      </p:sp>
-      <p:sp>
-        <p:nvSpPr>
-          <p:cNvPr id="4" name="Slide Image Placeholder 3"/>
-          <p:cNvSpPr>
-            <a:spLocks noGrp="1" noRot="1" noChangeAspect="1"/>
-          </p:cNvSpPr>
-          <p:nvPr>
-            <p:ph type="sldImg" idx="2"/>
-          </p:nvPr>
-        </p:nvSpPr>
-        <p:spPr>
-          <a:xfrm>
-            <a:off x="685800" y="1143000"/>
-            <a:ext cx="5486400" cy="3086100"/>
-          </a:xfrm>
-          <a:prstGeom prst="rect">
-            <a:avLst/>
-          </a:prstGeom>
-          <a:noFill/>
-          <a:ln w="12700">
-            <a:solidFill>
-              <a:prstClr val="black"/>
-            </a:solidFill>
-          </a:ln>
-        </p:spPr>
-        <p:txBody>
-          <a:bodyPr vert="horz" lIns="91440" tIns="45720" rIns="91440" bIns="45720" rtlCol="0" anchor="ctr"/>
-          <a:lstStyle/>
-          <a:p>
-            <a:endParaRPr lang="en-US"/>
-          </a:p>
-        </p:txBody>
-      </p:sp>
-      <p:sp>
-        <p:nvSpPr>
-          <p:cNvPr id="5" name="Notes Placeholder 4"/>
-          <p:cNvSpPr>
-            <a:spLocks noGrp="1"/>
-          </p:cNvSpPr>
-          <p:nvPr>
-            <p:ph type="body" sz="quarter" idx="3"/>
-          </p:nvPr>
-        </p:nvSpPr>
-        <p:spPr>
-          <a:xfrm>
-            <a:off x="685800" y="4400550"/>
-            <a:ext cx="5486400" cy="3600450"/>
-          </a:xfrm>
-          <a:prstGeom prst="rect">
-            <a:avLst/>
-          </a:prstGeom>
-        </p:spPr>
-        <p:txBody>
-          <a:bodyPr vert="horz" lIns="91440" tIns="45720" rIns="91440" bIns="45720" rtlCol="0"/>
-          <a:lstStyle/>
-          <a:p>
-            <a:pPr lvl="0"/>
-            <a:r>
-              <a:rPr lang="en-US"/>
-              <a:t>Click to edit Master text styles</a:t>
-            </a:r>
-          </a:p>
-          <a:p>
-            <a:pPr lvl="1"/>
-            <a:r>
-              <a:rPr lang="en-US"/>
-              <a:t>Second level</a:t>
-            </a:r>
-          </a:p>
-          <a:p>
-            <a:pPr lvl="2"/>
-            <a:r>
-              <a:rPr lang="en-US"/>
-              <a:t>Third level</a:t>
-            </a:r>
-          </a:p>
-          <a:p>
-            <a:pPr lvl="3"/>
-            <a:r>
-              <a:rPr lang="en-US"/>
-              <a:t>Fourth level</a:t>
-            </a:r>
-          </a:p>
-          <a:p>
-            <a:pPr lvl="4"/>
-            <a:r>
-              <a:rPr lang="en-US"/>
-              <a:t>Fifth level</a:t>
-            </a:r>
-          </a:p>
-        </p:txBody>
-      </p:sp>
-      <p:sp>
-        <p:nvSpPr>
-          <p:cNvPr id="6" name="Footer Placeholder 5"/>
-          <p:cNvSpPr>
-            <a:spLocks noGrp="1"/>
-          </p:cNvSpPr>
-          <p:nvPr>
-            <p:ph type="ftr" sz="quarter" idx="4"/>
-          </p:nvPr>
-        </p:nvSpPr>
-        <p:spPr>
-          <a:xfrm>
-            <a:off x="0" y="8685213"/>
-            <a:ext cx="2971800" cy="458787"/>
-          </a:xfrm>
-          <a:prstGeom prst="rect">
-            <a:avLst/>
-          </a:prstGeom>
-        </p:spPr>
-        <p:txBody>
-          <a:bodyPr vert="horz" lIns="91440" tIns="45720" rIns="91440" bIns="45720" rtlCol="0" anchor="b"/>
-          <a:lstStyle>
-            <a:lvl1pPr algn="l">
-              <a:defRPr sz="1200"/>
-            </a:lvl1pPr>
-          </a:lstStyle>
-          <a:p>
-            <a:endParaRPr lang="en-US"/>
-          </a:p>
-        </p:txBody>
-      </p:sp>
-      <p:sp>
-        <p:nvSpPr>
-          <p:cNvPr id="7" name="Slide Number Placeholder 6"/>
-          <p:cNvSpPr>
-            <a:spLocks noGrp="1"/>
-          </p:cNvSpPr>
-          <p:nvPr>
-            <p:ph type="sldNum" sz="quarter" idx="5"/>
-          </p:nvPr>
-        </p:nvSpPr>
-        <p:spPr>
-          <a:xfrm>
-            <a:off x="3884613" y="8685213"/>
-            <a:ext cx="2971800" cy="458787"/>
-          </a:xfrm>
-          <a:prstGeom prst="rect">
-            <a:avLst/>
-          </a:prstGeom>
-        </p:spPr>
-        <p:txBody>
-          <a:bodyPr vert="horz" lIns="91440" tIns="45720" rIns="91440" bIns="45720" rtlCol="0" anchor="b"/>
-          <a:lstStyle>
-            <a:lvl1pPr algn="r">
-              <a:defRPr sz="1200"/>
-            </a:lvl1pPr>
-          </a:lstStyle>
-          <a:p>
-            <a:fld id="{CE5E9CC1-C706-0F49-92D6-E571CC5EEA8F}" type="slidenum">
-              <a:rPr lang="en-US"/>
-              <a:t>‹#›</a:t>
-            </a:fld>
-            <a:endParaRPr lang="en-US"/>
-          </a:p>
-        </p:txBody>
-      </p:sp>
     </p:spTree>
     <p:extLst>
       <p:ext uri="{BB962C8B-B14F-4D97-AF65-F5344CB8AC3E}">
-        <p14:creationId xmlns:p14="http://schemas.microsoft.com/office/powerpoint/2010/main" val="1024086991"/>
+        <p14:creationId xmlns:p14="http://schemas.microsoft.com/office/powerpoint/2010/main" val="639469052"/>
       </p:ext>
     </p:extLst>
   </p:cSld>
@@ -514,10 +295,6 @@
           <a:bodyPr/>
           <a:lstStyle/>
           <a:p>
-            <a:r>
-              <a:rPr lang="en-US" dirty="0"/>
-              <a:t/>
-            </a:r>
             <a:endParaRPr lang="en-US" dirty="0"/>
           </a:p>
         </p:txBody>
@@ -602,10 +379,6 @@
           <a:bodyPr/>
           <a:lstStyle/>
           <a:p>
-            <a:r>
-              <a:rPr lang="en-US" dirty="0"/>
-              <a:t/>
-            </a:r>
             <a:endParaRPr lang="en-US" dirty="0"/>
           </a:p>
         </p:txBody>
@@ -690,10 +463,6 @@
           <a:bodyPr/>
           <a:lstStyle/>
           <a:p>
-            <a:r>
-              <a:rPr lang="en-US" dirty="0"/>
-              <a:t/>
-            </a:r>
             <a:endParaRPr lang="en-US" dirty="0"/>
           </a:p>
         </p:txBody>
@@ -778,10 +547,6 @@
           <a:bodyPr/>
           <a:lstStyle/>
           <a:p>
-            <a:r>
-              <a:rPr lang="en-US" dirty="0"/>
-              <a:t/>
-            </a:r>
             <a:endParaRPr lang="en-US" dirty="0"/>
           </a:p>
         </p:txBody>
@@ -866,10 +631,6 @@
           <a:bodyPr/>
           <a:lstStyle/>
           <a:p>
-            <a:r>
-              <a:rPr lang="en-US" dirty="0"/>
-              <a:t/>
-            </a:r>
             <a:endParaRPr lang="en-US" dirty="0"/>
           </a:p>
         </p:txBody>
@@ -954,10 +715,6 @@
           <a:bodyPr/>
           <a:lstStyle/>
           <a:p>
-            <a:r>
-              <a:rPr lang="en-US" dirty="0"/>
-              <a:t/>
-            </a:r>
             <a:endParaRPr lang="en-US" dirty="0"/>
           </a:p>
         </p:txBody>
@@ -1042,10 +799,6 @@
           <a:bodyPr/>
           <a:lstStyle/>
           <a:p>
-            <a:r>
-              <a:rPr lang="en-US" dirty="0"/>
-              <a:t/>
-            </a:r>
             <a:endParaRPr lang="en-US" dirty="0"/>
           </a:p>
         </p:txBody>
@@ -1130,10 +883,6 @@
           <a:bodyPr/>
           <a:lstStyle/>
           <a:p>
-            <a:r>
-              <a:rPr lang="en-US" dirty="0"/>
-              <a:t/>
-            </a:r>
             <a:endParaRPr lang="en-US" dirty="0"/>
           </a:p>
         </p:txBody>
@@ -1218,10 +967,6 @@
           <a:bodyPr/>
           <a:lstStyle/>
           <a:p>
-            <a:r>
-              <a:rPr lang="en-US" dirty="0"/>
-              <a:t/>
-            </a:r>
             <a:endParaRPr lang="en-US" dirty="0"/>
           </a:p>
         </p:txBody>
@@ -1306,10 +1051,6 @@
           <a:bodyPr/>
           <a:lstStyle/>
           <a:p>
-            <a:r>
-              <a:rPr lang="en-US" dirty="0"/>
-              <a:t/>
-            </a:r>
             <a:endParaRPr lang="en-US" dirty="0"/>
           </a:p>
         </p:txBody>
@@ -1394,10 +1135,6 @@
           <a:bodyPr/>
           <a:lstStyle/>
           <a:p>
-            <a:r>
-              <a:rPr lang="en-US" dirty="0"/>
-              <a:t/>
-            </a:r>
             <a:endParaRPr lang="en-US" dirty="0"/>
           </a:p>
         </p:txBody>
@@ -1482,10 +1219,6 @@
           <a:bodyPr/>
           <a:lstStyle/>
           <a:p>
-            <a:r>
-              <a:rPr lang="en-US" dirty="0"/>
-              <a:t/>
-            </a:r>
             <a:endParaRPr lang="en-US" dirty="0"/>
           </a:p>
         </p:txBody>
@@ -1570,10 +1303,6 @@
           <a:bodyPr/>
           <a:lstStyle/>
           <a:p>
-            <a:r>
-              <a:rPr lang="en-US" dirty="0"/>
-              <a:t/>
-            </a:r>
             <a:endParaRPr lang="en-US" dirty="0"/>
           </a:p>
         </p:txBody>
@@ -1658,10 +1387,6 @@
           <a:bodyPr/>
           <a:lstStyle/>
           <a:p>
-            <a:r>
-              <a:rPr lang="en-US" dirty="0"/>
-              <a:t/>
-            </a:r>
             <a:endParaRPr lang="en-US" dirty="0"/>
           </a:p>
         </p:txBody>
@@ -1746,10 +1471,6 @@
           <a:bodyPr/>
           <a:lstStyle/>
           <a:p>
-            <a:r>
-              <a:rPr lang="en-US" dirty="0"/>
-              <a:t/>
-            </a:r>
             <a:endParaRPr lang="en-US" dirty="0"/>
           </a:p>
         </p:txBody>
@@ -1823,6 +1544,11 @@
 <file path=ppt/slideMasters/slideMaster1.xml><?xml version="1.0" encoding="utf-8"?>
 <p:sldMaster xmlns:a="http://schemas.openxmlformats.org/drawingml/2006/main" xmlns:r="http://schemas.openxmlformats.org/officeDocument/2006/relationships" xmlns:p="http://schemas.openxmlformats.org/presentationml/2006/main">
   <p:cSld>
+    <p:bg>
+      <p:bgRef idx="1001">
+        <a:schemeClr val="bg1"/>
+      </p:bgRef>
+    </p:bg>
     <p:spTree>
       <p:nvGrpSpPr>
         <p:cNvPr id="1" name=""/>
@@ -2105,6 +1831,7 @@
         <a:solidFill>
           <a:srgbClr val="0B0F14"/>
         </a:solidFill>
+        <a:effectLst/>
       </p:bgPr>
     </p:bg>
     <p:spTree>
@@ -2142,20 +1869,9 @@
           <a:bodyPr wrap="square" rtlCol="0" anchor="ctr"/>
           <a:lstStyle/>
           <a:p>
-            <a:pPr indent="0" marL="0">
-              <a:buNone/>
-            </a:pPr>
-            <a:r>
-              <a:rPr lang="en-US" sz="1400" b="1" spc="300" kern="0" dirty="0">
-                <a:solidFill>
-                  <a:srgbClr val="2ECC71"/>
-                </a:solidFill>
-                <a:latin typeface="Calibri" pitchFamily="34" charset="0"/>
-                <a:ea typeface="Calibri" pitchFamily="34" charset="-122"/>
-                <a:cs typeface="Calibri" pitchFamily="34" charset="-120"/>
-              </a:rPr>
-              <a:t>CONCEPT NOTE</a:t>
-            </a:r>
+            <a:pPr marL="0" indent="0">
+              <a:buNone/>
+            </a:pPr>
             <a:endParaRPr lang="en-US" sz="1400" dirty="0"/>
           </a:p>
         </p:txBody>
@@ -2181,7 +1897,7 @@
           <a:bodyPr wrap="square" rtlCol="0" anchor="ctr"/>
           <a:lstStyle/>
           <a:p>
-            <a:pPr indent="0" marL="0">
+            <a:pPr marL="0" indent="0">
               <a:lnSpc>
                 <a:spcPct val="105000"/>
               </a:lnSpc>
@@ -2201,7 +1917,7 @@
             <a:endParaRPr lang="en-US" sz="4400" dirty="0"/>
           </a:p>
           <a:p>
-            <a:pPr indent="0" marL="0">
+            <a:pPr marL="0" indent="0">
               <a:lnSpc>
                 <a:spcPct val="105000"/>
               </a:lnSpc>
@@ -2243,7 +1959,7 @@
           <a:bodyPr wrap="square" rtlCol="0" anchor="ctr"/>
           <a:lstStyle/>
           <a:p>
-            <a:pPr indent="0" marL="0">
+            <a:pPr marL="0" indent="0">
               <a:buNone/>
             </a:pPr>
             <a:r>
@@ -2282,11 +1998,11 @@
           <a:bodyPr wrap="square" rtlCol="0" anchor="ctr"/>
           <a:lstStyle/>
           <a:p>
-            <a:pPr indent="0" marL="0">
-              <a:buNone/>
-            </a:pPr>
-            <a:r>
-              <a:rPr lang="en-US" sz="1200" spc="100" kern="0" dirty="0">
+            <a:pPr marL="0" indent="0">
+              <a:buNone/>
+            </a:pPr>
+            <a:r>
+              <a:rPr lang="en-US" sz="1200" kern="0" spc="100" dirty="0">
                 <a:solidFill>
                   <a:srgbClr val="2ECC71"/>
                 </a:solidFill>
@@ -2302,14 +2018,14 @@
       </p:sp>
       <p:pic>
         <p:nvPicPr>
-          <p:cNvPr id="6" name="Image 0" descr="/mnt/user-data/uploads/Screenshot_2026-07-07_151617.png">    </p:cNvPr>
+          <p:cNvPr id="6" name="Image 0" descr="/mnt/user-data/uploads/Screenshot_2026-07-07_151617.png"/>
           <p:cNvPicPr>
             <a:picLocks noChangeAspect="1"/>
           </p:cNvPicPr>
           <p:nvPr/>
         </p:nvPicPr>
         <p:blipFill>
-          <a:blip r:embed="rId1"/>
+          <a:blip r:embed="rId3"/>
           <a:stretch>
             <a:fillRect/>
           </a:stretch>
@@ -2323,7 +2039,7 @@
             <a:avLst/>
           </a:prstGeom>
           <a:effectLst>
-            <a:outerShdw sx="100000" sy="100000" kx="0" ky="0" algn="bl" rotWithShape="0" blurRad="177800" dist="50800" dir="5400000">
+            <a:outerShdw blurRad="177800" dist="50800" dir="5400000" algn="bl" rotWithShape="0">
               <a:srgbClr val="000000">
                 <a:alpha val="40000"/>
               </a:srgbClr>
@@ -2352,7 +2068,7 @@
           <a:bodyPr wrap="square" rtlCol="0" anchor="ctr"/>
           <a:lstStyle/>
           <a:p>
-            <a:pPr algn="r" indent="0" marL="0">
+            <a:pPr marL="0" indent="0" algn="r">
               <a:buNone/>
             </a:pPr>
             <a:r>
@@ -2386,6 +2102,7 @@
         <a:solidFill>
           <a:srgbClr val="0B0F14"/>
         </a:solidFill>
+        <a:effectLst/>
       </p:bgPr>
     </p:bg>
     <p:spTree>
@@ -2423,11 +2140,11 @@
           <a:bodyPr wrap="square" rtlCol="0" anchor="ctr"/>
           <a:lstStyle/>
           <a:p>
-            <a:pPr indent="0" marL="0">
-              <a:buNone/>
-            </a:pPr>
-            <a:r>
-              <a:rPr lang="en-US" sz="1300" b="1" spc="200" kern="0" dirty="0">
+            <a:pPr marL="0" indent="0">
+              <a:buNone/>
+            </a:pPr>
+            <a:r>
+              <a:rPr lang="en-US" sz="1300" b="1" kern="0" spc="200" dirty="0">
                 <a:solidFill>
                   <a:srgbClr val="2ECC71"/>
                 </a:solidFill>
@@ -2462,7 +2179,7 @@
           <a:bodyPr wrap="square" rtlCol="0" anchor="ctr"/>
           <a:lstStyle/>
           <a:p>
-            <a:pPr indent="0" marL="0">
+            <a:pPr marL="0" indent="0">
               <a:buNone/>
             </a:pPr>
             <a:r>
@@ -2482,14 +2199,14 @@
       </p:sp>
       <p:pic>
         <p:nvPicPr>
-          <p:cNvPr id="4" name="Image 0" descr="/mnt/user-data/uploads/10.png">    </p:cNvPr>
+          <p:cNvPr id="4" name="Image 0" descr="/mnt/user-data/uploads/10.png"/>
           <p:cNvPicPr>
             <a:picLocks noChangeAspect="1"/>
           </p:cNvPicPr>
           <p:nvPr/>
         </p:nvPicPr>
         <p:blipFill>
-          <a:blip r:embed="rId1"/>
+          <a:blip r:embed="rId3"/>
           <a:stretch>
             <a:fillRect/>
           </a:stretch>
@@ -2503,7 +2220,7 @@
             <a:avLst/>
           </a:prstGeom>
           <a:effectLst>
-            <a:outerShdw sx="100000" sy="100000" kx="0" ky="0" algn="bl" rotWithShape="0" blurRad="101600" dist="38100" dir="5400000">
+            <a:outerShdw blurRad="101600" dist="38100" dir="5400000" algn="bl" rotWithShape="0">
               <a:srgbClr val="000000">
                 <a:alpha val="35000"/>
               </a:srgbClr>
@@ -2532,7 +2249,7 @@
           <a:bodyPr wrap="square" rtlCol="0" anchor="ctr"/>
           <a:lstStyle/>
           <a:p>
-            <a:pPr algn="ctr" indent="0" marL="0">
+            <a:pPr marL="0" indent="0" algn="ctr">
               <a:buNone/>
             </a:pPr>
             <a:r>
@@ -2552,14 +2269,14 @@
       </p:sp>
       <p:pic>
         <p:nvPicPr>
-          <p:cNvPr id="6" name="Image 1" descr="/mnt/user-data/uploads/11.png">    </p:cNvPr>
+          <p:cNvPr id="6" name="Image 1" descr="/mnt/user-data/uploads/11.png"/>
           <p:cNvPicPr>
             <a:picLocks noChangeAspect="1"/>
           </p:cNvPicPr>
           <p:nvPr/>
         </p:nvPicPr>
         <p:blipFill>
-          <a:blip r:embed="rId2"/>
+          <a:blip r:embed="rId4"/>
           <a:stretch>
             <a:fillRect/>
           </a:stretch>
@@ -2573,7 +2290,7 @@
             <a:avLst/>
           </a:prstGeom>
           <a:effectLst>
-            <a:outerShdw sx="100000" sy="100000" kx="0" ky="0" algn="bl" rotWithShape="0" blurRad="101600" dist="38100" dir="5400000">
+            <a:outerShdw blurRad="101600" dist="38100" dir="5400000" algn="bl" rotWithShape="0">
               <a:srgbClr val="000000">
                 <a:alpha val="35000"/>
               </a:srgbClr>
@@ -2602,7 +2319,7 @@
           <a:bodyPr wrap="square" rtlCol="0" anchor="ctr"/>
           <a:lstStyle/>
           <a:p>
-            <a:pPr algn="ctr" indent="0" marL="0">
+            <a:pPr marL="0" indent="0" algn="ctr">
               <a:buNone/>
             </a:pPr>
             <a:r>
@@ -2641,7 +2358,7 @@
           <a:bodyPr wrap="square" rtlCol="0" anchor="ctr"/>
           <a:lstStyle/>
           <a:p>
-            <a:pPr algn="r" indent="0" marL="0">
+            <a:pPr marL="0" indent="0" algn="r">
               <a:buNone/>
             </a:pPr>
             <a:r>
@@ -2675,6 +2392,7 @@
         <a:solidFill>
           <a:srgbClr val="0B0F14"/>
         </a:solidFill>
+        <a:effectLst/>
       </p:bgPr>
     </p:bg>
     <p:spTree>
@@ -2712,11 +2430,11 @@
           <a:bodyPr wrap="square" rtlCol="0" anchor="ctr"/>
           <a:lstStyle/>
           <a:p>
-            <a:pPr indent="0" marL="0">
-              <a:buNone/>
-            </a:pPr>
-            <a:r>
-              <a:rPr lang="en-US" sz="1300" b="1" spc="200" kern="0" dirty="0">
+            <a:pPr marL="0" indent="0">
+              <a:buNone/>
+            </a:pPr>
+            <a:r>
+              <a:rPr lang="en-US" sz="1300" b="1" kern="0" spc="200" dirty="0">
                 <a:solidFill>
                   <a:srgbClr val="2ECC71"/>
                 </a:solidFill>
@@ -2751,7 +2469,7 @@
           <a:bodyPr wrap="square" rtlCol="0" anchor="ctr"/>
           <a:lstStyle/>
           <a:p>
-            <a:pPr indent="0" marL="0">
+            <a:pPr marL="0" indent="0">
               <a:buNone/>
             </a:pPr>
             <a:r>
@@ -2813,301 +2531,7 @@
       </p:sp>
       <p:pic>
         <p:nvPicPr>
-          <p:cNvPr id="6" name="Image 0" descr="preencoded.png">    </p:cNvPr>
-          <p:cNvPicPr>
-            <a:picLocks noChangeAspect="1"/>
-          </p:cNvPicPr>
-          <p:nvPr/>
-        </p:nvPicPr>
-        <p:blipFill>
-          <a:blip r:embed="rId1"/>
-          <a:stretch>
-            <a:fillRect/>
-          </a:stretch>
-        </p:blipFill>
-        <p:spPr>
-          <a:xfrm>
-            <a:off x="1709014" y="2143354"/>
-            <a:ext cx="285293" cy="285293"/>
-          </a:xfrm>
-          <a:prstGeom prst="rect">
-            <a:avLst/>
-          </a:prstGeom>
-        </p:spPr>
-      </p:pic>
-      <p:sp>
-        <p:nvSpPr>
-          <p:cNvPr id="7" name="Text 4"/>
-          <p:cNvSpPr/>
-          <p:nvPr/>
-        </p:nvSpPr>
-        <p:spPr>
-          <a:xfrm>
-            <a:off x="731520" y="2743200"/>
-            <a:ext cx="2240280" cy="548640"/>
-          </a:xfrm>
-          <a:prstGeom prst="rect">
-            <a:avLst/>
-          </a:prstGeom>
-          <a:noFill/>
-          <a:ln/>
-        </p:spPr>
-        <p:txBody>
-          <a:bodyPr wrap="square" rtlCol="0" anchor="t"/>
-          <a:lstStyle/>
-          <a:p>
-            <a:pPr algn="ctr" indent="0" marL="0">
-              <a:buNone/>
-            </a:pPr>
-            <a:r>
-              <a:rPr lang="en-US" sz="1400" b="1" dirty="0">
-                <a:solidFill>
-                  <a:srgbClr val="F2F5F3"/>
-                </a:solidFill>
-                <a:latin typeface="Calibri" pitchFamily="34" charset="0"/>
-                <a:ea typeface="Calibri" pitchFamily="34" charset="-122"/>
-                <a:cs typeface="Calibri" pitchFamily="34" charset="-120"/>
-              </a:rPr>
-              <a:t>Restaurants &amp; Cafes</a:t>
-            </a:r>
-            <a:endParaRPr lang="en-US" sz="1400" dirty="0"/>
-          </a:p>
-        </p:txBody>
-      </p:sp>
-      <p:sp>
-        <p:nvSpPr>
-          <p:cNvPr id="8" name="Text 5"/>
-          <p:cNvSpPr/>
-          <p:nvPr/>
-        </p:nvSpPr>
-        <p:spPr>
-          <a:xfrm>
-            <a:off x="777240" y="3291840"/>
-            <a:ext cx="2148840" cy="1005840"/>
-          </a:xfrm>
-          <a:prstGeom prst="rect">
-            <a:avLst/>
-          </a:prstGeom>
-          <a:noFill/>
-          <a:ln/>
-        </p:spPr>
-        <p:txBody>
-          <a:bodyPr wrap="square" rtlCol="0" anchor="ctr"/>
-          <a:lstStyle/>
-          <a:p>
-            <a:pPr algn="ctr" indent="0" marL="0">
-              <a:lnSpc>
-                <a:spcPct val="120000"/>
-              </a:lnSpc>
-              <a:buNone/>
-            </a:pPr>
-            <a:r>
-              <a:rPr lang="en-US" sz="1100" dirty="0">
-                <a:solidFill>
-                  <a:srgbClr val="9AA5AC"/>
-                </a:solidFill>
-                <a:latin typeface="Calibri" pitchFamily="34" charset="0"/>
-                <a:ea typeface="Calibri" pitchFamily="34" charset="-122"/>
-                <a:cs typeface="Calibri" pitchFamily="34" charset="-120"/>
-              </a:rPr>
-              <a:t>Reduce daily operational waste and automate environmental compliance data</a:t>
-            </a:r>
-            <a:endParaRPr lang="en-US" sz="1100" dirty="0"/>
-          </a:p>
-        </p:txBody>
-      </p:sp>
-      <p:sp>
-        <p:nvSpPr>
-          <p:cNvPr id="9" name="Shape 6"/>
-          <p:cNvSpPr/>
-          <p:nvPr/>
-        </p:nvSpPr>
-        <p:spPr>
-          <a:xfrm>
-            <a:off x="3410712" y="1691640"/>
-            <a:ext cx="2606040" cy="2743200"/>
-          </a:xfrm>
-          <a:prstGeom prst="roundRect">
-            <a:avLst>
-              <a:gd name="adj" fmla="val 3158"/>
-            </a:avLst>
-          </a:prstGeom>
-          <a:solidFill>
-            <a:srgbClr val="141A21"/>
-          </a:solidFill>
-          <a:ln/>
-        </p:spPr>
-      </p:sp>
-      <p:sp>
-        <p:nvSpPr>
-          <p:cNvPr id="10" name="Shape 7"/>
-          <p:cNvSpPr/>
-          <p:nvPr/>
-        </p:nvSpPr>
-        <p:spPr>
-          <a:xfrm>
-            <a:off x="4439412" y="2011680"/>
-            <a:ext cx="548640" cy="548640"/>
-          </a:xfrm>
-          <a:prstGeom prst="ellipse">
-            <a:avLst/>
-          </a:prstGeom>
-          <a:solidFill>
-            <a:srgbClr val="2ECC71"/>
-          </a:solidFill>
-          <a:ln/>
-        </p:spPr>
-      </p:sp>
-      <p:pic>
-        <p:nvPicPr>
-          <p:cNvPr id="11" name="Image 1" descr="preencoded.png">    </p:cNvPr>
-          <p:cNvPicPr>
-            <a:picLocks noChangeAspect="1"/>
-          </p:cNvPicPr>
-          <p:nvPr/>
-        </p:nvPicPr>
-        <p:blipFill>
-          <a:blip r:embed="rId2"/>
-          <a:stretch>
-            <a:fillRect/>
-          </a:stretch>
-        </p:blipFill>
-        <p:spPr>
-          <a:xfrm>
-            <a:off x="4571086" y="2143354"/>
-            <a:ext cx="285293" cy="285293"/>
-          </a:xfrm>
-          <a:prstGeom prst="rect">
-            <a:avLst/>
-          </a:prstGeom>
-        </p:spPr>
-      </p:pic>
-      <p:sp>
-        <p:nvSpPr>
-          <p:cNvPr id="12" name="Text 8"/>
-          <p:cNvSpPr/>
-          <p:nvPr/>
-        </p:nvSpPr>
-        <p:spPr>
-          <a:xfrm>
-            <a:off x="3593592" y="2743200"/>
-            <a:ext cx="2240280" cy="548640"/>
-          </a:xfrm>
-          <a:prstGeom prst="rect">
-            <a:avLst/>
-          </a:prstGeom>
-          <a:noFill/>
-          <a:ln/>
-        </p:spPr>
-        <p:txBody>
-          <a:bodyPr wrap="square" rtlCol="0" anchor="t"/>
-          <a:lstStyle/>
-          <a:p>
-            <a:pPr algn="ctr" indent="0" marL="0">
-              <a:buNone/>
-            </a:pPr>
-            <a:r>
-              <a:rPr lang="en-US" sz="1400" b="1" dirty="0">
-                <a:solidFill>
-                  <a:srgbClr val="F2F5F3"/>
-                </a:solidFill>
-                <a:latin typeface="Calibri" pitchFamily="34" charset="0"/>
-                <a:ea typeface="Calibri" pitchFamily="34" charset="-122"/>
-                <a:cs typeface="Calibri" pitchFamily="34" charset="-120"/>
-              </a:rPr>
-              <a:t>Non-Profits &amp; Shelters</a:t>
-            </a:r>
-            <a:endParaRPr lang="en-US" sz="1400" dirty="0"/>
-          </a:p>
-        </p:txBody>
-      </p:sp>
-      <p:sp>
-        <p:nvSpPr>
-          <p:cNvPr id="13" name="Text 9"/>
-          <p:cNvSpPr/>
-          <p:nvPr/>
-        </p:nvSpPr>
-        <p:spPr>
-          <a:xfrm>
-            <a:off x="3639312" y="3291840"/>
-            <a:ext cx="2148840" cy="1005840"/>
-          </a:xfrm>
-          <a:prstGeom prst="rect">
-            <a:avLst/>
-          </a:prstGeom>
-          <a:noFill/>
-          <a:ln/>
-        </p:spPr>
-        <p:txBody>
-          <a:bodyPr wrap="square" rtlCol="0" anchor="ctr"/>
-          <a:lstStyle/>
-          <a:p>
-            <a:pPr algn="ctr" indent="0" marL="0">
-              <a:lnSpc>
-                <a:spcPct val="120000"/>
-              </a:lnSpc>
-              <a:buNone/>
-            </a:pPr>
-            <a:r>
-              <a:rPr lang="en-US" sz="1100" dirty="0">
-                <a:solidFill>
-                  <a:srgbClr val="9AA5AC"/>
-                </a:solidFill>
-                <a:latin typeface="Calibri" pitchFamily="34" charset="0"/>
-                <a:ea typeface="Calibri" pitchFamily="34" charset="-122"/>
-                <a:cs typeface="Calibri" pitchFamily="34" charset="-120"/>
-              </a:rPr>
-              <a:t>Organized intake timelines to prepare warehouse capacity for inbound volume</a:t>
-            </a:r>
-            <a:endParaRPr lang="en-US" sz="1100" dirty="0"/>
-          </a:p>
-        </p:txBody>
-      </p:sp>
-      <p:sp>
-        <p:nvSpPr>
-          <p:cNvPr id="14" name="Shape 10"/>
-          <p:cNvSpPr/>
-          <p:nvPr/>
-        </p:nvSpPr>
-        <p:spPr>
-          <a:xfrm>
-            <a:off x="6272784" y="1691640"/>
-            <a:ext cx="2606040" cy="2743200"/>
-          </a:xfrm>
-          <a:prstGeom prst="roundRect">
-            <a:avLst>
-              <a:gd name="adj" fmla="val 3158"/>
-            </a:avLst>
-          </a:prstGeom>
-          <a:solidFill>
-            <a:srgbClr val="141A21"/>
-          </a:solidFill>
-          <a:ln/>
-        </p:spPr>
-      </p:sp>
-      <p:sp>
-        <p:nvSpPr>
-          <p:cNvPr id="15" name="Shape 11"/>
-          <p:cNvSpPr/>
-          <p:nvPr/>
-        </p:nvSpPr>
-        <p:spPr>
-          <a:xfrm>
-            <a:off x="7301484" y="2011680"/>
-            <a:ext cx="548640" cy="548640"/>
-          </a:xfrm>
-          <a:prstGeom prst="ellipse">
-            <a:avLst/>
-          </a:prstGeom>
-          <a:solidFill>
-            <a:srgbClr val="2ECC71"/>
-          </a:solidFill>
-          <a:ln/>
-        </p:spPr>
-      </p:sp>
-      <p:pic>
-        <p:nvPicPr>
-          <p:cNvPr id="16" name="Image 2" descr="preencoded.png">    </p:cNvPr>
+          <p:cNvPr id="6" name="Image 0" descr="preencoded.png"/>
           <p:cNvPicPr>
             <a:picLocks noChangeAspect="1"/>
           </p:cNvPicPr>
@@ -3121,7 +2545,7 @@
         </p:blipFill>
         <p:spPr>
           <a:xfrm>
-            <a:off x="7433158" y="2143354"/>
+            <a:off x="1709014" y="2143354"/>
             <a:ext cx="285293" cy="285293"/>
           </a:xfrm>
           <a:prstGeom prst="rect">
@@ -3131,13 +2555,13 @@
       </p:pic>
       <p:sp>
         <p:nvSpPr>
-          <p:cNvPr id="17" name="Text 12"/>
-          <p:cNvSpPr/>
-          <p:nvPr/>
-        </p:nvSpPr>
-        <p:spPr>
-          <a:xfrm>
-            <a:off x="6455664" y="2743200"/>
+          <p:cNvPr id="7" name="Text 4"/>
+          <p:cNvSpPr/>
+          <p:nvPr/>
+        </p:nvSpPr>
+        <p:spPr>
+          <a:xfrm>
+            <a:off x="731520" y="2743200"/>
             <a:ext cx="2240280" cy="548640"/>
           </a:xfrm>
           <a:prstGeom prst="rect">
@@ -3150,7 +2574,7 @@
           <a:bodyPr wrap="square" rtlCol="0" anchor="t"/>
           <a:lstStyle/>
           <a:p>
-            <a:pPr algn="ctr" indent="0" marL="0">
+            <a:pPr marL="0" indent="0" algn="ctr">
               <a:buNone/>
             </a:pPr>
             <a:r>
@@ -3162,7 +2586,7 @@
                 <a:ea typeface="Calibri" pitchFamily="34" charset="-122"/>
                 <a:cs typeface="Calibri" pitchFamily="34" charset="-120"/>
               </a:rPr>
-              <a:t>Corporate CSR Teams</a:t>
+              <a:t>Restaurants &amp; Cafes</a:t>
             </a:r>
             <a:endParaRPr lang="en-US" sz="1400" dirty="0"/>
           </a:p>
@@ -3170,13 +2594,13 @@
       </p:sp>
       <p:sp>
         <p:nvSpPr>
-          <p:cNvPr id="18" name="Text 13"/>
-          <p:cNvSpPr/>
-          <p:nvPr/>
-        </p:nvSpPr>
-        <p:spPr>
-          <a:xfrm>
-            <a:off x="6501384" y="3291840"/>
+          <p:cNvPr id="8" name="Text 5"/>
+          <p:cNvSpPr/>
+          <p:nvPr/>
+        </p:nvSpPr>
+        <p:spPr>
+          <a:xfrm>
+            <a:off x="777240" y="3291840"/>
             <a:ext cx="2148840" cy="1005840"/>
           </a:xfrm>
           <a:prstGeom prst="rect">
@@ -3189,7 +2613,7 @@
           <a:bodyPr wrap="square" rtlCol="0" anchor="ctr"/>
           <a:lstStyle/>
           <a:p>
-            <a:pPr algn="ctr" indent="0" marL="0">
+            <a:pPr marL="0" indent="0" algn="ctr">
               <a:lnSpc>
                 <a:spcPct val="120000"/>
               </a:lnSpc>
@@ -3204,7 +2628,7 @@
                 <a:ea typeface="Calibri" pitchFamily="34" charset="-122"/>
                 <a:cs typeface="Calibri" pitchFamily="34" charset="-120"/>
               </a:rPr>
-              <a:t>Auditable sustainability indices for year-end corporate reporting</a:t>
+              <a:t>Reduce daily operational waste and automate environmental compliance data</a:t>
             </a:r>
             <a:endParaRPr lang="en-US" sz="1100" dirty="0"/>
           </a:p>
@@ -3212,13 +2636,13 @@
       </p:sp>
       <p:sp>
         <p:nvSpPr>
-          <p:cNvPr id="19" name="Shape 14"/>
-          <p:cNvSpPr/>
-          <p:nvPr/>
-        </p:nvSpPr>
-        <p:spPr>
-          <a:xfrm>
-            <a:off x="9134856" y="1691640"/>
+          <p:cNvPr id="9" name="Shape 6"/>
+          <p:cNvSpPr/>
+          <p:nvPr/>
+        </p:nvSpPr>
+        <p:spPr>
+          <a:xfrm>
+            <a:off x="3410712" y="1691640"/>
             <a:ext cx="2606040" cy="2743200"/>
           </a:xfrm>
           <a:prstGeom prst="roundRect">
@@ -3234,13 +2658,13 @@
       </p:sp>
       <p:sp>
         <p:nvSpPr>
-          <p:cNvPr id="20" name="Shape 15"/>
-          <p:cNvSpPr/>
-          <p:nvPr/>
-        </p:nvSpPr>
-        <p:spPr>
-          <a:xfrm>
-            <a:off x="10163556" y="2011680"/>
+          <p:cNvPr id="10" name="Shape 7"/>
+          <p:cNvSpPr/>
+          <p:nvPr/>
+        </p:nvSpPr>
+        <p:spPr>
+          <a:xfrm>
+            <a:off x="4439412" y="2011680"/>
             <a:ext cx="548640" cy="548640"/>
           </a:xfrm>
           <a:prstGeom prst="ellipse">
@@ -3254,7 +2678,7 @@
       </p:sp>
       <p:pic>
         <p:nvPicPr>
-          <p:cNvPr id="21" name="Image 3" descr="preencoded.png">    </p:cNvPr>
+          <p:cNvPr id="11" name="Image 1" descr="preencoded.png"/>
           <p:cNvPicPr>
             <a:picLocks noChangeAspect="1"/>
           </p:cNvPicPr>
@@ -3268,7 +2692,7 @@
         </p:blipFill>
         <p:spPr>
           <a:xfrm>
-            <a:off x="10295230" y="2143354"/>
+            <a:off x="4571086" y="2143354"/>
             <a:ext cx="285293" cy="285293"/>
           </a:xfrm>
           <a:prstGeom prst="rect">
@@ -3278,13 +2702,13 @@
       </p:pic>
       <p:sp>
         <p:nvSpPr>
-          <p:cNvPr id="22" name="Text 16"/>
-          <p:cNvSpPr/>
-          <p:nvPr/>
-        </p:nvSpPr>
-        <p:spPr>
-          <a:xfrm>
-            <a:off x="9317736" y="2743200"/>
+          <p:cNvPr id="12" name="Text 8"/>
+          <p:cNvSpPr/>
+          <p:nvPr/>
+        </p:nvSpPr>
+        <p:spPr>
+          <a:xfrm>
+            <a:off x="3593592" y="2743200"/>
             <a:ext cx="2240280" cy="548640"/>
           </a:xfrm>
           <a:prstGeom prst="rect">
@@ -3297,7 +2721,7 @@
           <a:bodyPr wrap="square" rtlCol="0" anchor="t"/>
           <a:lstStyle/>
           <a:p>
-            <a:pPr algn="ctr" indent="0" marL="0">
+            <a:pPr marL="0" indent="0" algn="ctr">
               <a:buNone/>
             </a:pPr>
             <a:r>
@@ -3309,7 +2733,7 @@
                 <a:ea typeface="Calibri" pitchFamily="34" charset="-122"/>
                 <a:cs typeface="Calibri" pitchFamily="34" charset="-120"/>
               </a:rPr>
-              <a:t>Independent Couriers</a:t>
+              <a:t>Non-Profits &amp; Shelters</a:t>
             </a:r>
             <a:endParaRPr lang="en-US" sz="1400" dirty="0"/>
           </a:p>
@@ -3317,13 +2741,13 @@
       </p:sp>
       <p:sp>
         <p:nvSpPr>
-          <p:cNvPr id="23" name="Text 17"/>
-          <p:cNvSpPr/>
-          <p:nvPr/>
-        </p:nvSpPr>
-        <p:spPr>
-          <a:xfrm>
-            <a:off x="9363456" y="3291840"/>
+          <p:cNvPr id="13" name="Text 9"/>
+          <p:cNvSpPr/>
+          <p:nvPr/>
+        </p:nvSpPr>
+        <p:spPr>
+          <a:xfrm>
+            <a:off x="3639312" y="3291840"/>
             <a:ext cx="2148840" cy="1005840"/>
           </a:xfrm>
           <a:prstGeom prst="rect">
@@ -3336,7 +2760,7 @@
           <a:bodyPr wrap="square" rtlCol="0" anchor="ctr"/>
           <a:lstStyle/>
           <a:p>
-            <a:pPr algn="ctr" indent="0" marL="0">
+            <a:pPr marL="0" indent="0" algn="ctr">
               <a:lnSpc>
                 <a:spcPct val="120000"/>
               </a:lnSpc>
@@ -3351,6 +2775,300 @@
                 <a:ea typeface="Calibri" pitchFamily="34" charset="-122"/>
                 <a:cs typeface="Calibri" pitchFamily="34" charset="-120"/>
               </a:rPr>
+              <a:t>Organized intake timelines to prepare warehouse capacity for inbound volume</a:t>
+            </a:r>
+            <a:endParaRPr lang="en-US" sz="1100" dirty="0"/>
+          </a:p>
+        </p:txBody>
+      </p:sp>
+      <p:sp>
+        <p:nvSpPr>
+          <p:cNvPr id="14" name="Shape 10"/>
+          <p:cNvSpPr/>
+          <p:nvPr/>
+        </p:nvSpPr>
+        <p:spPr>
+          <a:xfrm>
+            <a:off x="6272784" y="1691640"/>
+            <a:ext cx="2606040" cy="2743200"/>
+          </a:xfrm>
+          <a:prstGeom prst="roundRect">
+            <a:avLst>
+              <a:gd name="adj" fmla="val 3158"/>
+            </a:avLst>
+          </a:prstGeom>
+          <a:solidFill>
+            <a:srgbClr val="141A21"/>
+          </a:solidFill>
+          <a:ln/>
+        </p:spPr>
+      </p:sp>
+      <p:sp>
+        <p:nvSpPr>
+          <p:cNvPr id="15" name="Shape 11"/>
+          <p:cNvSpPr/>
+          <p:nvPr/>
+        </p:nvSpPr>
+        <p:spPr>
+          <a:xfrm>
+            <a:off x="7301484" y="2011680"/>
+            <a:ext cx="548640" cy="548640"/>
+          </a:xfrm>
+          <a:prstGeom prst="ellipse">
+            <a:avLst/>
+          </a:prstGeom>
+          <a:solidFill>
+            <a:srgbClr val="2ECC71"/>
+          </a:solidFill>
+          <a:ln/>
+        </p:spPr>
+      </p:sp>
+      <p:pic>
+        <p:nvPicPr>
+          <p:cNvPr id="16" name="Image 2" descr="preencoded.png"/>
+          <p:cNvPicPr>
+            <a:picLocks noChangeAspect="1"/>
+          </p:cNvPicPr>
+          <p:nvPr/>
+        </p:nvPicPr>
+        <p:blipFill>
+          <a:blip r:embed="rId5"/>
+          <a:stretch>
+            <a:fillRect/>
+          </a:stretch>
+        </p:blipFill>
+        <p:spPr>
+          <a:xfrm>
+            <a:off x="7433158" y="2143354"/>
+            <a:ext cx="285293" cy="285293"/>
+          </a:xfrm>
+          <a:prstGeom prst="rect">
+            <a:avLst/>
+          </a:prstGeom>
+        </p:spPr>
+      </p:pic>
+      <p:sp>
+        <p:nvSpPr>
+          <p:cNvPr id="17" name="Text 12"/>
+          <p:cNvSpPr/>
+          <p:nvPr/>
+        </p:nvSpPr>
+        <p:spPr>
+          <a:xfrm>
+            <a:off x="6455664" y="2743200"/>
+            <a:ext cx="2240280" cy="548640"/>
+          </a:xfrm>
+          <a:prstGeom prst="rect">
+            <a:avLst/>
+          </a:prstGeom>
+          <a:noFill/>
+          <a:ln/>
+        </p:spPr>
+        <p:txBody>
+          <a:bodyPr wrap="square" rtlCol="0" anchor="t"/>
+          <a:lstStyle/>
+          <a:p>
+            <a:pPr marL="0" indent="0" algn="ctr">
+              <a:buNone/>
+            </a:pPr>
+            <a:r>
+              <a:rPr lang="en-US" sz="1400" b="1" dirty="0">
+                <a:solidFill>
+                  <a:srgbClr val="F2F5F3"/>
+                </a:solidFill>
+                <a:latin typeface="Calibri" pitchFamily="34" charset="0"/>
+                <a:ea typeface="Calibri" pitchFamily="34" charset="-122"/>
+                <a:cs typeface="Calibri" pitchFamily="34" charset="-120"/>
+              </a:rPr>
+              <a:t>Corporate CSR Teams</a:t>
+            </a:r>
+            <a:endParaRPr lang="en-US" sz="1400" dirty="0"/>
+          </a:p>
+        </p:txBody>
+      </p:sp>
+      <p:sp>
+        <p:nvSpPr>
+          <p:cNvPr id="18" name="Text 13"/>
+          <p:cNvSpPr/>
+          <p:nvPr/>
+        </p:nvSpPr>
+        <p:spPr>
+          <a:xfrm>
+            <a:off x="6501384" y="3291840"/>
+            <a:ext cx="2148840" cy="1005840"/>
+          </a:xfrm>
+          <a:prstGeom prst="rect">
+            <a:avLst/>
+          </a:prstGeom>
+          <a:noFill/>
+          <a:ln/>
+        </p:spPr>
+        <p:txBody>
+          <a:bodyPr wrap="square" rtlCol="0" anchor="ctr"/>
+          <a:lstStyle/>
+          <a:p>
+            <a:pPr marL="0" indent="0" algn="ctr">
+              <a:lnSpc>
+                <a:spcPct val="120000"/>
+              </a:lnSpc>
+              <a:buNone/>
+            </a:pPr>
+            <a:r>
+              <a:rPr lang="en-US" sz="1100" dirty="0">
+                <a:solidFill>
+                  <a:srgbClr val="9AA5AC"/>
+                </a:solidFill>
+                <a:latin typeface="Calibri" pitchFamily="34" charset="0"/>
+                <a:ea typeface="Calibri" pitchFamily="34" charset="-122"/>
+                <a:cs typeface="Calibri" pitchFamily="34" charset="-120"/>
+              </a:rPr>
+              <a:t>Auditable sustainability indices for year-end corporate reporting</a:t>
+            </a:r>
+            <a:endParaRPr lang="en-US" sz="1100" dirty="0"/>
+          </a:p>
+        </p:txBody>
+      </p:sp>
+      <p:sp>
+        <p:nvSpPr>
+          <p:cNvPr id="19" name="Shape 14"/>
+          <p:cNvSpPr/>
+          <p:nvPr/>
+        </p:nvSpPr>
+        <p:spPr>
+          <a:xfrm>
+            <a:off x="9134856" y="1691640"/>
+            <a:ext cx="2606040" cy="2743200"/>
+          </a:xfrm>
+          <a:prstGeom prst="roundRect">
+            <a:avLst>
+              <a:gd name="adj" fmla="val 3158"/>
+            </a:avLst>
+          </a:prstGeom>
+          <a:solidFill>
+            <a:srgbClr val="141A21"/>
+          </a:solidFill>
+          <a:ln/>
+        </p:spPr>
+      </p:sp>
+      <p:sp>
+        <p:nvSpPr>
+          <p:cNvPr id="20" name="Shape 15"/>
+          <p:cNvSpPr/>
+          <p:nvPr/>
+        </p:nvSpPr>
+        <p:spPr>
+          <a:xfrm>
+            <a:off x="10163556" y="2011680"/>
+            <a:ext cx="548640" cy="548640"/>
+          </a:xfrm>
+          <a:prstGeom prst="ellipse">
+            <a:avLst/>
+          </a:prstGeom>
+          <a:solidFill>
+            <a:srgbClr val="2ECC71"/>
+          </a:solidFill>
+          <a:ln/>
+        </p:spPr>
+      </p:sp>
+      <p:pic>
+        <p:nvPicPr>
+          <p:cNvPr id="21" name="Image 3" descr="preencoded.png"/>
+          <p:cNvPicPr>
+            <a:picLocks noChangeAspect="1"/>
+          </p:cNvPicPr>
+          <p:nvPr/>
+        </p:nvPicPr>
+        <p:blipFill>
+          <a:blip r:embed="rId6"/>
+          <a:stretch>
+            <a:fillRect/>
+          </a:stretch>
+        </p:blipFill>
+        <p:spPr>
+          <a:xfrm>
+            <a:off x="10295230" y="2143354"/>
+            <a:ext cx="285293" cy="285293"/>
+          </a:xfrm>
+          <a:prstGeom prst="rect">
+            <a:avLst/>
+          </a:prstGeom>
+        </p:spPr>
+      </p:pic>
+      <p:sp>
+        <p:nvSpPr>
+          <p:cNvPr id="22" name="Text 16"/>
+          <p:cNvSpPr/>
+          <p:nvPr/>
+        </p:nvSpPr>
+        <p:spPr>
+          <a:xfrm>
+            <a:off x="9317736" y="2743200"/>
+            <a:ext cx="2240280" cy="548640"/>
+          </a:xfrm>
+          <a:prstGeom prst="rect">
+            <a:avLst/>
+          </a:prstGeom>
+          <a:noFill/>
+          <a:ln/>
+        </p:spPr>
+        <p:txBody>
+          <a:bodyPr wrap="square" rtlCol="0" anchor="t"/>
+          <a:lstStyle/>
+          <a:p>
+            <a:pPr marL="0" indent="0" algn="ctr">
+              <a:buNone/>
+            </a:pPr>
+            <a:r>
+              <a:rPr lang="en-US" sz="1400" b="1" dirty="0">
+                <a:solidFill>
+                  <a:srgbClr val="F2F5F3"/>
+                </a:solidFill>
+                <a:latin typeface="Calibri" pitchFamily="34" charset="0"/>
+                <a:ea typeface="Calibri" pitchFamily="34" charset="-122"/>
+                <a:cs typeface="Calibri" pitchFamily="34" charset="-120"/>
+              </a:rPr>
+              <a:t>Independent Couriers</a:t>
+            </a:r>
+            <a:endParaRPr lang="en-US" sz="1400" dirty="0"/>
+          </a:p>
+        </p:txBody>
+      </p:sp>
+      <p:sp>
+        <p:nvSpPr>
+          <p:cNvPr id="23" name="Text 17"/>
+          <p:cNvSpPr/>
+          <p:nvPr/>
+        </p:nvSpPr>
+        <p:spPr>
+          <a:xfrm>
+            <a:off x="9363456" y="3291840"/>
+            <a:ext cx="2148840" cy="1005840"/>
+          </a:xfrm>
+          <a:prstGeom prst="rect">
+            <a:avLst/>
+          </a:prstGeom>
+          <a:noFill/>
+          <a:ln/>
+        </p:spPr>
+        <p:txBody>
+          <a:bodyPr wrap="square" rtlCol="0" anchor="ctr"/>
+          <a:lstStyle/>
+          <a:p>
+            <a:pPr marL="0" indent="0" algn="ctr">
+              <a:lnSpc>
+                <a:spcPct val="120000"/>
+              </a:lnSpc>
+              <a:buNone/>
+            </a:pPr>
+            <a:r>
+              <a:rPr lang="en-US" sz="1100" dirty="0">
+                <a:solidFill>
+                  <a:srgbClr val="9AA5AC"/>
+                </a:solidFill>
+                <a:latin typeface="Calibri" pitchFamily="34" charset="0"/>
+                <a:ea typeface="Calibri" pitchFamily="34" charset="-122"/>
+                <a:cs typeface="Calibri" pitchFamily="34" charset="-120"/>
+              </a:rPr>
               <a:t>Integrate with algorithmic dispatch for hyper-localized delivery tasks</a:t>
             </a:r>
             <a:endParaRPr lang="en-US" sz="1100" dirty="0"/>
@@ -3378,7 +3096,7 @@
           <a:bodyPr wrap="square" rtlCol="0" anchor="ctr"/>
           <a:lstStyle/>
           <a:p>
-            <a:pPr algn="r" indent="0" marL="0">
+            <a:pPr marL="0" indent="0" algn="r">
               <a:buNone/>
             </a:pPr>
             <a:r>
@@ -3412,6 +3130,7 @@
         <a:solidFill>
           <a:srgbClr val="0B0F14"/>
         </a:solidFill>
+        <a:effectLst/>
       </p:bgPr>
     </p:bg>
     <p:spTree>
@@ -3449,11 +3168,11 @@
           <a:bodyPr wrap="square" rtlCol="0" anchor="ctr"/>
           <a:lstStyle/>
           <a:p>
-            <a:pPr indent="0" marL="0">
-              <a:buNone/>
-            </a:pPr>
-            <a:r>
-              <a:rPr lang="en-US" sz="1300" b="1" spc="200" kern="0" dirty="0">
+            <a:pPr marL="0" indent="0">
+              <a:buNone/>
+            </a:pPr>
+            <a:r>
+              <a:rPr lang="en-US" sz="1300" b="1" kern="0" spc="200" dirty="0">
                 <a:solidFill>
                   <a:srgbClr val="2ECC71"/>
                 </a:solidFill>
@@ -3488,7 +3207,7 @@
           <a:bodyPr wrap="square" rtlCol="0" anchor="ctr"/>
           <a:lstStyle/>
           <a:p>
-            <a:pPr indent="0" marL="0">
+            <a:pPr marL="0" indent="0">
               <a:buNone/>
             </a:pPr>
             <a:r>
@@ -3549,7 +3268,7 @@
           <a:bodyPr wrap="square" rtlCol="0" anchor="ctr"/>
           <a:lstStyle/>
           <a:p>
-            <a:pPr indent="0" marL="0">
+            <a:pPr marL="0" indent="0">
               <a:buNone/>
             </a:pPr>
             <a:r>
@@ -3588,7 +3307,7 @@
           <a:bodyPr wrap="square" rtlCol="0" anchor="ctr"/>
           <a:lstStyle/>
           <a:p>
-            <a:pPr indent="0" marL="0">
+            <a:pPr marL="0" indent="0">
               <a:lnSpc>
                 <a:spcPct val="125000"/>
               </a:lnSpc>
@@ -3652,7 +3371,7 @@
           <a:bodyPr wrap="square" rtlCol="0" anchor="ctr"/>
           <a:lstStyle/>
           <a:p>
-            <a:pPr indent="0" marL="0">
+            <a:pPr marL="0" indent="0">
               <a:buNone/>
             </a:pPr>
             <a:r>
@@ -3691,7 +3410,7 @@
           <a:bodyPr wrap="square" rtlCol="0" anchor="ctr"/>
           <a:lstStyle/>
           <a:p>
-            <a:pPr indent="0" marL="0">
+            <a:pPr marL="0" indent="0">
               <a:lnSpc>
                 <a:spcPct val="125000"/>
               </a:lnSpc>
@@ -3755,7 +3474,7 @@
           <a:bodyPr wrap="square" rtlCol="0" anchor="ctr"/>
           <a:lstStyle/>
           <a:p>
-            <a:pPr indent="0" marL="0">
+            <a:pPr marL="0" indent="0">
               <a:buNone/>
             </a:pPr>
             <a:r>
@@ -3794,7 +3513,7 @@
           <a:bodyPr wrap="square" rtlCol="0" anchor="ctr"/>
           <a:lstStyle/>
           <a:p>
-            <a:pPr indent="0" marL="0">
+            <a:pPr marL="0" indent="0">
               <a:lnSpc>
                 <a:spcPct val="125000"/>
               </a:lnSpc>
@@ -3858,7 +3577,7 @@
           <a:bodyPr wrap="square" rtlCol="0" anchor="ctr"/>
           <a:lstStyle/>
           <a:p>
-            <a:pPr indent="0" marL="0">
+            <a:pPr marL="0" indent="0">
               <a:buNone/>
             </a:pPr>
             <a:r>
@@ -3897,7 +3616,7 @@
           <a:bodyPr wrap="square" rtlCol="0" anchor="ctr"/>
           <a:lstStyle/>
           <a:p>
-            <a:pPr indent="0" marL="0">
+            <a:pPr marL="0" indent="0">
               <a:lnSpc>
                 <a:spcPct val="125000"/>
               </a:lnSpc>
@@ -3939,7 +3658,7 @@
           <a:bodyPr wrap="square" rtlCol="0" anchor="ctr"/>
           <a:lstStyle/>
           <a:p>
-            <a:pPr algn="r" indent="0" marL="0">
+            <a:pPr marL="0" indent="0" algn="r">
               <a:buNone/>
             </a:pPr>
             <a:r>
@@ -3973,6 +3692,7 @@
         <a:solidFill>
           <a:srgbClr val="0B0F14"/>
         </a:solidFill>
+        <a:effectLst/>
       </p:bgPr>
     </p:bg>
     <p:spTree>
@@ -4010,11 +3730,11 @@
           <a:bodyPr wrap="square" rtlCol="0" anchor="ctr"/>
           <a:lstStyle/>
           <a:p>
-            <a:pPr indent="0" marL="0">
-              <a:buNone/>
-            </a:pPr>
-            <a:r>
-              <a:rPr lang="en-US" sz="1300" b="1" spc="200" kern="0" dirty="0">
+            <a:pPr marL="0" indent="0">
+              <a:buNone/>
+            </a:pPr>
+            <a:r>
+              <a:rPr lang="en-US" sz="1300" b="1" kern="0" spc="200" dirty="0">
                 <a:solidFill>
                   <a:srgbClr val="2ECC71"/>
                 </a:solidFill>
@@ -4049,7 +3769,7 @@
           <a:bodyPr wrap="square" rtlCol="0" anchor="ctr"/>
           <a:lstStyle/>
           <a:p>
-            <a:pPr indent="0" marL="0">
+            <a:pPr marL="0" indent="0">
               <a:buNone/>
             </a:pPr>
             <a:r>
@@ -4111,223 +3831,7 @@
       </p:sp>
       <p:pic>
         <p:nvPicPr>
-          <p:cNvPr id="6" name="Image 0" descr="preencoded.png">    </p:cNvPr>
-          <p:cNvPicPr>
-            <a:picLocks noChangeAspect="1"/>
-          </p:cNvPicPr>
-          <p:nvPr/>
-        </p:nvPicPr>
-        <p:blipFill>
-          <a:blip r:embed="rId1"/>
-          <a:stretch>
-            <a:fillRect/>
-          </a:stretch>
-        </p:blipFill>
-        <p:spPr>
-          <a:xfrm>
-            <a:off x="886968" y="2075688"/>
-            <a:ext cx="237744" cy="237744"/>
-          </a:xfrm>
-          <a:prstGeom prst="rect">
-            <a:avLst/>
-          </a:prstGeom>
-        </p:spPr>
-      </p:pic>
-      <p:sp>
-        <p:nvSpPr>
-          <p:cNvPr id="7" name="Text 4"/>
-          <p:cNvSpPr/>
-          <p:nvPr/>
-        </p:nvSpPr>
-        <p:spPr>
-          <a:xfrm>
-            <a:off x="1508760" y="1737360"/>
-            <a:ext cx="9875520" cy="960120"/>
-          </a:xfrm>
-          <a:prstGeom prst="rect">
-            <a:avLst/>
-          </a:prstGeom>
-          <a:noFill/>
-          <a:ln/>
-        </p:spPr>
-        <p:txBody>
-          <a:bodyPr wrap="square" rtlCol="0" anchor="ctr"/>
-          <a:lstStyle/>
-          <a:p>
-            <a:pPr indent="0" marL="0">
-              <a:lnSpc>
-                <a:spcPct val="120000"/>
-              </a:lnSpc>
-              <a:buNone/>
-            </a:pPr>
-            <a:r>
-              <a:rPr lang="en-US" sz="1350" dirty="0">
-                <a:solidFill>
-                  <a:srgbClr val="F2F5F3"/>
-                </a:solidFill>
-                <a:latin typeface="Calibri" pitchFamily="34" charset="0"/>
-                <a:ea typeface="Calibri" pitchFamily="34" charset="-122"/>
-                <a:cs typeface="Calibri" pitchFamily="34" charset="-120"/>
-              </a:rPr>
-              <a:t>Matching accuracy depends directly on the quality of data entered by individual restaurant operators</a:t>
-            </a:r>
-            <a:endParaRPr lang="en-US" sz="1350" dirty="0"/>
-          </a:p>
-        </p:txBody>
-      </p:sp>
-      <p:sp>
-        <p:nvSpPr>
-          <p:cNvPr id="8" name="Shape 5"/>
-          <p:cNvSpPr/>
-          <p:nvPr/>
-        </p:nvSpPr>
-        <p:spPr>
-          <a:xfrm>
-            <a:off x="548640" y="2880360"/>
-            <a:ext cx="11064240" cy="960120"/>
-          </a:xfrm>
-          <a:prstGeom prst="roundRect">
-            <a:avLst>
-              <a:gd name="adj" fmla="val 7619"/>
-            </a:avLst>
-          </a:prstGeom>
-          <a:solidFill>
-            <a:srgbClr val="141A21"/>
-          </a:solidFill>
-          <a:ln/>
-        </p:spPr>
-      </p:sp>
-      <p:sp>
-        <p:nvSpPr>
-          <p:cNvPr id="9" name="Shape 6"/>
-          <p:cNvSpPr/>
-          <p:nvPr/>
-        </p:nvSpPr>
-        <p:spPr>
-          <a:xfrm>
-            <a:off x="777240" y="3108960"/>
-            <a:ext cx="457200" cy="457200"/>
-          </a:xfrm>
-          <a:prstGeom prst="ellipse">
-            <a:avLst/>
-          </a:prstGeom>
-          <a:solidFill>
-            <a:srgbClr val="FF5A57"/>
-          </a:solidFill>
-          <a:ln/>
-        </p:spPr>
-      </p:sp>
-      <p:pic>
-        <p:nvPicPr>
-          <p:cNvPr id="10" name="Image 1" descr="preencoded.png">    </p:cNvPr>
-          <p:cNvPicPr>
-            <a:picLocks noChangeAspect="1"/>
-          </p:cNvPicPr>
-          <p:nvPr/>
-        </p:nvPicPr>
-        <p:blipFill>
-          <a:blip r:embed="rId2"/>
-          <a:stretch>
-            <a:fillRect/>
-          </a:stretch>
-        </p:blipFill>
-        <p:spPr>
-          <a:xfrm>
-            <a:off x="886968" y="3218688"/>
-            <a:ext cx="237744" cy="237744"/>
-          </a:xfrm>
-          <a:prstGeom prst="rect">
-            <a:avLst/>
-          </a:prstGeom>
-        </p:spPr>
-      </p:pic>
-      <p:sp>
-        <p:nvSpPr>
-          <p:cNvPr id="11" name="Text 7"/>
-          <p:cNvSpPr/>
-          <p:nvPr/>
-        </p:nvSpPr>
-        <p:spPr>
-          <a:xfrm>
-            <a:off x="1508760" y="2880360"/>
-            <a:ext cx="9875520" cy="960120"/>
-          </a:xfrm>
-          <a:prstGeom prst="rect">
-            <a:avLst/>
-          </a:prstGeom>
-          <a:noFill/>
-          <a:ln/>
-        </p:spPr>
-        <p:txBody>
-          <a:bodyPr wrap="square" rtlCol="0" anchor="ctr"/>
-          <a:lstStyle/>
-          <a:p>
-            <a:pPr indent="0" marL="0">
-              <a:lnSpc>
-                <a:spcPct val="120000"/>
-              </a:lnSpc>
-              <a:buNone/>
-            </a:pPr>
-            <a:r>
-              <a:rPr lang="en-US" sz="1350" dirty="0">
-                <a:solidFill>
-                  <a:srgbClr val="F2F5F3"/>
-                </a:solidFill>
-                <a:latin typeface="Calibri" pitchFamily="34" charset="0"/>
-                <a:ea typeface="Calibri" pitchFamily="34" charset="-122"/>
-                <a:cs typeface="Calibri" pitchFamily="34" charset="-120"/>
-              </a:rPr>
-              <a:t>Complex traffic conditions and shifting physical parameters may create gaps between simulated ETAs and real courier times</a:t>
-            </a:r>
-            <a:endParaRPr lang="en-US" sz="1350" dirty="0"/>
-          </a:p>
-        </p:txBody>
-      </p:sp>
-      <p:sp>
-        <p:nvSpPr>
-          <p:cNvPr id="12" name="Shape 8"/>
-          <p:cNvSpPr/>
-          <p:nvPr/>
-        </p:nvSpPr>
-        <p:spPr>
-          <a:xfrm>
-            <a:off x="548640" y="4023360"/>
-            <a:ext cx="11064240" cy="960120"/>
-          </a:xfrm>
-          <a:prstGeom prst="roundRect">
-            <a:avLst>
-              <a:gd name="adj" fmla="val 7619"/>
-            </a:avLst>
-          </a:prstGeom>
-          <a:solidFill>
-            <a:srgbClr val="141A21"/>
-          </a:solidFill>
-          <a:ln/>
-        </p:spPr>
-      </p:sp>
-      <p:sp>
-        <p:nvSpPr>
-          <p:cNvPr id="13" name="Shape 9"/>
-          <p:cNvSpPr/>
-          <p:nvPr/>
-        </p:nvSpPr>
-        <p:spPr>
-          <a:xfrm>
-            <a:off x="777240" y="4251960"/>
-            <a:ext cx="457200" cy="457200"/>
-          </a:xfrm>
-          <a:prstGeom prst="ellipse">
-            <a:avLst/>
-          </a:prstGeom>
-          <a:solidFill>
-            <a:srgbClr val="FF5A57"/>
-          </a:solidFill>
-          <a:ln/>
-        </p:spPr>
-      </p:sp>
-      <p:pic>
-        <p:nvPicPr>
-          <p:cNvPr id="14" name="Image 2" descr="preencoded.png">    </p:cNvPr>
+          <p:cNvPr id="6" name="Image 0" descr="preencoded.png"/>
           <p:cNvPicPr>
             <a:picLocks noChangeAspect="1"/>
           </p:cNvPicPr>
@@ -4341,7 +3845,7 @@
         </p:blipFill>
         <p:spPr>
           <a:xfrm>
-            <a:off x="886968" y="4361688"/>
+            <a:off x="886968" y="2075688"/>
             <a:ext cx="237744" cy="237744"/>
           </a:xfrm>
           <a:prstGeom prst="rect">
@@ -4351,13 +3855,13 @@
       </p:pic>
       <p:sp>
         <p:nvSpPr>
-          <p:cNvPr id="15" name="Text 10"/>
-          <p:cNvSpPr/>
-          <p:nvPr/>
-        </p:nvSpPr>
-        <p:spPr>
-          <a:xfrm>
-            <a:off x="1508760" y="4023360"/>
+          <p:cNvPr id="7" name="Text 4"/>
+          <p:cNvSpPr/>
+          <p:nvPr/>
+        </p:nvSpPr>
+        <p:spPr>
+          <a:xfrm>
+            <a:off x="1508760" y="1737360"/>
             <a:ext cx="9875520" cy="960120"/>
           </a:xfrm>
           <a:prstGeom prst="rect">
@@ -4370,7 +3874,7 @@
           <a:bodyPr wrap="square" rtlCol="0" anchor="ctr"/>
           <a:lstStyle/>
           <a:p>
-            <a:pPr indent="0" marL="0">
+            <a:pPr marL="0" indent="0">
               <a:lnSpc>
                 <a:spcPct val="120000"/>
               </a:lnSpc>
@@ -4385,7 +3889,7 @@
                 <a:ea typeface="Calibri" pitchFamily="34" charset="-122"/>
                 <a:cs typeface="Calibri" pitchFamily="34" charset="-120"/>
               </a:rPr>
-              <a:t>Multi-agent reasoning iterations require ongoing API calls, so computation depth must balance thoroughness against cost</a:t>
+              <a:t>Matching accuracy depends directly on the quality of data entered by individual restaurant operators</a:t>
             </a:r>
             <a:endParaRPr lang="en-US" sz="1350" dirty="0"/>
           </a:p>
@@ -4393,13 +3897,13 @@
       </p:sp>
       <p:sp>
         <p:nvSpPr>
-          <p:cNvPr id="16" name="Shape 11"/>
-          <p:cNvSpPr/>
-          <p:nvPr/>
-        </p:nvSpPr>
-        <p:spPr>
-          <a:xfrm>
-            <a:off x="548640" y="5166360"/>
+          <p:cNvPr id="8" name="Shape 5"/>
+          <p:cNvSpPr/>
+          <p:nvPr/>
+        </p:nvSpPr>
+        <p:spPr>
+          <a:xfrm>
+            <a:off x="548640" y="2880360"/>
             <a:ext cx="11064240" cy="960120"/>
           </a:xfrm>
           <a:prstGeom prst="roundRect">
@@ -4415,13 +3919,13 @@
       </p:sp>
       <p:sp>
         <p:nvSpPr>
-          <p:cNvPr id="17" name="Shape 12"/>
-          <p:cNvSpPr/>
-          <p:nvPr/>
-        </p:nvSpPr>
-        <p:spPr>
-          <a:xfrm>
-            <a:off x="777240" y="5394960"/>
+          <p:cNvPr id="9" name="Shape 6"/>
+          <p:cNvSpPr/>
+          <p:nvPr/>
+        </p:nvSpPr>
+        <p:spPr>
+          <a:xfrm>
+            <a:off x="777240" y="3108960"/>
             <a:ext cx="457200" cy="457200"/>
           </a:xfrm>
           <a:prstGeom prst="ellipse">
@@ -4435,21 +3939,21 @@
       </p:sp>
       <p:pic>
         <p:nvPicPr>
-          <p:cNvPr id="18" name="Image 3" descr="preencoded.png">    </p:cNvPr>
+          <p:cNvPr id="10" name="Image 1" descr="preencoded.png"/>
           <p:cNvPicPr>
             <a:picLocks noChangeAspect="1"/>
           </p:cNvPicPr>
           <p:nvPr/>
         </p:nvPicPr>
         <p:blipFill>
-          <a:blip r:embed="rId4"/>
+          <a:blip r:embed="rId3"/>
           <a:stretch>
             <a:fillRect/>
           </a:stretch>
         </p:blipFill>
         <p:spPr>
           <a:xfrm>
-            <a:off x="886968" y="5504688"/>
+            <a:off x="886968" y="3218688"/>
             <a:ext cx="237744" cy="237744"/>
           </a:xfrm>
           <a:prstGeom prst="rect">
@@ -4459,13 +3963,13 @@
       </p:pic>
       <p:sp>
         <p:nvSpPr>
-          <p:cNvPr id="19" name="Text 13"/>
-          <p:cNvSpPr/>
-          <p:nvPr/>
-        </p:nvSpPr>
-        <p:spPr>
-          <a:xfrm>
-            <a:off x="1508760" y="5166360"/>
+          <p:cNvPr id="11" name="Text 7"/>
+          <p:cNvSpPr/>
+          <p:nvPr/>
+        </p:nvSpPr>
+        <p:spPr>
+          <a:xfrm>
+            <a:off x="1508760" y="2880360"/>
             <a:ext cx="9875520" cy="960120"/>
           </a:xfrm>
           <a:prstGeom prst="rect">
@@ -4478,7 +3982,7 @@
           <a:bodyPr wrap="square" rtlCol="0" anchor="ctr"/>
           <a:lstStyle/>
           <a:p>
-            <a:pPr indent="0" marL="0">
+            <a:pPr marL="0" indent="0">
               <a:lnSpc>
                 <a:spcPct val="120000"/>
               </a:lnSpc>
@@ -4493,6 +3997,222 @@
                 <a:ea typeface="Calibri" pitchFamily="34" charset="-122"/>
                 <a:cs typeface="Calibri" pitchFamily="34" charset="-120"/>
               </a:rPr>
+              <a:t>Complex traffic conditions and shifting physical parameters may create gaps between simulated ETAs and real courier times</a:t>
+            </a:r>
+            <a:endParaRPr lang="en-US" sz="1350" dirty="0"/>
+          </a:p>
+        </p:txBody>
+      </p:sp>
+      <p:sp>
+        <p:nvSpPr>
+          <p:cNvPr id="12" name="Shape 8"/>
+          <p:cNvSpPr/>
+          <p:nvPr/>
+        </p:nvSpPr>
+        <p:spPr>
+          <a:xfrm>
+            <a:off x="548640" y="4023360"/>
+            <a:ext cx="11064240" cy="960120"/>
+          </a:xfrm>
+          <a:prstGeom prst="roundRect">
+            <a:avLst>
+              <a:gd name="adj" fmla="val 7619"/>
+            </a:avLst>
+          </a:prstGeom>
+          <a:solidFill>
+            <a:srgbClr val="141A21"/>
+          </a:solidFill>
+          <a:ln/>
+        </p:spPr>
+      </p:sp>
+      <p:sp>
+        <p:nvSpPr>
+          <p:cNvPr id="13" name="Shape 9"/>
+          <p:cNvSpPr/>
+          <p:nvPr/>
+        </p:nvSpPr>
+        <p:spPr>
+          <a:xfrm>
+            <a:off x="777240" y="4251960"/>
+            <a:ext cx="457200" cy="457200"/>
+          </a:xfrm>
+          <a:prstGeom prst="ellipse">
+            <a:avLst/>
+          </a:prstGeom>
+          <a:solidFill>
+            <a:srgbClr val="FF5A57"/>
+          </a:solidFill>
+          <a:ln/>
+        </p:spPr>
+      </p:sp>
+      <p:pic>
+        <p:nvPicPr>
+          <p:cNvPr id="14" name="Image 2" descr="preencoded.png"/>
+          <p:cNvPicPr>
+            <a:picLocks noChangeAspect="1"/>
+          </p:cNvPicPr>
+          <p:nvPr/>
+        </p:nvPicPr>
+        <p:blipFill>
+          <a:blip r:embed="rId3"/>
+          <a:stretch>
+            <a:fillRect/>
+          </a:stretch>
+        </p:blipFill>
+        <p:spPr>
+          <a:xfrm>
+            <a:off x="886968" y="4361688"/>
+            <a:ext cx="237744" cy="237744"/>
+          </a:xfrm>
+          <a:prstGeom prst="rect">
+            <a:avLst/>
+          </a:prstGeom>
+        </p:spPr>
+      </p:pic>
+      <p:sp>
+        <p:nvSpPr>
+          <p:cNvPr id="15" name="Text 10"/>
+          <p:cNvSpPr/>
+          <p:nvPr/>
+        </p:nvSpPr>
+        <p:spPr>
+          <a:xfrm>
+            <a:off x="1508760" y="4023360"/>
+            <a:ext cx="9875520" cy="960120"/>
+          </a:xfrm>
+          <a:prstGeom prst="rect">
+            <a:avLst/>
+          </a:prstGeom>
+          <a:noFill/>
+          <a:ln/>
+        </p:spPr>
+        <p:txBody>
+          <a:bodyPr wrap="square" rtlCol="0" anchor="ctr"/>
+          <a:lstStyle/>
+          <a:p>
+            <a:pPr marL="0" indent="0">
+              <a:lnSpc>
+                <a:spcPct val="120000"/>
+              </a:lnSpc>
+              <a:buNone/>
+            </a:pPr>
+            <a:r>
+              <a:rPr lang="en-US" sz="1350" dirty="0">
+                <a:solidFill>
+                  <a:srgbClr val="F2F5F3"/>
+                </a:solidFill>
+                <a:latin typeface="Calibri" pitchFamily="34" charset="0"/>
+                <a:ea typeface="Calibri" pitchFamily="34" charset="-122"/>
+                <a:cs typeface="Calibri" pitchFamily="34" charset="-120"/>
+              </a:rPr>
+              <a:t>Multi-agent reasoning iterations require ongoing API calls, so computation depth must balance thoroughness against cost</a:t>
+            </a:r>
+            <a:endParaRPr lang="en-US" sz="1350" dirty="0"/>
+          </a:p>
+        </p:txBody>
+      </p:sp>
+      <p:sp>
+        <p:nvSpPr>
+          <p:cNvPr id="16" name="Shape 11"/>
+          <p:cNvSpPr/>
+          <p:nvPr/>
+        </p:nvSpPr>
+        <p:spPr>
+          <a:xfrm>
+            <a:off x="548640" y="5166360"/>
+            <a:ext cx="11064240" cy="960120"/>
+          </a:xfrm>
+          <a:prstGeom prst="roundRect">
+            <a:avLst>
+              <a:gd name="adj" fmla="val 7619"/>
+            </a:avLst>
+          </a:prstGeom>
+          <a:solidFill>
+            <a:srgbClr val="141A21"/>
+          </a:solidFill>
+          <a:ln/>
+        </p:spPr>
+      </p:sp>
+      <p:sp>
+        <p:nvSpPr>
+          <p:cNvPr id="17" name="Shape 12"/>
+          <p:cNvSpPr/>
+          <p:nvPr/>
+        </p:nvSpPr>
+        <p:spPr>
+          <a:xfrm>
+            <a:off x="777240" y="5394960"/>
+            <a:ext cx="457200" cy="457200"/>
+          </a:xfrm>
+          <a:prstGeom prst="ellipse">
+            <a:avLst/>
+          </a:prstGeom>
+          <a:solidFill>
+            <a:srgbClr val="FF5A57"/>
+          </a:solidFill>
+          <a:ln/>
+        </p:spPr>
+      </p:sp>
+      <p:pic>
+        <p:nvPicPr>
+          <p:cNvPr id="18" name="Image 3" descr="preencoded.png"/>
+          <p:cNvPicPr>
+            <a:picLocks noChangeAspect="1"/>
+          </p:cNvPicPr>
+          <p:nvPr/>
+        </p:nvPicPr>
+        <p:blipFill>
+          <a:blip r:embed="rId3"/>
+          <a:stretch>
+            <a:fillRect/>
+          </a:stretch>
+        </p:blipFill>
+        <p:spPr>
+          <a:xfrm>
+            <a:off x="886968" y="5504688"/>
+            <a:ext cx="237744" cy="237744"/>
+          </a:xfrm>
+          <a:prstGeom prst="rect">
+            <a:avLst/>
+          </a:prstGeom>
+        </p:spPr>
+      </p:pic>
+      <p:sp>
+        <p:nvSpPr>
+          <p:cNvPr id="19" name="Text 13"/>
+          <p:cNvSpPr/>
+          <p:nvPr/>
+        </p:nvSpPr>
+        <p:spPr>
+          <a:xfrm>
+            <a:off x="1508760" y="5166360"/>
+            <a:ext cx="9875520" cy="960120"/>
+          </a:xfrm>
+          <a:prstGeom prst="rect">
+            <a:avLst/>
+          </a:prstGeom>
+          <a:noFill/>
+          <a:ln/>
+        </p:spPr>
+        <p:txBody>
+          <a:bodyPr wrap="square" rtlCol="0" anchor="ctr"/>
+          <a:lstStyle/>
+          <a:p>
+            <a:pPr marL="0" indent="0">
+              <a:lnSpc>
+                <a:spcPct val="120000"/>
+              </a:lnSpc>
+              <a:buNone/>
+            </a:pPr>
+            <a:r>
+              <a:rPr lang="en-US" sz="1350" dirty="0">
+                <a:solidFill>
+                  <a:srgbClr val="F2F5F3"/>
+                </a:solidFill>
+                <a:latin typeface="Calibri" pitchFamily="34" charset="0"/>
+                <a:ea typeface="Calibri" pitchFamily="34" charset="-122"/>
+                <a:cs typeface="Calibri" pitchFamily="34" charset="-120"/>
+              </a:rPr>
               <a:t>Sensitive or high-stakes redistribution decisions warrant additional human review safeguards</a:t>
             </a:r>
             <a:endParaRPr lang="en-US" sz="1350" dirty="0"/>
@@ -4520,7 +4240,7 @@
           <a:bodyPr wrap="square" rtlCol="0" anchor="ctr"/>
           <a:lstStyle/>
           <a:p>
-            <a:pPr algn="r" indent="0" marL="0">
+            <a:pPr marL="0" indent="0" algn="r">
               <a:buNone/>
             </a:pPr>
             <a:r>
@@ -4554,6 +4274,7 @@
         <a:solidFill>
           <a:srgbClr val="0B0F14"/>
         </a:solidFill>
+        <a:effectLst/>
       </p:bgPr>
     </p:bg>
     <p:spTree>
@@ -4591,11 +4312,11 @@
           <a:bodyPr wrap="square" rtlCol="0" anchor="ctr"/>
           <a:lstStyle/>
           <a:p>
-            <a:pPr indent="0" marL="0">
-              <a:buNone/>
-            </a:pPr>
-            <a:r>
-              <a:rPr lang="en-US" sz="1300" b="1" spc="200" kern="0" dirty="0">
+            <a:pPr marL="0" indent="0">
+              <a:buNone/>
+            </a:pPr>
+            <a:r>
+              <a:rPr lang="en-US" sz="1300" b="1" kern="0" spc="200" dirty="0">
                 <a:solidFill>
                   <a:srgbClr val="2ECC71"/>
                 </a:solidFill>
@@ -4630,7 +4351,7 @@
           <a:bodyPr wrap="square" rtlCol="0" anchor="ctr"/>
           <a:lstStyle/>
           <a:p>
-            <a:pPr indent="0" marL="0">
+            <a:pPr marL="0" indent="0">
               <a:buNone/>
             </a:pPr>
             <a:r>
@@ -4692,301 +4413,7 @@
       </p:sp>
       <p:pic>
         <p:nvPicPr>
-          <p:cNvPr id="6" name="Image 0" descr="preencoded.png">    </p:cNvPr>
-          <p:cNvPicPr>
-            <a:picLocks noChangeAspect="1"/>
-          </p:cNvPicPr>
-          <p:nvPr/>
-        </p:nvPicPr>
-        <p:blipFill>
-          <a:blip r:embed="rId1"/>
-          <a:stretch>
-            <a:fillRect/>
-          </a:stretch>
-        </p:blipFill>
-        <p:spPr>
-          <a:xfrm>
-            <a:off x="1472184" y="2121408"/>
-            <a:ext cx="237744" cy="237744"/>
-          </a:xfrm>
-          <a:prstGeom prst="rect">
-            <a:avLst/>
-          </a:prstGeom>
-        </p:spPr>
-      </p:pic>
-      <p:sp>
-        <p:nvSpPr>
-          <p:cNvPr id="7" name="Text 4"/>
-          <p:cNvSpPr/>
-          <p:nvPr/>
-        </p:nvSpPr>
-        <p:spPr>
-          <a:xfrm>
-            <a:off x="685800" y="2606040"/>
-            <a:ext cx="1810512" cy="685800"/>
-          </a:xfrm>
-          <a:prstGeom prst="rect">
-            <a:avLst/>
-          </a:prstGeom>
-          <a:noFill/>
-          <a:ln/>
-        </p:spPr>
-        <p:txBody>
-          <a:bodyPr wrap="square" rtlCol="0" anchor="ctr"/>
-          <a:lstStyle/>
-          <a:p>
-            <a:pPr algn="ctr" indent="0" marL="0">
-              <a:buNone/>
-            </a:pPr>
-            <a:r>
-              <a:rPr lang="en-US" sz="1200" b="1" dirty="0">
-                <a:solidFill>
-                  <a:srgbClr val="F2F5F3"/>
-                </a:solidFill>
-                <a:latin typeface="Calibri" pitchFamily="34" charset="0"/>
-                <a:ea typeface="Calibri" pitchFamily="34" charset="-122"/>
-                <a:cs typeface="Calibri" pitchFamily="34" charset="-120"/>
-              </a:rPr>
-              <a:t>Predictive deficit forecasting</a:t>
-            </a:r>
-            <a:endParaRPr lang="en-US" sz="1200" dirty="0"/>
-          </a:p>
-        </p:txBody>
-      </p:sp>
-      <p:sp>
-        <p:nvSpPr>
-          <p:cNvPr id="8" name="Text 5"/>
-          <p:cNvSpPr/>
-          <p:nvPr/>
-        </p:nvSpPr>
-        <p:spPr>
-          <a:xfrm>
-            <a:off x="713232" y="3246120"/>
-            <a:ext cx="1755648" cy="1188720"/>
-          </a:xfrm>
-          <a:prstGeom prst="rect">
-            <a:avLst/>
-          </a:prstGeom>
-          <a:noFill/>
-          <a:ln/>
-        </p:spPr>
-        <p:txBody>
-          <a:bodyPr wrap="square" rtlCol="0" anchor="ctr"/>
-          <a:lstStyle/>
-          <a:p>
-            <a:pPr algn="ctr" indent="0" marL="0">
-              <a:lnSpc>
-                <a:spcPct val="120000"/>
-              </a:lnSpc>
-              <a:buNone/>
-            </a:pPr>
-            <a:r>
-              <a:rPr lang="en-US" sz="950" dirty="0">
-                <a:solidFill>
-                  <a:srgbClr val="9AA5AC"/>
-                </a:solidFill>
-                <a:latin typeface="Calibri" pitchFamily="34" charset="0"/>
-                <a:ea typeface="Calibri" pitchFamily="34" charset="-122"/>
-                <a:cs typeface="Calibri" pitchFamily="34" charset="-120"/>
-              </a:rPr>
-              <a:t>Warn storefronts of demand drops using external datasets before waste occurs</a:t>
-            </a:r>
-            <a:endParaRPr lang="en-US" sz="950" dirty="0"/>
-          </a:p>
-        </p:txBody>
-      </p:sp>
-      <p:sp>
-        <p:nvSpPr>
-          <p:cNvPr id="9" name="Shape 6"/>
-          <p:cNvSpPr/>
-          <p:nvPr/>
-        </p:nvSpPr>
-        <p:spPr>
-          <a:xfrm>
-            <a:off x="2834640" y="1737360"/>
-            <a:ext cx="2084832" cy="2834640"/>
-          </a:xfrm>
-          <a:prstGeom prst="roundRect">
-            <a:avLst>
-              <a:gd name="adj" fmla="val 3947"/>
-            </a:avLst>
-          </a:prstGeom>
-          <a:solidFill>
-            <a:srgbClr val="141A21"/>
-          </a:solidFill>
-          <a:ln/>
-        </p:spPr>
-      </p:sp>
-      <p:sp>
-        <p:nvSpPr>
-          <p:cNvPr id="10" name="Shape 7"/>
-          <p:cNvSpPr/>
-          <p:nvPr/>
-        </p:nvSpPr>
-        <p:spPr>
-          <a:xfrm>
-            <a:off x="3648456" y="2011680"/>
-            <a:ext cx="457200" cy="457200"/>
-          </a:xfrm>
-          <a:prstGeom prst="ellipse">
-            <a:avLst/>
-          </a:prstGeom>
-          <a:solidFill>
-            <a:srgbClr val="2ECC71"/>
-          </a:solidFill>
-          <a:ln/>
-        </p:spPr>
-      </p:sp>
-      <p:pic>
-        <p:nvPicPr>
-          <p:cNvPr id="11" name="Image 1" descr="preencoded.png">    </p:cNvPr>
-          <p:cNvPicPr>
-            <a:picLocks noChangeAspect="1"/>
-          </p:cNvPicPr>
-          <p:nvPr/>
-        </p:nvPicPr>
-        <p:blipFill>
-          <a:blip r:embed="rId2"/>
-          <a:stretch>
-            <a:fillRect/>
-          </a:stretch>
-        </p:blipFill>
-        <p:spPr>
-          <a:xfrm>
-            <a:off x="3758184" y="2121408"/>
-            <a:ext cx="237744" cy="237744"/>
-          </a:xfrm>
-          <a:prstGeom prst="rect">
-            <a:avLst/>
-          </a:prstGeom>
-        </p:spPr>
-      </p:pic>
-      <p:sp>
-        <p:nvSpPr>
-          <p:cNvPr id="12" name="Text 8"/>
-          <p:cNvSpPr/>
-          <p:nvPr/>
-        </p:nvSpPr>
-        <p:spPr>
-          <a:xfrm>
-            <a:off x="2971800" y="2606040"/>
-            <a:ext cx="1810512" cy="685800"/>
-          </a:xfrm>
-          <a:prstGeom prst="rect">
-            <a:avLst/>
-          </a:prstGeom>
-          <a:noFill/>
-          <a:ln/>
-        </p:spPr>
-        <p:txBody>
-          <a:bodyPr wrap="square" rtlCol="0" anchor="ctr"/>
-          <a:lstStyle/>
-          <a:p>
-            <a:pPr algn="ctr" indent="0" marL="0">
-              <a:buNone/>
-            </a:pPr>
-            <a:r>
-              <a:rPr lang="en-US" sz="1200" b="1" dirty="0">
-                <a:solidFill>
-                  <a:srgbClr val="F2F5F3"/>
-                </a:solidFill>
-                <a:latin typeface="Calibri" pitchFamily="34" charset="0"/>
-                <a:ea typeface="Calibri" pitchFamily="34" charset="-122"/>
-                <a:cs typeface="Calibri" pitchFamily="34" charset="-120"/>
-              </a:rPr>
-              <a:t>Automated cold-chain tracking</a:t>
-            </a:r>
-            <a:endParaRPr lang="en-US" sz="1200" dirty="0"/>
-          </a:p>
-        </p:txBody>
-      </p:sp>
-      <p:sp>
-        <p:nvSpPr>
-          <p:cNvPr id="13" name="Text 9"/>
-          <p:cNvSpPr/>
-          <p:nvPr/>
-        </p:nvSpPr>
-        <p:spPr>
-          <a:xfrm>
-            <a:off x="2999232" y="3246120"/>
-            <a:ext cx="1755648" cy="1188720"/>
-          </a:xfrm>
-          <a:prstGeom prst="rect">
-            <a:avLst/>
-          </a:prstGeom>
-          <a:noFill/>
-          <a:ln/>
-        </p:spPr>
-        <p:txBody>
-          <a:bodyPr wrap="square" rtlCol="0" anchor="ctr"/>
-          <a:lstStyle/>
-          <a:p>
-            <a:pPr algn="ctr" indent="0" marL="0">
-              <a:lnSpc>
-                <a:spcPct val="120000"/>
-              </a:lnSpc>
-              <a:buNone/>
-            </a:pPr>
-            <a:r>
-              <a:rPr lang="en-US" sz="950" dirty="0">
-                <a:solidFill>
-                  <a:srgbClr val="9AA5AC"/>
-                </a:solidFill>
-                <a:latin typeface="Calibri" pitchFamily="34" charset="0"/>
-                <a:ea typeface="Calibri" pitchFamily="34" charset="-122"/>
-                <a:cs typeface="Calibri" pitchFamily="34" charset="-120"/>
-              </a:rPr>
-              <a:t>IoT integration to track ambient temperature of perishables during transit</a:t>
-            </a:r>
-            <a:endParaRPr lang="en-US" sz="950" dirty="0"/>
-          </a:p>
-        </p:txBody>
-      </p:sp>
-      <p:sp>
-        <p:nvSpPr>
-          <p:cNvPr id="14" name="Shape 10"/>
-          <p:cNvSpPr/>
-          <p:nvPr/>
-        </p:nvSpPr>
-        <p:spPr>
-          <a:xfrm>
-            <a:off x="5120640" y="1737360"/>
-            <a:ext cx="2084832" cy="2834640"/>
-          </a:xfrm>
-          <a:prstGeom prst="roundRect">
-            <a:avLst>
-              <a:gd name="adj" fmla="val 3947"/>
-            </a:avLst>
-          </a:prstGeom>
-          <a:solidFill>
-            <a:srgbClr val="141A21"/>
-          </a:solidFill>
-          <a:ln/>
-        </p:spPr>
-      </p:sp>
-      <p:sp>
-        <p:nvSpPr>
-          <p:cNvPr id="15" name="Shape 11"/>
-          <p:cNvSpPr/>
-          <p:nvPr/>
-        </p:nvSpPr>
-        <p:spPr>
-          <a:xfrm>
-            <a:off x="5934456" y="2011680"/>
-            <a:ext cx="457200" cy="457200"/>
-          </a:xfrm>
-          <a:prstGeom prst="ellipse">
-            <a:avLst/>
-          </a:prstGeom>
-          <a:solidFill>
-            <a:srgbClr val="2ECC71"/>
-          </a:solidFill>
-          <a:ln/>
-        </p:spPr>
-      </p:sp>
-      <p:pic>
-        <p:nvPicPr>
-          <p:cNvPr id="16" name="Image 2" descr="preencoded.png">    </p:cNvPr>
+          <p:cNvPr id="6" name="Image 0" descr="preencoded.png"/>
           <p:cNvPicPr>
             <a:picLocks noChangeAspect="1"/>
           </p:cNvPicPr>
@@ -5000,7 +4427,7 @@
         </p:blipFill>
         <p:spPr>
           <a:xfrm>
-            <a:off x="6044184" y="2121408"/>
+            <a:off x="1472184" y="2121408"/>
             <a:ext cx="237744" cy="237744"/>
           </a:xfrm>
           <a:prstGeom prst="rect">
@@ -5010,13 +4437,13 @@
       </p:pic>
       <p:sp>
         <p:nvSpPr>
-          <p:cNvPr id="17" name="Text 12"/>
-          <p:cNvSpPr/>
-          <p:nvPr/>
-        </p:nvSpPr>
-        <p:spPr>
-          <a:xfrm>
-            <a:off x="5257800" y="2606040"/>
+          <p:cNvPr id="7" name="Text 4"/>
+          <p:cNvSpPr/>
+          <p:nvPr/>
+        </p:nvSpPr>
+        <p:spPr>
+          <a:xfrm>
+            <a:off x="685800" y="2606040"/>
             <a:ext cx="1810512" cy="685800"/>
           </a:xfrm>
           <a:prstGeom prst="rect">
@@ -5029,7 +4456,7 @@
           <a:bodyPr wrap="square" rtlCol="0" anchor="ctr"/>
           <a:lstStyle/>
           <a:p>
-            <a:pPr algn="ctr" indent="0" marL="0">
+            <a:pPr marL="0" indent="0" algn="ctr">
               <a:buNone/>
             </a:pPr>
             <a:r>
@@ -5041,7 +4468,7 @@
                 <a:ea typeface="Calibri" pitchFamily="34" charset="-122"/>
                 <a:cs typeface="Calibri" pitchFamily="34" charset="-120"/>
               </a:rPr>
-              <a:t>Multi-carrier route stacking</a:t>
+              <a:t>Predictive deficit forecasting</a:t>
             </a:r>
             <a:endParaRPr lang="en-US" sz="1200" dirty="0"/>
           </a:p>
@@ -5049,13 +4476,13 @@
       </p:sp>
       <p:sp>
         <p:nvSpPr>
-          <p:cNvPr id="18" name="Text 13"/>
-          <p:cNvSpPr/>
-          <p:nvPr/>
-        </p:nvSpPr>
-        <p:spPr>
-          <a:xfrm>
-            <a:off x="5285232" y="3246120"/>
+          <p:cNvPr id="8" name="Text 5"/>
+          <p:cNvSpPr/>
+          <p:nvPr/>
+        </p:nvSpPr>
+        <p:spPr>
+          <a:xfrm>
+            <a:off x="713232" y="3246120"/>
             <a:ext cx="1755648" cy="1188720"/>
           </a:xfrm>
           <a:prstGeom prst="rect">
@@ -5068,7 +4495,7 @@
           <a:bodyPr wrap="square" rtlCol="0" anchor="ctr"/>
           <a:lstStyle/>
           <a:p>
-            <a:pPr algn="ctr" indent="0" marL="0">
+            <a:pPr marL="0" indent="0" algn="ctr">
               <a:lnSpc>
                 <a:spcPct val="120000"/>
               </a:lnSpc>
@@ -5083,7 +4510,7 @@
                 <a:ea typeface="Calibri" pitchFamily="34" charset="-122"/>
                 <a:cs typeface="Calibri" pitchFamily="34" charset="-120"/>
               </a:rPr>
-              <a:t>Bundle fragmented drops from multiple vendors into one optimized courier run</a:t>
+              <a:t>Warn storefronts of demand drops using external datasets before waste occurs</a:t>
             </a:r>
             <a:endParaRPr lang="en-US" sz="950" dirty="0"/>
           </a:p>
@@ -5091,13 +4518,13 @@
       </p:sp>
       <p:sp>
         <p:nvSpPr>
-          <p:cNvPr id="19" name="Shape 14"/>
-          <p:cNvSpPr/>
-          <p:nvPr/>
-        </p:nvSpPr>
-        <p:spPr>
-          <a:xfrm>
-            <a:off x="7406640" y="1737360"/>
+          <p:cNvPr id="9" name="Shape 6"/>
+          <p:cNvSpPr/>
+          <p:nvPr/>
+        </p:nvSpPr>
+        <p:spPr>
+          <a:xfrm>
+            <a:off x="2834640" y="1737360"/>
             <a:ext cx="2084832" cy="2834640"/>
           </a:xfrm>
           <a:prstGeom prst="roundRect">
@@ -5113,13 +4540,13 @@
       </p:sp>
       <p:sp>
         <p:nvSpPr>
-          <p:cNvPr id="20" name="Shape 15"/>
-          <p:cNvSpPr/>
-          <p:nvPr/>
-        </p:nvSpPr>
-        <p:spPr>
-          <a:xfrm>
-            <a:off x="8220456" y="2011680"/>
+          <p:cNvPr id="10" name="Shape 7"/>
+          <p:cNvSpPr/>
+          <p:nvPr/>
+        </p:nvSpPr>
+        <p:spPr>
+          <a:xfrm>
+            <a:off x="3648456" y="2011680"/>
             <a:ext cx="457200" cy="457200"/>
           </a:xfrm>
           <a:prstGeom prst="ellipse">
@@ -5133,7 +4560,7 @@
       </p:sp>
       <p:pic>
         <p:nvPicPr>
-          <p:cNvPr id="21" name="Image 3" descr="preencoded.png">    </p:cNvPr>
+          <p:cNvPr id="11" name="Image 1" descr="preencoded.png"/>
           <p:cNvPicPr>
             <a:picLocks noChangeAspect="1"/>
           </p:cNvPicPr>
@@ -5147,7 +4574,7 @@
         </p:blipFill>
         <p:spPr>
           <a:xfrm>
-            <a:off x="8330184" y="2121408"/>
+            <a:off x="3758184" y="2121408"/>
             <a:ext cx="237744" cy="237744"/>
           </a:xfrm>
           <a:prstGeom prst="rect">
@@ -5157,13 +4584,13 @@
       </p:pic>
       <p:sp>
         <p:nvSpPr>
-          <p:cNvPr id="22" name="Text 16"/>
-          <p:cNvSpPr/>
-          <p:nvPr/>
-        </p:nvSpPr>
-        <p:spPr>
-          <a:xfrm>
-            <a:off x="7543800" y="2606040"/>
+          <p:cNvPr id="12" name="Text 8"/>
+          <p:cNvSpPr/>
+          <p:nvPr/>
+        </p:nvSpPr>
+        <p:spPr>
+          <a:xfrm>
+            <a:off x="2971800" y="2606040"/>
             <a:ext cx="1810512" cy="685800"/>
           </a:xfrm>
           <a:prstGeom prst="rect">
@@ -5176,7 +4603,7 @@
           <a:bodyPr wrap="square" rtlCol="0" anchor="ctr"/>
           <a:lstStyle/>
           <a:p>
-            <a:pPr algn="ctr" indent="0" marL="0">
+            <a:pPr marL="0" indent="0" algn="ctr">
               <a:buNone/>
             </a:pPr>
             <a:r>
@@ -5188,7 +4615,7 @@
                 <a:ea typeface="Calibri" pitchFamily="34" charset="-122"/>
                 <a:cs typeface="Calibri" pitchFamily="34" charset="-120"/>
               </a:rPr>
-              <a:t>Regulatory compliance integration</a:t>
+              <a:t>Automated cold-chain tracking</a:t>
             </a:r>
             <a:endParaRPr lang="en-US" sz="1200" dirty="0"/>
           </a:p>
@@ -5196,13 +4623,13 @@
       </p:sp>
       <p:sp>
         <p:nvSpPr>
-          <p:cNvPr id="23" name="Text 17"/>
-          <p:cNvSpPr/>
-          <p:nvPr/>
-        </p:nvSpPr>
-        <p:spPr>
-          <a:xfrm>
-            <a:off x="7571232" y="3246120"/>
+          <p:cNvPr id="13" name="Text 9"/>
+          <p:cNvSpPr/>
+          <p:nvPr/>
+        </p:nvSpPr>
+        <p:spPr>
+          <a:xfrm>
+            <a:off x="2999232" y="3246120"/>
             <a:ext cx="1755648" cy="1188720"/>
           </a:xfrm>
           <a:prstGeom prst="rect">
@@ -5215,7 +4642,7 @@
           <a:bodyPr wrap="square" rtlCol="0" anchor="ctr"/>
           <a:lstStyle/>
           <a:p>
-            <a:pPr algn="ctr" indent="0" marL="0">
+            <a:pPr marL="0" indent="0" algn="ctr">
               <a:lnSpc>
                 <a:spcPct val="120000"/>
               </a:lnSpc>
@@ -5230,7 +4657,7 @@
                 <a:ea typeface="Calibri" pitchFamily="34" charset="-122"/>
                 <a:cs typeface="Calibri" pitchFamily="34" charset="-120"/>
               </a:rPr>
-              <a:t>Map localized waste tracking directly to official tax write-off platforms</a:t>
+              <a:t>IoT integration to track ambient temperature of perishables during transit</a:t>
             </a:r>
             <a:endParaRPr lang="en-US" sz="950" dirty="0"/>
           </a:p>
@@ -5238,13 +4665,13 @@
       </p:sp>
       <p:sp>
         <p:nvSpPr>
-          <p:cNvPr id="24" name="Shape 18"/>
-          <p:cNvSpPr/>
-          <p:nvPr/>
-        </p:nvSpPr>
-        <p:spPr>
-          <a:xfrm>
-            <a:off x="9692640" y="1737360"/>
+          <p:cNvPr id="14" name="Shape 10"/>
+          <p:cNvSpPr/>
+          <p:nvPr/>
+        </p:nvSpPr>
+        <p:spPr>
+          <a:xfrm>
+            <a:off x="5120640" y="1737360"/>
             <a:ext cx="2084832" cy="2834640"/>
           </a:xfrm>
           <a:prstGeom prst="roundRect">
@@ -5260,13 +4687,13 @@
       </p:sp>
       <p:sp>
         <p:nvSpPr>
-          <p:cNvPr id="25" name="Shape 19"/>
-          <p:cNvSpPr/>
-          <p:nvPr/>
-        </p:nvSpPr>
-        <p:spPr>
-          <a:xfrm>
-            <a:off x="10506456" y="2011680"/>
+          <p:cNvPr id="15" name="Shape 11"/>
+          <p:cNvSpPr/>
+          <p:nvPr/>
+        </p:nvSpPr>
+        <p:spPr>
+          <a:xfrm>
+            <a:off x="5934456" y="2011680"/>
             <a:ext cx="457200" cy="457200"/>
           </a:xfrm>
           <a:prstGeom prst="ellipse">
@@ -5280,7 +4707,7 @@
       </p:sp>
       <p:pic>
         <p:nvPicPr>
-          <p:cNvPr id="26" name="Image 4" descr="preencoded.png">    </p:cNvPr>
+          <p:cNvPr id="16" name="Image 2" descr="preencoded.png"/>
           <p:cNvPicPr>
             <a:picLocks noChangeAspect="1"/>
           </p:cNvPicPr>
@@ -5294,7 +4721,7 @@
         </p:blipFill>
         <p:spPr>
           <a:xfrm>
-            <a:off x="10616184" y="2121408"/>
+            <a:off x="6044184" y="2121408"/>
             <a:ext cx="237744" cy="237744"/>
           </a:xfrm>
           <a:prstGeom prst="rect">
@@ -5304,13 +4731,13 @@
       </p:pic>
       <p:sp>
         <p:nvSpPr>
-          <p:cNvPr id="27" name="Text 20"/>
-          <p:cNvSpPr/>
-          <p:nvPr/>
-        </p:nvSpPr>
-        <p:spPr>
-          <a:xfrm>
-            <a:off x="9829800" y="2606040"/>
+          <p:cNvPr id="17" name="Text 12"/>
+          <p:cNvSpPr/>
+          <p:nvPr/>
+        </p:nvSpPr>
+        <p:spPr>
+          <a:xfrm>
+            <a:off x="5257800" y="2606040"/>
             <a:ext cx="1810512" cy="685800"/>
           </a:xfrm>
           <a:prstGeom prst="rect">
@@ -5323,7 +4750,7 @@
           <a:bodyPr wrap="square" rtlCol="0" anchor="ctr"/>
           <a:lstStyle/>
           <a:p>
-            <a:pPr algn="ctr" indent="0" marL="0">
+            <a:pPr marL="0" indent="0" algn="ctr">
               <a:buNone/>
             </a:pPr>
             <a:r>
@@ -5335,7 +4762,7 @@
                 <a:ea typeface="Calibri" pitchFamily="34" charset="-122"/>
                 <a:cs typeface="Calibri" pitchFamily="34" charset="-120"/>
               </a:rPr>
-              <a:t>Domain-specific tuning</a:t>
+              <a:t>Multi-carrier route stacking</a:t>
             </a:r>
             <a:endParaRPr lang="en-US" sz="1200" dirty="0"/>
           </a:p>
@@ -5343,13 +4770,13 @@
       </p:sp>
       <p:sp>
         <p:nvSpPr>
-          <p:cNvPr id="28" name="Text 21"/>
-          <p:cNvSpPr/>
-          <p:nvPr/>
-        </p:nvSpPr>
-        <p:spPr>
-          <a:xfrm>
-            <a:off x="9857232" y="3246120"/>
+          <p:cNvPr id="18" name="Text 13"/>
+          <p:cNvSpPr/>
+          <p:nvPr/>
+        </p:nvSpPr>
+        <p:spPr>
+          <a:xfrm>
+            <a:off x="5285232" y="3246120"/>
             <a:ext cx="1755648" cy="1188720"/>
           </a:xfrm>
           <a:prstGeom prst="rect">
@@ -5362,7 +4789,7 @@
           <a:bodyPr wrap="square" rtlCol="0" anchor="ctr"/>
           <a:lstStyle/>
           <a:p>
-            <a:pPr algn="ctr" indent="0" marL="0">
+            <a:pPr marL="0" indent="0" algn="ctr">
               <a:lnSpc>
                 <a:spcPct val="120000"/>
               </a:lnSpc>
@@ -5377,6 +4804,300 @@
                 <a:ea typeface="Calibri" pitchFamily="34" charset="-122"/>
                 <a:cs typeface="Calibri" pitchFamily="34" charset="-120"/>
               </a:rPr>
+              <a:t>Bundle fragmented drops from multiple vendors into one optimized courier run</a:t>
+            </a:r>
+            <a:endParaRPr lang="en-US" sz="950" dirty="0"/>
+          </a:p>
+        </p:txBody>
+      </p:sp>
+      <p:sp>
+        <p:nvSpPr>
+          <p:cNvPr id="19" name="Shape 14"/>
+          <p:cNvSpPr/>
+          <p:nvPr/>
+        </p:nvSpPr>
+        <p:spPr>
+          <a:xfrm>
+            <a:off x="7406640" y="1737360"/>
+            <a:ext cx="2084832" cy="2834640"/>
+          </a:xfrm>
+          <a:prstGeom prst="roundRect">
+            <a:avLst>
+              <a:gd name="adj" fmla="val 3947"/>
+            </a:avLst>
+          </a:prstGeom>
+          <a:solidFill>
+            <a:srgbClr val="141A21"/>
+          </a:solidFill>
+          <a:ln/>
+        </p:spPr>
+      </p:sp>
+      <p:sp>
+        <p:nvSpPr>
+          <p:cNvPr id="20" name="Shape 15"/>
+          <p:cNvSpPr/>
+          <p:nvPr/>
+        </p:nvSpPr>
+        <p:spPr>
+          <a:xfrm>
+            <a:off x="8220456" y="2011680"/>
+            <a:ext cx="457200" cy="457200"/>
+          </a:xfrm>
+          <a:prstGeom prst="ellipse">
+            <a:avLst/>
+          </a:prstGeom>
+          <a:solidFill>
+            <a:srgbClr val="2ECC71"/>
+          </a:solidFill>
+          <a:ln/>
+        </p:spPr>
+      </p:sp>
+      <p:pic>
+        <p:nvPicPr>
+          <p:cNvPr id="21" name="Image 3" descr="preencoded.png"/>
+          <p:cNvPicPr>
+            <a:picLocks noChangeAspect="1"/>
+          </p:cNvPicPr>
+          <p:nvPr/>
+        </p:nvPicPr>
+        <p:blipFill>
+          <a:blip r:embed="rId6"/>
+          <a:stretch>
+            <a:fillRect/>
+          </a:stretch>
+        </p:blipFill>
+        <p:spPr>
+          <a:xfrm>
+            <a:off x="8330184" y="2121408"/>
+            <a:ext cx="237744" cy="237744"/>
+          </a:xfrm>
+          <a:prstGeom prst="rect">
+            <a:avLst/>
+          </a:prstGeom>
+        </p:spPr>
+      </p:pic>
+      <p:sp>
+        <p:nvSpPr>
+          <p:cNvPr id="22" name="Text 16"/>
+          <p:cNvSpPr/>
+          <p:nvPr/>
+        </p:nvSpPr>
+        <p:spPr>
+          <a:xfrm>
+            <a:off x="7543800" y="2606040"/>
+            <a:ext cx="1810512" cy="685800"/>
+          </a:xfrm>
+          <a:prstGeom prst="rect">
+            <a:avLst/>
+          </a:prstGeom>
+          <a:noFill/>
+          <a:ln/>
+        </p:spPr>
+        <p:txBody>
+          <a:bodyPr wrap="square" rtlCol="0" anchor="ctr"/>
+          <a:lstStyle/>
+          <a:p>
+            <a:pPr marL="0" indent="0" algn="ctr">
+              <a:buNone/>
+            </a:pPr>
+            <a:r>
+              <a:rPr lang="en-US" sz="1200" b="1" dirty="0">
+                <a:solidFill>
+                  <a:srgbClr val="F2F5F3"/>
+                </a:solidFill>
+                <a:latin typeface="Calibri" pitchFamily="34" charset="0"/>
+                <a:ea typeface="Calibri" pitchFamily="34" charset="-122"/>
+                <a:cs typeface="Calibri" pitchFamily="34" charset="-120"/>
+              </a:rPr>
+              <a:t>Regulatory compliance integration</a:t>
+            </a:r>
+            <a:endParaRPr lang="en-US" sz="1200" dirty="0"/>
+          </a:p>
+        </p:txBody>
+      </p:sp>
+      <p:sp>
+        <p:nvSpPr>
+          <p:cNvPr id="23" name="Text 17"/>
+          <p:cNvSpPr/>
+          <p:nvPr/>
+        </p:nvSpPr>
+        <p:spPr>
+          <a:xfrm>
+            <a:off x="7571232" y="3246120"/>
+            <a:ext cx="1755648" cy="1188720"/>
+          </a:xfrm>
+          <a:prstGeom prst="rect">
+            <a:avLst/>
+          </a:prstGeom>
+          <a:noFill/>
+          <a:ln/>
+        </p:spPr>
+        <p:txBody>
+          <a:bodyPr wrap="square" rtlCol="0" anchor="ctr"/>
+          <a:lstStyle/>
+          <a:p>
+            <a:pPr marL="0" indent="0" algn="ctr">
+              <a:lnSpc>
+                <a:spcPct val="120000"/>
+              </a:lnSpc>
+              <a:buNone/>
+            </a:pPr>
+            <a:r>
+              <a:rPr lang="en-US" sz="950" dirty="0">
+                <a:solidFill>
+                  <a:srgbClr val="9AA5AC"/>
+                </a:solidFill>
+                <a:latin typeface="Calibri" pitchFamily="34" charset="0"/>
+                <a:ea typeface="Calibri" pitchFamily="34" charset="-122"/>
+                <a:cs typeface="Calibri" pitchFamily="34" charset="-120"/>
+              </a:rPr>
+              <a:t>Map localized waste tracking directly to official tax write-off platforms</a:t>
+            </a:r>
+            <a:endParaRPr lang="en-US" sz="950" dirty="0"/>
+          </a:p>
+        </p:txBody>
+      </p:sp>
+      <p:sp>
+        <p:nvSpPr>
+          <p:cNvPr id="24" name="Shape 18"/>
+          <p:cNvSpPr/>
+          <p:nvPr/>
+        </p:nvSpPr>
+        <p:spPr>
+          <a:xfrm>
+            <a:off x="9692640" y="1737360"/>
+            <a:ext cx="2084832" cy="2834640"/>
+          </a:xfrm>
+          <a:prstGeom prst="roundRect">
+            <a:avLst>
+              <a:gd name="adj" fmla="val 3947"/>
+            </a:avLst>
+          </a:prstGeom>
+          <a:solidFill>
+            <a:srgbClr val="141A21"/>
+          </a:solidFill>
+          <a:ln/>
+        </p:spPr>
+      </p:sp>
+      <p:sp>
+        <p:nvSpPr>
+          <p:cNvPr id="25" name="Shape 19"/>
+          <p:cNvSpPr/>
+          <p:nvPr/>
+        </p:nvSpPr>
+        <p:spPr>
+          <a:xfrm>
+            <a:off x="10506456" y="2011680"/>
+            <a:ext cx="457200" cy="457200"/>
+          </a:xfrm>
+          <a:prstGeom prst="ellipse">
+            <a:avLst/>
+          </a:prstGeom>
+          <a:solidFill>
+            <a:srgbClr val="2ECC71"/>
+          </a:solidFill>
+          <a:ln/>
+        </p:spPr>
+      </p:sp>
+      <p:pic>
+        <p:nvPicPr>
+          <p:cNvPr id="26" name="Image 4" descr="preencoded.png"/>
+          <p:cNvPicPr>
+            <a:picLocks noChangeAspect="1"/>
+          </p:cNvPicPr>
+          <p:nvPr/>
+        </p:nvPicPr>
+        <p:blipFill>
+          <a:blip r:embed="rId7"/>
+          <a:stretch>
+            <a:fillRect/>
+          </a:stretch>
+        </p:blipFill>
+        <p:spPr>
+          <a:xfrm>
+            <a:off x="10616184" y="2121408"/>
+            <a:ext cx="237744" cy="237744"/>
+          </a:xfrm>
+          <a:prstGeom prst="rect">
+            <a:avLst/>
+          </a:prstGeom>
+        </p:spPr>
+      </p:pic>
+      <p:sp>
+        <p:nvSpPr>
+          <p:cNvPr id="27" name="Text 20"/>
+          <p:cNvSpPr/>
+          <p:nvPr/>
+        </p:nvSpPr>
+        <p:spPr>
+          <a:xfrm>
+            <a:off x="9829800" y="2606040"/>
+            <a:ext cx="1810512" cy="685800"/>
+          </a:xfrm>
+          <a:prstGeom prst="rect">
+            <a:avLst/>
+          </a:prstGeom>
+          <a:noFill/>
+          <a:ln/>
+        </p:spPr>
+        <p:txBody>
+          <a:bodyPr wrap="square" rtlCol="0" anchor="ctr"/>
+          <a:lstStyle/>
+          <a:p>
+            <a:pPr marL="0" indent="0" algn="ctr">
+              <a:buNone/>
+            </a:pPr>
+            <a:r>
+              <a:rPr lang="en-US" sz="1200" b="1" dirty="0">
+                <a:solidFill>
+                  <a:srgbClr val="F2F5F3"/>
+                </a:solidFill>
+                <a:latin typeface="Calibri" pitchFamily="34" charset="0"/>
+                <a:ea typeface="Calibri" pitchFamily="34" charset="-122"/>
+                <a:cs typeface="Calibri" pitchFamily="34" charset="-120"/>
+              </a:rPr>
+              <a:t>Domain-specific tuning</a:t>
+            </a:r>
+            <a:endParaRPr lang="en-US" sz="1200" dirty="0"/>
+          </a:p>
+        </p:txBody>
+      </p:sp>
+      <p:sp>
+        <p:nvSpPr>
+          <p:cNvPr id="28" name="Text 21"/>
+          <p:cNvSpPr/>
+          <p:nvPr/>
+        </p:nvSpPr>
+        <p:spPr>
+          <a:xfrm>
+            <a:off x="9857232" y="3246120"/>
+            <a:ext cx="1755648" cy="1188720"/>
+          </a:xfrm>
+          <a:prstGeom prst="rect">
+            <a:avLst/>
+          </a:prstGeom>
+          <a:noFill/>
+          <a:ln/>
+        </p:spPr>
+        <p:txBody>
+          <a:bodyPr wrap="square" rtlCol="0" anchor="ctr"/>
+          <a:lstStyle/>
+          <a:p>
+            <a:pPr marL="0" indent="0" algn="ctr">
+              <a:lnSpc>
+                <a:spcPct val="120000"/>
+              </a:lnSpc>
+              <a:buNone/>
+            </a:pPr>
+            <a:r>
+              <a:rPr lang="en-US" sz="950" dirty="0">
+                <a:solidFill>
+                  <a:srgbClr val="9AA5AC"/>
+                </a:solidFill>
+                <a:latin typeface="Calibri" pitchFamily="34" charset="0"/>
+                <a:ea typeface="Calibri" pitchFamily="34" charset="-122"/>
+                <a:cs typeface="Calibri" pitchFamily="34" charset="-120"/>
+              </a:rPr>
               <a:t>Configurations tailored to grocery, hospitality, and institutional catering</a:t>
             </a:r>
             <a:endParaRPr lang="en-US" sz="950" dirty="0"/>
@@ -5404,7 +5125,7 @@
           <a:bodyPr wrap="square" rtlCol="0" anchor="ctr"/>
           <a:lstStyle/>
           <a:p>
-            <a:pPr algn="r" indent="0" marL="0">
+            <a:pPr marL="0" indent="0" algn="r">
               <a:buNone/>
             </a:pPr>
             <a:r>
@@ -5438,6 +5159,7 @@
         <a:solidFill>
           <a:srgbClr val="0B0F14"/>
         </a:solidFill>
+        <a:effectLst/>
       </p:bgPr>
     </p:bg>
     <p:spTree>
@@ -5475,11 +5197,11 @@
           <a:bodyPr wrap="square" rtlCol="0" anchor="ctr"/>
           <a:lstStyle/>
           <a:p>
-            <a:pPr indent="0" marL="0">
-              <a:buNone/>
-            </a:pPr>
-            <a:r>
-              <a:rPr lang="en-US" sz="1400" b="1" spc="300" kern="0" dirty="0">
+            <a:pPr marL="0" indent="0">
+              <a:buNone/>
+            </a:pPr>
+            <a:r>
+              <a:rPr lang="en-US" sz="1400" b="1" kern="0" spc="300" dirty="0">
                 <a:solidFill>
                   <a:srgbClr val="2ECC71"/>
                 </a:solidFill>
@@ -5514,7 +5236,7 @@
           <a:bodyPr wrap="square" rtlCol="0" anchor="ctr"/>
           <a:lstStyle/>
           <a:p>
-            <a:pPr indent="0" marL="0">
+            <a:pPr marL="0" indent="0">
               <a:lnSpc>
                 <a:spcPct val="115000"/>
               </a:lnSpc>
@@ -5578,7 +5300,7 @@
           <a:bodyPr wrap="square" rtlCol="0" anchor="ctr"/>
           <a:lstStyle/>
           <a:p>
-            <a:pPr indent="0" marL="0">
+            <a:pPr marL="0" indent="0">
               <a:buNone/>
             </a:pPr>
             <a:r>
@@ -5617,7 +5339,7 @@
           <a:bodyPr wrap="square" rtlCol="0" anchor="ctr"/>
           <a:lstStyle/>
           <a:p>
-            <a:pPr indent="0" marL="0">
+            <a:pPr marL="0" indent="0">
               <a:buNone/>
             </a:pPr>
             <a:r>
@@ -5631,9 +5353,6 @@
               </a:rPr>
               <a:t>GitHub Repository:  </a:t>
             </a:r>
-            <a:pPr indent="0" marL="0">
-              <a:buNone/>
-            </a:pPr>
             <a:r>
               <a:rPr lang="en-US" sz="1350" i="1" dirty="0">
                 <a:solidFill>
@@ -5642,8 +5361,9 @@
                 <a:latin typeface="Calibri" pitchFamily="34" charset="0"/>
                 <a:ea typeface="Calibri" pitchFamily="34" charset="-122"/>
                 <a:cs typeface="Calibri" pitchFamily="34" charset="-120"/>
-              </a:rPr>
-              <a:t>[Link to be added]</a:t>
+                <a:hlinkClick r:id="rId3"/>
+              </a:rPr>
+              <a:t>https://github.com/HarshaliAlave/food-distribution-swarm</a:t>
             </a:r>
             <a:endParaRPr lang="en-US" sz="1350" dirty="0"/>
           </a:p>
@@ -5670,7 +5390,7 @@
           <a:bodyPr wrap="square" rtlCol="0" anchor="ctr"/>
           <a:lstStyle/>
           <a:p>
-            <a:pPr indent="0" marL="0">
+            <a:pPr marL="0" indent="0">
               <a:buNone/>
             </a:pPr>
             <a:r>
@@ -5684,9 +5404,6 @@
               </a:rPr>
               <a:t>Live Demo:  </a:t>
             </a:r>
-            <a:pPr indent="0" marL="0">
-              <a:buNone/>
-            </a:pPr>
             <a:r>
               <a:rPr lang="en-US" sz="1350" i="1" dirty="0">
                 <a:solidFill>
@@ -5695,8 +5412,9 @@
                 <a:latin typeface="Calibri" pitchFamily="34" charset="0"/>
                 <a:ea typeface="Calibri" pitchFamily="34" charset="-122"/>
                 <a:cs typeface="Calibri" pitchFamily="34" charset="-120"/>
-              </a:rPr>
-              <a:t>[Link to be added]</a:t>
+                <a:hlinkClick r:id="rId4"/>
+              </a:rPr>
+              <a:t>https://ecofeast.streamlit.app/</a:t>
             </a:r>
             <a:endParaRPr lang="en-US" sz="1350" dirty="0"/>
           </a:p>
@@ -5704,14 +5422,14 @@
       </p:sp>
       <p:pic>
         <p:nvPicPr>
-          <p:cNvPr id="8" name="Image 0" descr="/mnt/user-data/uploads/Screenshot_2026-07-07_151617.png">    </p:cNvPr>
+          <p:cNvPr id="8" name="Image 0" descr="/mnt/user-data/uploads/Screenshot_2026-07-07_151617.png"/>
           <p:cNvPicPr>
             <a:picLocks noChangeAspect="1"/>
           </p:cNvPicPr>
           <p:nvPr/>
         </p:nvPicPr>
         <p:blipFill>
-          <a:blip r:embed="rId1"/>
+          <a:blip r:embed="rId5"/>
           <a:stretch>
             <a:fillRect/>
           </a:stretch>
@@ -5725,7 +5443,7 @@
             <a:avLst/>
           </a:prstGeom>
           <a:effectLst>
-            <a:outerShdw sx="100000" sy="100000" kx="0" ky="0" algn="bl" rotWithShape="0" blurRad="177800" dist="50800" dir="5400000">
+            <a:outerShdw blurRad="177800" dist="50800" dir="5400000" algn="bl" rotWithShape="0">
               <a:srgbClr val="000000">
                 <a:alpha val="40000"/>
               </a:srgbClr>
@@ -5754,7 +5472,7 @@
           <a:bodyPr wrap="square" rtlCol="0" anchor="ctr"/>
           <a:lstStyle/>
           <a:p>
-            <a:pPr algn="r" indent="0" marL="0">
+            <a:pPr marL="0" indent="0" algn="r">
               <a:buNone/>
             </a:pPr>
             <a:r>
@@ -5788,6 +5506,7 @@
         <a:solidFill>
           <a:srgbClr val="0B0F14"/>
         </a:solidFill>
+        <a:effectLst/>
       </p:bgPr>
     </p:bg>
     <p:spTree>
@@ -5825,11 +5544,11 @@
           <a:bodyPr wrap="square" rtlCol="0" anchor="ctr"/>
           <a:lstStyle/>
           <a:p>
-            <a:pPr indent="0" marL="0">
-              <a:buNone/>
-            </a:pPr>
-            <a:r>
-              <a:rPr lang="en-US" sz="1300" b="1" spc="200" kern="0" dirty="0">
+            <a:pPr marL="0" indent="0">
+              <a:buNone/>
+            </a:pPr>
+            <a:r>
+              <a:rPr lang="en-US" sz="1300" b="1" kern="0" spc="200" dirty="0">
                 <a:solidFill>
                   <a:srgbClr val="2ECC71"/>
                 </a:solidFill>
@@ -5864,7 +5583,7 @@
           <a:bodyPr wrap="square" rtlCol="0" anchor="ctr"/>
           <a:lstStyle/>
           <a:p>
-            <a:pPr indent="0" marL="0">
+            <a:pPr marL="0" indent="0">
               <a:buNone/>
             </a:pPr>
             <a:r>
@@ -5903,7 +5622,7 @@
           <a:bodyPr wrap="square" rtlCol="0" anchor="ctr"/>
           <a:lstStyle/>
           <a:p>
-            <a:pPr indent="0" marL="0">
+            <a:pPr marL="0" indent="0">
               <a:lnSpc>
                 <a:spcPct val="125000"/>
               </a:lnSpc>
@@ -5945,7 +5664,7 @@
           <a:bodyPr wrap="square" rtlCol="0" anchor="ctr"/>
           <a:lstStyle/>
           <a:p>
-            <a:pPr indent="0" marL="0">
+            <a:pPr marL="0" indent="0">
               <a:lnSpc>
                 <a:spcPct val="125000"/>
               </a:lnSpc>
@@ -6010,367 +5729,7 @@
       </p:sp>
       <p:pic>
         <p:nvPicPr>
-          <p:cNvPr id="8" name="Image 0" descr="preencoded.png">    </p:cNvPr>
-          <p:cNvPicPr>
-            <a:picLocks noChangeAspect="1"/>
-          </p:cNvPicPr>
-          <p:nvPr/>
-        </p:nvPicPr>
-        <p:blipFill>
-          <a:blip r:embed="rId1"/>
-          <a:stretch>
-            <a:fillRect/>
-          </a:stretch>
-        </p:blipFill>
-        <p:spPr>
-          <a:xfrm>
-            <a:off x="777972" y="5606004"/>
-            <a:ext cx="199705" cy="199705"/>
-          </a:xfrm>
-          <a:prstGeom prst="rect">
-            <a:avLst/>
-          </a:prstGeom>
-        </p:spPr>
-      </p:pic>
-      <p:sp>
-        <p:nvSpPr>
-          <p:cNvPr id="9" name="Text 6"/>
-          <p:cNvSpPr/>
-          <p:nvPr/>
-        </p:nvSpPr>
-        <p:spPr>
-          <a:xfrm>
-            <a:off x="685800" y="5971032"/>
-            <a:ext cx="1508760" cy="274320"/>
-          </a:xfrm>
-          <a:prstGeom prst="rect">
-            <a:avLst/>
-          </a:prstGeom>
-          <a:noFill/>
-          <a:ln/>
-        </p:spPr>
-        <p:txBody>
-          <a:bodyPr wrap="square" lIns="0" tIns="0" rIns="0" bIns="0" rtlCol="0" anchor="ctr"/>
-          <a:lstStyle/>
-          <a:p>
-            <a:pPr indent="0" marL="0">
-              <a:buNone/>
-            </a:pPr>
-            <a:r>
-              <a:rPr lang="en-US" sz="1150" b="1" dirty="0">
-                <a:solidFill>
-                  <a:srgbClr val="F2F5F3"/>
-                </a:solidFill>
-                <a:latin typeface="Calibri" pitchFamily="34" charset="0"/>
-                <a:ea typeface="Calibri" pitchFamily="34" charset="-122"/>
-                <a:cs typeface="Calibri" pitchFamily="34" charset="-120"/>
-              </a:rPr>
-              <a:t>Surplus logged</a:t>
-            </a:r>
-            <a:endParaRPr lang="en-US" sz="1150" dirty="0"/>
-          </a:p>
-        </p:txBody>
-      </p:sp>
-      <p:sp>
-        <p:nvSpPr>
-          <p:cNvPr id="10" name="Text 7"/>
-          <p:cNvSpPr/>
-          <p:nvPr/>
-        </p:nvSpPr>
-        <p:spPr>
-          <a:xfrm>
-            <a:off x="685800" y="6245352"/>
-            <a:ext cx="1508760" cy="320040"/>
-          </a:xfrm>
-          <a:prstGeom prst="rect">
-            <a:avLst/>
-          </a:prstGeom>
-          <a:noFill/>
-          <a:ln/>
-        </p:spPr>
-        <p:txBody>
-          <a:bodyPr wrap="square" lIns="0" tIns="0" rIns="0" bIns="0" rtlCol="0" anchor="ctr"/>
-          <a:lstStyle/>
-          <a:p>
-            <a:pPr indent="0" marL="0">
-              <a:buNone/>
-            </a:pPr>
-            <a:r>
-              <a:rPr lang="en-US" sz="850" dirty="0">
-                <a:solidFill>
-                  <a:srgbClr val="9AA5AC"/>
-                </a:solidFill>
-                <a:latin typeface="Calibri" pitchFamily="34" charset="0"/>
-                <a:ea typeface="Calibri" pitchFamily="34" charset="-122"/>
-                <a:cs typeface="Calibri" pitchFamily="34" charset="-120"/>
-              </a:rPr>
-              <a:t>Restaurant registers excess inventory</a:t>
-            </a:r>
-            <a:endParaRPr lang="en-US" sz="850" dirty="0"/>
-          </a:p>
-        </p:txBody>
-      </p:sp>
-      <p:sp>
-        <p:nvSpPr>
-          <p:cNvPr id="11" name="Text 8"/>
-          <p:cNvSpPr/>
-          <p:nvPr/>
-        </p:nvSpPr>
-        <p:spPr>
-          <a:xfrm>
-            <a:off x="2331720" y="5760720"/>
-            <a:ext cx="320040" cy="365760"/>
-          </a:xfrm>
-          <a:prstGeom prst="rect">
-            <a:avLst/>
-          </a:prstGeom>
-          <a:noFill/>
-          <a:ln/>
-        </p:spPr>
-        <p:txBody>
-          <a:bodyPr wrap="square" rtlCol="0" anchor="ctr"/>
-          <a:lstStyle/>
-          <a:p>
-            <a:pPr algn="ctr" indent="0" marL="0">
-              <a:buNone/>
-            </a:pPr>
-            <a:r>
-              <a:rPr lang="en-US" sz="1600" dirty="0">
-                <a:solidFill>
-                  <a:srgbClr val="2ECC71"/>
-                </a:solidFill>
-              </a:rPr>
-              <a:t>→</a:t>
-            </a:r>
-            <a:endParaRPr lang="en-US" sz="1600" dirty="0"/>
-          </a:p>
-        </p:txBody>
-      </p:sp>
-      <p:sp>
-        <p:nvSpPr>
-          <p:cNvPr id="12" name="Shape 9"/>
-          <p:cNvSpPr/>
-          <p:nvPr/>
-        </p:nvSpPr>
-        <p:spPr>
-          <a:xfrm>
-            <a:off x="2651760" y="5349240"/>
-            <a:ext cx="1783080" cy="1234440"/>
-          </a:xfrm>
-          <a:prstGeom prst="roundRect">
-            <a:avLst>
-              <a:gd name="adj" fmla="val 5926"/>
-            </a:avLst>
-          </a:prstGeom>
-          <a:solidFill>
-            <a:srgbClr val="141A21"/>
-          </a:solidFill>
-          <a:ln/>
-        </p:spPr>
-      </p:sp>
-      <p:sp>
-        <p:nvSpPr>
-          <p:cNvPr id="13" name="Shape 10"/>
-          <p:cNvSpPr/>
-          <p:nvPr/>
-        </p:nvSpPr>
-        <p:spPr>
-          <a:xfrm>
-            <a:off x="2788920" y="5513832"/>
-            <a:ext cx="384048" cy="384048"/>
-          </a:xfrm>
-          <a:prstGeom prst="ellipse">
-            <a:avLst/>
-          </a:prstGeom>
-          <a:solidFill>
-            <a:srgbClr val="2ECC71"/>
-          </a:solidFill>
-          <a:ln/>
-        </p:spPr>
-      </p:sp>
-      <p:pic>
-        <p:nvPicPr>
-          <p:cNvPr id="14" name="Image 1" descr="preencoded.png">    </p:cNvPr>
-          <p:cNvPicPr>
-            <a:picLocks noChangeAspect="1"/>
-          </p:cNvPicPr>
-          <p:nvPr/>
-        </p:nvPicPr>
-        <p:blipFill>
-          <a:blip r:embed="rId2"/>
-          <a:stretch>
-            <a:fillRect/>
-          </a:stretch>
-        </p:blipFill>
-        <p:spPr>
-          <a:xfrm>
-            <a:off x="2881092" y="5606004"/>
-            <a:ext cx="199705" cy="199705"/>
-          </a:xfrm>
-          <a:prstGeom prst="rect">
-            <a:avLst/>
-          </a:prstGeom>
-        </p:spPr>
-      </p:pic>
-      <p:sp>
-        <p:nvSpPr>
-          <p:cNvPr id="15" name="Text 11"/>
-          <p:cNvSpPr/>
-          <p:nvPr/>
-        </p:nvSpPr>
-        <p:spPr>
-          <a:xfrm>
-            <a:off x="2788920" y="5971032"/>
-            <a:ext cx="1508760" cy="274320"/>
-          </a:xfrm>
-          <a:prstGeom prst="rect">
-            <a:avLst/>
-          </a:prstGeom>
-          <a:noFill/>
-          <a:ln/>
-        </p:spPr>
-        <p:txBody>
-          <a:bodyPr wrap="square" lIns="0" tIns="0" rIns="0" bIns="0" rtlCol="0" anchor="ctr"/>
-          <a:lstStyle/>
-          <a:p>
-            <a:pPr indent="0" marL="0">
-              <a:buNone/>
-            </a:pPr>
-            <a:r>
-              <a:rPr lang="en-US" sz="1150" b="1" dirty="0">
-                <a:solidFill>
-                  <a:srgbClr val="F2F5F3"/>
-                </a:solidFill>
-                <a:latin typeface="Calibri" pitchFamily="34" charset="0"/>
-                <a:ea typeface="Calibri" pitchFamily="34" charset="-122"/>
-                <a:cs typeface="Calibri" pitchFamily="34" charset="-120"/>
-              </a:rPr>
-              <a:t>Swarm matches</a:t>
-            </a:r>
-            <a:endParaRPr lang="en-US" sz="1150" dirty="0"/>
-          </a:p>
-        </p:txBody>
-      </p:sp>
-      <p:sp>
-        <p:nvSpPr>
-          <p:cNvPr id="16" name="Text 12"/>
-          <p:cNvSpPr/>
-          <p:nvPr/>
-        </p:nvSpPr>
-        <p:spPr>
-          <a:xfrm>
-            <a:off x="2788920" y="6245352"/>
-            <a:ext cx="1508760" cy="320040"/>
-          </a:xfrm>
-          <a:prstGeom prst="rect">
-            <a:avLst/>
-          </a:prstGeom>
-          <a:noFill/>
-          <a:ln/>
-        </p:spPr>
-        <p:txBody>
-          <a:bodyPr wrap="square" lIns="0" tIns="0" rIns="0" bIns="0" rtlCol="0" anchor="ctr"/>
-          <a:lstStyle/>
-          <a:p>
-            <a:pPr indent="0" marL="0">
-              <a:buNone/>
-            </a:pPr>
-            <a:r>
-              <a:rPr lang="en-US" sz="850" dirty="0">
-                <a:solidFill>
-                  <a:srgbClr val="9AA5AC"/>
-                </a:solidFill>
-                <a:latin typeface="Calibri" pitchFamily="34" charset="0"/>
-                <a:ea typeface="Calibri" pitchFamily="34" charset="-122"/>
-                <a:cs typeface="Calibri" pitchFamily="34" charset="-120"/>
-              </a:rPr>
-              <a:t>Agents negotiate routing in real time</a:t>
-            </a:r>
-            <a:endParaRPr lang="en-US" sz="850" dirty="0"/>
-          </a:p>
-        </p:txBody>
-      </p:sp>
-      <p:sp>
-        <p:nvSpPr>
-          <p:cNvPr id="17" name="Text 13"/>
-          <p:cNvSpPr/>
-          <p:nvPr/>
-        </p:nvSpPr>
-        <p:spPr>
-          <a:xfrm>
-            <a:off x="4434840" y="5760720"/>
-            <a:ext cx="320040" cy="365760"/>
-          </a:xfrm>
-          <a:prstGeom prst="rect">
-            <a:avLst/>
-          </a:prstGeom>
-          <a:noFill/>
-          <a:ln/>
-        </p:spPr>
-        <p:txBody>
-          <a:bodyPr wrap="square" rtlCol="0" anchor="ctr"/>
-          <a:lstStyle/>
-          <a:p>
-            <a:pPr algn="ctr" indent="0" marL="0">
-              <a:buNone/>
-            </a:pPr>
-            <a:r>
-              <a:rPr lang="en-US" sz="1600" dirty="0">
-                <a:solidFill>
-                  <a:srgbClr val="2ECC71"/>
-                </a:solidFill>
-              </a:rPr>
-              <a:t>→</a:t>
-            </a:r>
-            <a:endParaRPr lang="en-US" sz="1600" dirty="0"/>
-          </a:p>
-        </p:txBody>
-      </p:sp>
-      <p:sp>
-        <p:nvSpPr>
-          <p:cNvPr id="18" name="Shape 14"/>
-          <p:cNvSpPr/>
-          <p:nvPr/>
-        </p:nvSpPr>
-        <p:spPr>
-          <a:xfrm>
-            <a:off x="4754880" y="5349240"/>
-            <a:ext cx="1783080" cy="1234440"/>
-          </a:xfrm>
-          <a:prstGeom prst="roundRect">
-            <a:avLst>
-              <a:gd name="adj" fmla="val 5926"/>
-            </a:avLst>
-          </a:prstGeom>
-          <a:solidFill>
-            <a:srgbClr val="141A21"/>
-          </a:solidFill>
-          <a:ln/>
-        </p:spPr>
-      </p:sp>
-      <p:sp>
-        <p:nvSpPr>
-          <p:cNvPr id="19" name="Shape 15"/>
-          <p:cNvSpPr/>
-          <p:nvPr/>
-        </p:nvSpPr>
-        <p:spPr>
-          <a:xfrm>
-            <a:off x="4892040" y="5513832"/>
-            <a:ext cx="384048" cy="384048"/>
-          </a:xfrm>
-          <a:prstGeom prst="ellipse">
-            <a:avLst/>
-          </a:prstGeom>
-          <a:solidFill>
-            <a:srgbClr val="2ECC71"/>
-          </a:solidFill>
-          <a:ln/>
-        </p:spPr>
-      </p:sp>
-      <p:pic>
-        <p:nvPicPr>
-          <p:cNvPr id="20" name="Image 2" descr="preencoded.png">    </p:cNvPr>
+          <p:cNvPr id="8" name="Image 0" descr="preencoded.png"/>
           <p:cNvPicPr>
             <a:picLocks noChangeAspect="1"/>
           </p:cNvPicPr>
@@ -6384,7 +5743,7 @@
         </p:blipFill>
         <p:spPr>
           <a:xfrm>
-            <a:off x="4984212" y="5606004"/>
+            <a:off x="777972" y="5606004"/>
             <a:ext cx="199705" cy="199705"/>
           </a:xfrm>
           <a:prstGeom prst="rect">
@@ -6394,13 +5753,13 @@
       </p:pic>
       <p:sp>
         <p:nvSpPr>
-          <p:cNvPr id="21" name="Text 16"/>
-          <p:cNvSpPr/>
-          <p:nvPr/>
-        </p:nvSpPr>
-        <p:spPr>
-          <a:xfrm>
-            <a:off x="4892040" y="5971032"/>
+          <p:cNvPr id="9" name="Text 6"/>
+          <p:cNvSpPr/>
+          <p:nvPr/>
+        </p:nvSpPr>
+        <p:spPr>
+          <a:xfrm>
+            <a:off x="685800" y="5971032"/>
             <a:ext cx="1508760" cy="274320"/>
           </a:xfrm>
           <a:prstGeom prst="rect">
@@ -6413,7 +5772,7 @@
           <a:bodyPr wrap="square" lIns="0" tIns="0" rIns="0" bIns="0" rtlCol="0" anchor="ctr"/>
           <a:lstStyle/>
           <a:p>
-            <a:pPr indent="0" marL="0">
+            <a:pPr marL="0" indent="0">
               <a:buNone/>
             </a:pPr>
             <a:r>
@@ -6425,7 +5784,7 @@
                 <a:ea typeface="Calibri" pitchFamily="34" charset="-122"/>
                 <a:cs typeface="Calibri" pitchFamily="34" charset="-120"/>
               </a:rPr>
-              <a:t>Impact reported</a:t>
+              <a:t>Surplus logged</a:t>
             </a:r>
             <a:endParaRPr lang="en-US" sz="1150" dirty="0"/>
           </a:p>
@@ -6433,13 +5792,13 @@
       </p:sp>
       <p:sp>
         <p:nvSpPr>
-          <p:cNvPr id="22" name="Text 17"/>
-          <p:cNvSpPr/>
-          <p:nvPr/>
-        </p:nvSpPr>
-        <p:spPr>
-          <a:xfrm>
-            <a:off x="4892040" y="6245352"/>
+          <p:cNvPr id="10" name="Text 7"/>
+          <p:cNvSpPr/>
+          <p:nvPr/>
+        </p:nvSpPr>
+        <p:spPr>
+          <a:xfrm>
+            <a:off x="685800" y="6245352"/>
             <a:ext cx="1508760" cy="320040"/>
           </a:xfrm>
           <a:prstGeom prst="rect">
@@ -6452,7 +5811,7 @@
           <a:bodyPr wrap="square" lIns="0" tIns="0" rIns="0" bIns="0" rtlCol="0" anchor="ctr"/>
           <a:lstStyle/>
           <a:p>
-            <a:pPr indent="0" marL="0">
+            <a:pPr marL="0" indent="0">
               <a:buNone/>
             </a:pPr>
             <a:r>
@@ -6464,15 +5823,93 @@
                 <a:ea typeface="Calibri" pitchFamily="34" charset="-122"/>
                 <a:cs typeface="Calibri" pitchFamily="34" charset="-120"/>
               </a:rPr>
-              <a:t>ESG + delivery data compiled live</a:t>
+              <a:t>Restaurant registers excess inventory</a:t>
             </a:r>
             <a:endParaRPr lang="en-US" sz="850" dirty="0"/>
           </a:p>
         </p:txBody>
+      </p:sp>
+      <p:sp>
+        <p:nvSpPr>
+          <p:cNvPr id="11" name="Text 8"/>
+          <p:cNvSpPr/>
+          <p:nvPr/>
+        </p:nvSpPr>
+        <p:spPr>
+          <a:xfrm>
+            <a:off x="2331720" y="5760720"/>
+            <a:ext cx="320040" cy="365760"/>
+          </a:xfrm>
+          <a:prstGeom prst="rect">
+            <a:avLst/>
+          </a:prstGeom>
+          <a:noFill/>
+          <a:ln/>
+        </p:spPr>
+        <p:txBody>
+          <a:bodyPr wrap="square" rtlCol="0" anchor="ctr"/>
+          <a:lstStyle/>
+          <a:p>
+            <a:pPr marL="0" indent="0" algn="ctr">
+              <a:buNone/>
+            </a:pPr>
+            <a:r>
+              <a:rPr lang="en-US" sz="1600" dirty="0">
+                <a:solidFill>
+                  <a:srgbClr val="2ECC71"/>
+                </a:solidFill>
+              </a:rPr>
+              <a:t>→</a:t>
+            </a:r>
+            <a:endParaRPr lang="en-US" sz="1600" dirty="0"/>
+          </a:p>
+        </p:txBody>
+      </p:sp>
+      <p:sp>
+        <p:nvSpPr>
+          <p:cNvPr id="12" name="Shape 9"/>
+          <p:cNvSpPr/>
+          <p:nvPr/>
+        </p:nvSpPr>
+        <p:spPr>
+          <a:xfrm>
+            <a:off x="2651760" y="5349240"/>
+            <a:ext cx="1783080" cy="1234440"/>
+          </a:xfrm>
+          <a:prstGeom prst="roundRect">
+            <a:avLst>
+              <a:gd name="adj" fmla="val 5926"/>
+            </a:avLst>
+          </a:prstGeom>
+          <a:solidFill>
+            <a:srgbClr val="141A21"/>
+          </a:solidFill>
+          <a:ln/>
+        </p:spPr>
+      </p:sp>
+      <p:sp>
+        <p:nvSpPr>
+          <p:cNvPr id="13" name="Shape 10"/>
+          <p:cNvSpPr/>
+          <p:nvPr/>
+        </p:nvSpPr>
+        <p:spPr>
+          <a:xfrm>
+            <a:off x="2788920" y="5513832"/>
+            <a:ext cx="384048" cy="384048"/>
+          </a:xfrm>
+          <a:prstGeom prst="ellipse">
+            <a:avLst/>
+          </a:prstGeom>
+          <a:solidFill>
+            <a:srgbClr val="2ECC71"/>
+          </a:solidFill>
+          <a:ln/>
+        </p:spPr>
       </p:sp>
       <p:pic>
         <p:nvPicPr>
-          <p:cNvPr id="23" name="Image 3" descr="/mnt/user-data/uploads/6.png">    </p:cNvPr>
+          <p:cNvPr id="14" name="Image 1" descr="preencoded.png"/>
           <p:cNvPicPr>
             <a:picLocks noChangeAspect="1"/>
           </p:cNvPicPr>
@@ -6486,6 +5923,288 @@
         </p:blipFill>
         <p:spPr>
           <a:xfrm>
+            <a:off x="2881092" y="5606004"/>
+            <a:ext cx="199705" cy="199705"/>
+          </a:xfrm>
+          <a:prstGeom prst="rect">
+            <a:avLst/>
+          </a:prstGeom>
+        </p:spPr>
+      </p:pic>
+      <p:sp>
+        <p:nvSpPr>
+          <p:cNvPr id="15" name="Text 11"/>
+          <p:cNvSpPr/>
+          <p:nvPr/>
+        </p:nvSpPr>
+        <p:spPr>
+          <a:xfrm>
+            <a:off x="2788920" y="5971032"/>
+            <a:ext cx="1508760" cy="274320"/>
+          </a:xfrm>
+          <a:prstGeom prst="rect">
+            <a:avLst/>
+          </a:prstGeom>
+          <a:noFill/>
+          <a:ln/>
+        </p:spPr>
+        <p:txBody>
+          <a:bodyPr wrap="square" lIns="0" tIns="0" rIns="0" bIns="0" rtlCol="0" anchor="ctr"/>
+          <a:lstStyle/>
+          <a:p>
+            <a:pPr marL="0" indent="0">
+              <a:buNone/>
+            </a:pPr>
+            <a:r>
+              <a:rPr lang="en-US" sz="1150" b="1" dirty="0">
+                <a:solidFill>
+                  <a:srgbClr val="F2F5F3"/>
+                </a:solidFill>
+                <a:latin typeface="Calibri" pitchFamily="34" charset="0"/>
+                <a:ea typeface="Calibri" pitchFamily="34" charset="-122"/>
+                <a:cs typeface="Calibri" pitchFamily="34" charset="-120"/>
+              </a:rPr>
+              <a:t>Swarm matches</a:t>
+            </a:r>
+            <a:endParaRPr lang="en-US" sz="1150" dirty="0"/>
+          </a:p>
+        </p:txBody>
+      </p:sp>
+      <p:sp>
+        <p:nvSpPr>
+          <p:cNvPr id="16" name="Text 12"/>
+          <p:cNvSpPr/>
+          <p:nvPr/>
+        </p:nvSpPr>
+        <p:spPr>
+          <a:xfrm>
+            <a:off x="2788920" y="6245352"/>
+            <a:ext cx="1508760" cy="320040"/>
+          </a:xfrm>
+          <a:prstGeom prst="rect">
+            <a:avLst/>
+          </a:prstGeom>
+          <a:noFill/>
+          <a:ln/>
+        </p:spPr>
+        <p:txBody>
+          <a:bodyPr wrap="square" lIns="0" tIns="0" rIns="0" bIns="0" rtlCol="0" anchor="ctr"/>
+          <a:lstStyle/>
+          <a:p>
+            <a:pPr marL="0" indent="0">
+              <a:buNone/>
+            </a:pPr>
+            <a:r>
+              <a:rPr lang="en-US" sz="850" dirty="0">
+                <a:solidFill>
+                  <a:srgbClr val="9AA5AC"/>
+                </a:solidFill>
+                <a:latin typeface="Calibri" pitchFamily="34" charset="0"/>
+                <a:ea typeface="Calibri" pitchFamily="34" charset="-122"/>
+                <a:cs typeface="Calibri" pitchFamily="34" charset="-120"/>
+              </a:rPr>
+              <a:t>Agents negotiate routing in real time</a:t>
+            </a:r>
+            <a:endParaRPr lang="en-US" sz="850" dirty="0"/>
+          </a:p>
+        </p:txBody>
+      </p:sp>
+      <p:sp>
+        <p:nvSpPr>
+          <p:cNvPr id="17" name="Text 13"/>
+          <p:cNvSpPr/>
+          <p:nvPr/>
+        </p:nvSpPr>
+        <p:spPr>
+          <a:xfrm>
+            <a:off x="4434840" y="5760720"/>
+            <a:ext cx="320040" cy="365760"/>
+          </a:xfrm>
+          <a:prstGeom prst="rect">
+            <a:avLst/>
+          </a:prstGeom>
+          <a:noFill/>
+          <a:ln/>
+        </p:spPr>
+        <p:txBody>
+          <a:bodyPr wrap="square" rtlCol="0" anchor="ctr"/>
+          <a:lstStyle/>
+          <a:p>
+            <a:pPr marL="0" indent="0" algn="ctr">
+              <a:buNone/>
+            </a:pPr>
+            <a:r>
+              <a:rPr lang="en-US" sz="1600" dirty="0">
+                <a:solidFill>
+                  <a:srgbClr val="2ECC71"/>
+                </a:solidFill>
+              </a:rPr>
+              <a:t>→</a:t>
+            </a:r>
+            <a:endParaRPr lang="en-US" sz="1600" dirty="0"/>
+          </a:p>
+        </p:txBody>
+      </p:sp>
+      <p:sp>
+        <p:nvSpPr>
+          <p:cNvPr id="18" name="Shape 14"/>
+          <p:cNvSpPr/>
+          <p:nvPr/>
+        </p:nvSpPr>
+        <p:spPr>
+          <a:xfrm>
+            <a:off x="4754880" y="5349240"/>
+            <a:ext cx="1783080" cy="1234440"/>
+          </a:xfrm>
+          <a:prstGeom prst="roundRect">
+            <a:avLst>
+              <a:gd name="adj" fmla="val 5926"/>
+            </a:avLst>
+          </a:prstGeom>
+          <a:solidFill>
+            <a:srgbClr val="141A21"/>
+          </a:solidFill>
+          <a:ln/>
+        </p:spPr>
+      </p:sp>
+      <p:sp>
+        <p:nvSpPr>
+          <p:cNvPr id="19" name="Shape 15"/>
+          <p:cNvSpPr/>
+          <p:nvPr/>
+        </p:nvSpPr>
+        <p:spPr>
+          <a:xfrm>
+            <a:off x="4892040" y="5513832"/>
+            <a:ext cx="384048" cy="384048"/>
+          </a:xfrm>
+          <a:prstGeom prst="ellipse">
+            <a:avLst/>
+          </a:prstGeom>
+          <a:solidFill>
+            <a:srgbClr val="2ECC71"/>
+          </a:solidFill>
+          <a:ln/>
+        </p:spPr>
+      </p:sp>
+      <p:pic>
+        <p:nvPicPr>
+          <p:cNvPr id="20" name="Image 2" descr="preencoded.png"/>
+          <p:cNvPicPr>
+            <a:picLocks noChangeAspect="1"/>
+          </p:cNvPicPr>
+          <p:nvPr/>
+        </p:nvPicPr>
+        <p:blipFill>
+          <a:blip r:embed="rId5"/>
+          <a:stretch>
+            <a:fillRect/>
+          </a:stretch>
+        </p:blipFill>
+        <p:spPr>
+          <a:xfrm>
+            <a:off x="4984212" y="5606004"/>
+            <a:ext cx="199705" cy="199705"/>
+          </a:xfrm>
+          <a:prstGeom prst="rect">
+            <a:avLst/>
+          </a:prstGeom>
+        </p:spPr>
+      </p:pic>
+      <p:sp>
+        <p:nvSpPr>
+          <p:cNvPr id="21" name="Text 16"/>
+          <p:cNvSpPr/>
+          <p:nvPr/>
+        </p:nvSpPr>
+        <p:spPr>
+          <a:xfrm>
+            <a:off x="4892040" y="5971032"/>
+            <a:ext cx="1508760" cy="274320"/>
+          </a:xfrm>
+          <a:prstGeom prst="rect">
+            <a:avLst/>
+          </a:prstGeom>
+          <a:noFill/>
+          <a:ln/>
+        </p:spPr>
+        <p:txBody>
+          <a:bodyPr wrap="square" lIns="0" tIns="0" rIns="0" bIns="0" rtlCol="0" anchor="ctr"/>
+          <a:lstStyle/>
+          <a:p>
+            <a:pPr marL="0" indent="0">
+              <a:buNone/>
+            </a:pPr>
+            <a:r>
+              <a:rPr lang="en-US" sz="1150" b="1" dirty="0">
+                <a:solidFill>
+                  <a:srgbClr val="F2F5F3"/>
+                </a:solidFill>
+                <a:latin typeface="Calibri" pitchFamily="34" charset="0"/>
+                <a:ea typeface="Calibri" pitchFamily="34" charset="-122"/>
+                <a:cs typeface="Calibri" pitchFamily="34" charset="-120"/>
+              </a:rPr>
+              <a:t>Impact reported</a:t>
+            </a:r>
+            <a:endParaRPr lang="en-US" sz="1150" dirty="0"/>
+          </a:p>
+        </p:txBody>
+      </p:sp>
+      <p:sp>
+        <p:nvSpPr>
+          <p:cNvPr id="22" name="Text 17"/>
+          <p:cNvSpPr/>
+          <p:nvPr/>
+        </p:nvSpPr>
+        <p:spPr>
+          <a:xfrm>
+            <a:off x="4892040" y="6245352"/>
+            <a:ext cx="1508760" cy="320040"/>
+          </a:xfrm>
+          <a:prstGeom prst="rect">
+            <a:avLst/>
+          </a:prstGeom>
+          <a:noFill/>
+          <a:ln/>
+        </p:spPr>
+        <p:txBody>
+          <a:bodyPr wrap="square" lIns="0" tIns="0" rIns="0" bIns="0" rtlCol="0" anchor="ctr"/>
+          <a:lstStyle/>
+          <a:p>
+            <a:pPr marL="0" indent="0">
+              <a:buNone/>
+            </a:pPr>
+            <a:r>
+              <a:rPr lang="en-US" sz="850" dirty="0">
+                <a:solidFill>
+                  <a:srgbClr val="9AA5AC"/>
+                </a:solidFill>
+                <a:latin typeface="Calibri" pitchFamily="34" charset="0"/>
+                <a:ea typeface="Calibri" pitchFamily="34" charset="-122"/>
+                <a:cs typeface="Calibri" pitchFamily="34" charset="-120"/>
+              </a:rPr>
+              <a:t>ESG + delivery data compiled live</a:t>
+            </a:r>
+            <a:endParaRPr lang="en-US" sz="850" dirty="0"/>
+          </a:p>
+        </p:txBody>
+      </p:sp>
+      <p:pic>
+        <p:nvPicPr>
+          <p:cNvPr id="23" name="Image 3" descr="/mnt/user-data/uploads/6.png"/>
+          <p:cNvPicPr>
+            <a:picLocks noChangeAspect="1"/>
+          </p:cNvPicPr>
+          <p:nvPr/>
+        </p:nvPicPr>
+        <p:blipFill>
+          <a:blip r:embed="rId6"/>
+          <a:stretch>
+            <a:fillRect/>
+          </a:stretch>
+        </p:blipFill>
+        <p:spPr>
+          <a:xfrm>
             <a:off x="6537960" y="1600200"/>
             <a:ext cx="5120640" cy="2264283"/>
           </a:xfrm>
@@ -6493,7 +6212,7 @@
             <a:avLst/>
           </a:prstGeom>
           <a:effectLst>
-            <a:outerShdw sx="100000" sy="100000" kx="0" ky="0" algn="bl" rotWithShape="0" blurRad="127000" dist="38100" dir="5400000">
+            <a:outerShdw blurRad="127000" dist="38100" dir="5400000" algn="bl" rotWithShape="0">
               <a:srgbClr val="000000">
                 <a:alpha val="35000"/>
               </a:srgbClr>
@@ -6522,7 +6241,7 @@
           <a:bodyPr wrap="square" rtlCol="0" anchor="ctr"/>
           <a:lstStyle/>
           <a:p>
-            <a:pPr indent="0" marL="0">
+            <a:pPr marL="0" indent="0">
               <a:buNone/>
             </a:pPr>
             <a:r>
@@ -6561,7 +6280,7 @@
           <a:bodyPr wrap="square" rtlCol="0" anchor="ctr"/>
           <a:lstStyle/>
           <a:p>
-            <a:pPr algn="r" indent="0" marL="0">
+            <a:pPr marL="0" indent="0" algn="r">
               <a:buNone/>
             </a:pPr>
             <a:r>
@@ -6595,6 +6314,7 @@
         <a:solidFill>
           <a:srgbClr val="0B0F14"/>
         </a:solidFill>
+        <a:effectLst/>
       </p:bgPr>
     </p:bg>
     <p:spTree>
@@ -6632,11 +6352,11 @@
           <a:bodyPr wrap="square" rtlCol="0" anchor="ctr"/>
           <a:lstStyle/>
           <a:p>
-            <a:pPr indent="0" marL="0">
-              <a:buNone/>
-            </a:pPr>
-            <a:r>
-              <a:rPr lang="en-US" sz="1300" b="1" spc="200" kern="0" dirty="0">
+            <a:pPr marL="0" indent="0">
+              <a:buNone/>
+            </a:pPr>
+            <a:r>
+              <a:rPr lang="en-US" sz="1300" b="1" kern="0" spc="200" dirty="0">
                 <a:solidFill>
                   <a:srgbClr val="2ECC71"/>
                 </a:solidFill>
@@ -6671,7 +6391,7 @@
           <a:bodyPr wrap="square" rtlCol="0" anchor="ctr"/>
           <a:lstStyle/>
           <a:p>
-            <a:pPr indent="0" marL="0">
+            <a:pPr marL="0" indent="0">
               <a:buNone/>
             </a:pPr>
             <a:r>
@@ -6733,301 +6453,7 @@
       </p:sp>
       <p:pic>
         <p:nvPicPr>
-          <p:cNvPr id="6" name="Image 0" descr="preencoded.png">    </p:cNvPr>
-          <p:cNvPicPr>
-            <a:picLocks noChangeAspect="1"/>
-          </p:cNvPicPr>
-          <p:nvPr/>
-        </p:nvPicPr>
-        <p:blipFill>
-          <a:blip r:embed="rId1"/>
-          <a:stretch>
-            <a:fillRect/>
-          </a:stretch>
-        </p:blipFill>
-        <p:spPr>
-          <a:xfrm>
-            <a:off x="943661" y="2086661"/>
-            <a:ext cx="261518" cy="261518"/>
-          </a:xfrm>
-          <a:prstGeom prst="rect">
-            <a:avLst/>
-          </a:prstGeom>
-        </p:spPr>
-      </p:pic>
-      <p:sp>
-        <p:nvSpPr>
-          <p:cNvPr id="7" name="Text 4"/>
-          <p:cNvSpPr/>
-          <p:nvPr/>
-        </p:nvSpPr>
-        <p:spPr>
-          <a:xfrm>
-            <a:off x="1508760" y="1947672"/>
-            <a:ext cx="4160520" cy="502920"/>
-          </a:xfrm>
-          <a:prstGeom prst="rect">
-            <a:avLst/>
-          </a:prstGeom>
-          <a:noFill/>
-          <a:ln/>
-        </p:spPr>
-        <p:txBody>
-          <a:bodyPr wrap="square" lIns="0" tIns="0" rIns="0" bIns="0" rtlCol="0" anchor="ctr"/>
-          <a:lstStyle/>
-          <a:p>
-            <a:pPr indent="0" marL="0">
-              <a:buNone/>
-            </a:pPr>
-            <a:r>
-              <a:rPr lang="en-US" sz="1500" b="1" dirty="0">
-                <a:solidFill>
-                  <a:srgbClr val="F2F5F3"/>
-                </a:solidFill>
-                <a:latin typeface="Calibri" pitchFamily="34" charset="0"/>
-                <a:ea typeface="Calibri" pitchFamily="34" charset="-122"/>
-                <a:cs typeface="Calibri" pitchFamily="34" charset="-120"/>
-              </a:rPr>
-              <a:t>Labor-intensive matching</a:t>
-            </a:r>
-            <a:endParaRPr lang="en-US" sz="1500" dirty="0"/>
-          </a:p>
-        </p:txBody>
-      </p:sp>
-      <p:sp>
-        <p:nvSpPr>
-          <p:cNvPr id="8" name="Text 5"/>
-          <p:cNvSpPr/>
-          <p:nvPr/>
-        </p:nvSpPr>
-        <p:spPr>
-          <a:xfrm>
-            <a:off x="822960" y="2560320"/>
-            <a:ext cx="4800600" cy="960120"/>
-          </a:xfrm>
-          <a:prstGeom prst="rect">
-            <a:avLst/>
-          </a:prstGeom>
-          <a:noFill/>
-          <a:ln/>
-        </p:spPr>
-        <p:txBody>
-          <a:bodyPr wrap="square" rtlCol="0" anchor="ctr"/>
-          <a:lstStyle/>
-          <a:p>
-            <a:pPr indent="0" marL="0">
-              <a:lnSpc>
-                <a:spcPct val="120000"/>
-              </a:lnSpc>
-              <a:buNone/>
-            </a:pPr>
-            <a:r>
-              <a:rPr lang="en-US" sz="1150" dirty="0">
-                <a:solidFill>
-                  <a:srgbClr val="9AA5AC"/>
-                </a:solidFill>
-                <a:latin typeface="Calibri" pitchFamily="34" charset="0"/>
-                <a:ea typeface="Calibri" pitchFamily="34" charset="-122"/>
-                <a:cs typeface="Calibri" pitchFamily="34" charset="-120"/>
-              </a:rPr>
-              <a:t>Manual supply-chain pairing between retail centers and shelters depends heavily on staff bandwidth and arbitrary schedules.</a:t>
-            </a:r>
-            <a:endParaRPr lang="en-US" sz="1150" dirty="0"/>
-          </a:p>
-        </p:txBody>
-      </p:sp>
-      <p:sp>
-        <p:nvSpPr>
-          <p:cNvPr id="9" name="Shape 6"/>
-          <p:cNvSpPr/>
-          <p:nvPr/>
-        </p:nvSpPr>
-        <p:spPr>
-          <a:xfrm>
-            <a:off x="6217920" y="1691640"/>
-            <a:ext cx="5349240" cy="1965960"/>
-          </a:xfrm>
-          <a:prstGeom prst="roundRect">
-            <a:avLst>
-              <a:gd name="adj" fmla="val 4186"/>
-            </a:avLst>
-          </a:prstGeom>
-          <a:solidFill>
-            <a:srgbClr val="141A21"/>
-          </a:solidFill>
-          <a:ln/>
-        </p:spPr>
-      </p:sp>
-      <p:sp>
-        <p:nvSpPr>
-          <p:cNvPr id="10" name="Shape 7"/>
-          <p:cNvSpPr/>
-          <p:nvPr/>
-        </p:nvSpPr>
-        <p:spPr>
-          <a:xfrm>
-            <a:off x="6492240" y="1965960"/>
-            <a:ext cx="502920" cy="502920"/>
-          </a:xfrm>
-          <a:prstGeom prst="ellipse">
-            <a:avLst/>
-          </a:prstGeom>
-          <a:solidFill>
-            <a:srgbClr val="2ECC71"/>
-          </a:solidFill>
-          <a:ln/>
-        </p:spPr>
-      </p:sp>
-      <p:pic>
-        <p:nvPicPr>
-          <p:cNvPr id="11" name="Image 1" descr="preencoded.png">    </p:cNvPr>
-          <p:cNvPicPr>
-            <a:picLocks noChangeAspect="1"/>
-          </p:cNvPicPr>
-          <p:nvPr/>
-        </p:nvPicPr>
-        <p:blipFill>
-          <a:blip r:embed="rId2"/>
-          <a:stretch>
-            <a:fillRect/>
-          </a:stretch>
-        </p:blipFill>
-        <p:spPr>
-          <a:xfrm>
-            <a:off x="6612941" y="2086661"/>
-            <a:ext cx="261518" cy="261518"/>
-          </a:xfrm>
-          <a:prstGeom prst="rect">
-            <a:avLst/>
-          </a:prstGeom>
-        </p:spPr>
-      </p:pic>
-      <p:sp>
-        <p:nvSpPr>
-          <p:cNvPr id="12" name="Text 8"/>
-          <p:cNvSpPr/>
-          <p:nvPr/>
-        </p:nvSpPr>
-        <p:spPr>
-          <a:xfrm>
-            <a:off x="7178040" y="1947672"/>
-            <a:ext cx="4160520" cy="502920"/>
-          </a:xfrm>
-          <a:prstGeom prst="rect">
-            <a:avLst/>
-          </a:prstGeom>
-          <a:noFill/>
-          <a:ln/>
-        </p:spPr>
-        <p:txBody>
-          <a:bodyPr wrap="square" lIns="0" tIns="0" rIns="0" bIns="0" rtlCol="0" anchor="ctr"/>
-          <a:lstStyle/>
-          <a:p>
-            <a:pPr indent="0" marL="0">
-              <a:buNone/>
-            </a:pPr>
-            <a:r>
-              <a:rPr lang="en-US" sz="1500" b="1" dirty="0">
-                <a:solidFill>
-                  <a:srgbClr val="F2F5F3"/>
-                </a:solidFill>
-                <a:latin typeface="Calibri" pitchFamily="34" charset="0"/>
-                <a:ea typeface="Calibri" pitchFamily="34" charset="-122"/>
-                <a:cs typeface="Calibri" pitchFamily="34" charset="-120"/>
-              </a:rPr>
-              <a:t>Static demand forecasts</a:t>
-            </a:r>
-            <a:endParaRPr lang="en-US" sz="1500" dirty="0"/>
-          </a:p>
-        </p:txBody>
-      </p:sp>
-      <p:sp>
-        <p:nvSpPr>
-          <p:cNvPr id="13" name="Text 9"/>
-          <p:cNvSpPr/>
-          <p:nvPr/>
-        </p:nvSpPr>
-        <p:spPr>
-          <a:xfrm>
-            <a:off x="6492240" y="2560320"/>
-            <a:ext cx="4800600" cy="960120"/>
-          </a:xfrm>
-          <a:prstGeom prst="rect">
-            <a:avLst/>
-          </a:prstGeom>
-          <a:noFill/>
-          <a:ln/>
-        </p:spPr>
-        <p:txBody>
-          <a:bodyPr wrap="square" rtlCol="0" anchor="ctr"/>
-          <a:lstStyle/>
-          <a:p>
-            <a:pPr indent="0" marL="0">
-              <a:lnSpc>
-                <a:spcPct val="120000"/>
-              </a:lnSpc>
-              <a:buNone/>
-            </a:pPr>
-            <a:r>
-              <a:rPr lang="en-US" sz="1150" dirty="0">
-                <a:solidFill>
-                  <a:srgbClr val="9AA5AC"/>
-                </a:solidFill>
-                <a:latin typeface="Calibri" pitchFamily="34" charset="0"/>
-                <a:ea typeface="Calibri" pitchFamily="34" charset="-122"/>
-                <a:cs typeface="Calibri" pitchFamily="34" charset="-120"/>
-              </a:rPr>
-              <a:t>Inventory systems lack live environmental context, failing to predict localized demand shifts such as sudden weather disruptions.</a:t>
-            </a:r>
-            <a:endParaRPr lang="en-US" sz="1150" dirty="0"/>
-          </a:p>
-        </p:txBody>
-      </p:sp>
-      <p:sp>
-        <p:nvSpPr>
-          <p:cNvPr id="14" name="Shape 10"/>
-          <p:cNvSpPr/>
-          <p:nvPr/>
-        </p:nvSpPr>
-        <p:spPr>
-          <a:xfrm>
-            <a:off x="548640" y="3977640"/>
-            <a:ext cx="5349240" cy="1965960"/>
-          </a:xfrm>
-          <a:prstGeom prst="roundRect">
-            <a:avLst>
-              <a:gd name="adj" fmla="val 4186"/>
-            </a:avLst>
-          </a:prstGeom>
-          <a:solidFill>
-            <a:srgbClr val="141A21"/>
-          </a:solidFill>
-          <a:ln/>
-        </p:spPr>
-      </p:sp>
-      <p:sp>
-        <p:nvSpPr>
-          <p:cNvPr id="15" name="Shape 11"/>
-          <p:cNvSpPr/>
-          <p:nvPr/>
-        </p:nvSpPr>
-        <p:spPr>
-          <a:xfrm>
-            <a:off x="822960" y="4251960"/>
-            <a:ext cx="502920" cy="502920"/>
-          </a:xfrm>
-          <a:prstGeom prst="ellipse">
-            <a:avLst/>
-          </a:prstGeom>
-          <a:solidFill>
-            <a:srgbClr val="2ECC71"/>
-          </a:solidFill>
-          <a:ln/>
-        </p:spPr>
-      </p:sp>
-      <p:pic>
-        <p:nvPicPr>
-          <p:cNvPr id="16" name="Image 2" descr="preencoded.png">    </p:cNvPr>
+          <p:cNvPr id="6" name="Image 0" descr="preencoded.png"/>
           <p:cNvPicPr>
             <a:picLocks noChangeAspect="1"/>
           </p:cNvPicPr>
@@ -7041,7 +6467,7 @@
         </p:blipFill>
         <p:spPr>
           <a:xfrm>
-            <a:off x="943661" y="4372661"/>
+            <a:off x="943661" y="2086661"/>
             <a:ext cx="261518" cy="261518"/>
           </a:xfrm>
           <a:prstGeom prst="rect">
@@ -7051,13 +6477,13 @@
       </p:pic>
       <p:sp>
         <p:nvSpPr>
-          <p:cNvPr id="17" name="Text 12"/>
-          <p:cNvSpPr/>
-          <p:nvPr/>
-        </p:nvSpPr>
-        <p:spPr>
-          <a:xfrm>
-            <a:off x="1508760" y="4233672"/>
+          <p:cNvPr id="7" name="Text 4"/>
+          <p:cNvSpPr/>
+          <p:nvPr/>
+        </p:nvSpPr>
+        <p:spPr>
+          <a:xfrm>
+            <a:off x="1508760" y="1947672"/>
             <a:ext cx="4160520" cy="502920"/>
           </a:xfrm>
           <a:prstGeom prst="rect">
@@ -7070,7 +6496,7 @@
           <a:bodyPr wrap="square" lIns="0" tIns="0" rIns="0" bIns="0" rtlCol="0" anchor="ctr"/>
           <a:lstStyle/>
           <a:p>
-            <a:pPr indent="0" marL="0">
+            <a:pPr marL="0" indent="0">
               <a:buNone/>
             </a:pPr>
             <a:r>
@@ -7082,7 +6508,7 @@
                 <a:ea typeface="Calibri" pitchFamily="34" charset="-122"/>
                 <a:cs typeface="Calibri" pitchFamily="34" charset="-120"/>
               </a:rPr>
-              <a:t>Step-by-step micro-management</a:t>
+              <a:t>Labor-intensive matching</a:t>
             </a:r>
             <a:endParaRPr lang="en-US" sz="1500" dirty="0"/>
           </a:p>
@@ -7090,13 +6516,13 @@
       </p:sp>
       <p:sp>
         <p:nvSpPr>
-          <p:cNvPr id="18" name="Text 13"/>
-          <p:cNvSpPr/>
-          <p:nvPr/>
-        </p:nvSpPr>
-        <p:spPr>
-          <a:xfrm>
-            <a:off x="822960" y="4846320"/>
+          <p:cNvPr id="8" name="Text 5"/>
+          <p:cNvSpPr/>
+          <p:nvPr/>
+        </p:nvSpPr>
+        <p:spPr>
+          <a:xfrm>
+            <a:off x="822960" y="2560320"/>
             <a:ext cx="4800600" cy="960120"/>
           </a:xfrm>
           <a:prstGeom prst="rect">
@@ -7109,7 +6535,7 @@
           <a:bodyPr wrap="square" rtlCol="0" anchor="ctr"/>
           <a:lstStyle/>
           <a:p>
-            <a:pPr indent="0" marL="0">
+            <a:pPr marL="0" indent="0">
               <a:lnSpc>
                 <a:spcPct val="120000"/>
               </a:lnSpc>
@@ -7124,7 +6550,7 @@
                 <a:ea typeface="Calibri" pitchFamily="34" charset="-122"/>
                 <a:cs typeface="Calibri" pitchFamily="34" charset="-120"/>
               </a:rPr>
-              <a:t>Donation setups require administrators to issue every pickup and verify every route manually, with no end-to-end delegation.</a:t>
+              <a:t>Manual supply-chain pairing between retail centers and shelters depends heavily on staff bandwidth and arbitrary schedules.</a:t>
             </a:r>
             <a:endParaRPr lang="en-US" sz="1150" dirty="0"/>
           </a:p>
@@ -7132,13 +6558,13 @@
       </p:sp>
       <p:sp>
         <p:nvSpPr>
-          <p:cNvPr id="19" name="Shape 14"/>
-          <p:cNvSpPr/>
-          <p:nvPr/>
-        </p:nvSpPr>
-        <p:spPr>
-          <a:xfrm>
-            <a:off x="6217920" y="3977640"/>
+          <p:cNvPr id="9" name="Shape 6"/>
+          <p:cNvSpPr/>
+          <p:nvPr/>
+        </p:nvSpPr>
+        <p:spPr>
+          <a:xfrm>
+            <a:off x="6217920" y="1691640"/>
             <a:ext cx="5349240" cy="1965960"/>
           </a:xfrm>
           <a:prstGeom prst="roundRect">
@@ -7154,13 +6580,13 @@
       </p:sp>
       <p:sp>
         <p:nvSpPr>
-          <p:cNvPr id="20" name="Shape 15"/>
-          <p:cNvSpPr/>
-          <p:nvPr/>
-        </p:nvSpPr>
-        <p:spPr>
-          <a:xfrm>
-            <a:off x="6492240" y="4251960"/>
+          <p:cNvPr id="10" name="Shape 7"/>
+          <p:cNvSpPr/>
+          <p:nvPr/>
+        </p:nvSpPr>
+        <p:spPr>
+          <a:xfrm>
+            <a:off x="6492240" y="1965960"/>
             <a:ext cx="502920" cy="502920"/>
           </a:xfrm>
           <a:prstGeom prst="ellipse">
@@ -7174,7 +6600,7 @@
       </p:sp>
       <p:pic>
         <p:nvPicPr>
-          <p:cNvPr id="21" name="Image 3" descr="preencoded.png">    </p:cNvPr>
+          <p:cNvPr id="11" name="Image 1" descr="preencoded.png"/>
           <p:cNvPicPr>
             <a:picLocks noChangeAspect="1"/>
           </p:cNvPicPr>
@@ -7188,7 +6614,7 @@
         </p:blipFill>
         <p:spPr>
           <a:xfrm>
-            <a:off x="6612941" y="4372661"/>
+            <a:off x="6612941" y="2086661"/>
             <a:ext cx="261518" cy="261518"/>
           </a:xfrm>
           <a:prstGeom prst="rect">
@@ -7198,13 +6624,13 @@
       </p:pic>
       <p:sp>
         <p:nvSpPr>
-          <p:cNvPr id="22" name="Text 16"/>
-          <p:cNvSpPr/>
-          <p:nvPr/>
-        </p:nvSpPr>
-        <p:spPr>
-          <a:xfrm>
-            <a:off x="7178040" y="4233672"/>
+          <p:cNvPr id="12" name="Text 8"/>
+          <p:cNvSpPr/>
+          <p:nvPr/>
+        </p:nvSpPr>
+        <p:spPr>
+          <a:xfrm>
+            <a:off x="7178040" y="1947672"/>
             <a:ext cx="4160520" cy="502920"/>
           </a:xfrm>
           <a:prstGeom prst="rect">
@@ -7217,7 +6643,7 @@
           <a:bodyPr wrap="square" lIns="0" tIns="0" rIns="0" bIns="0" rtlCol="0" anchor="ctr"/>
           <a:lstStyle/>
           <a:p>
-            <a:pPr indent="0" marL="0">
+            <a:pPr marL="0" indent="0">
               <a:buNone/>
             </a:pPr>
             <a:r>
@@ -7229,7 +6655,7 @@
                 <a:ea typeface="Calibri" pitchFamily="34" charset="-122"/>
                 <a:cs typeface="Calibri" pitchFamily="34" charset="-120"/>
               </a:rPr>
-              <a:t>The widening resource gap</a:t>
+              <a:t>Static demand forecasts</a:t>
             </a:r>
             <a:endParaRPr lang="en-US" sz="1500" dirty="0"/>
           </a:p>
@@ -7237,13 +6663,13 @@
       </p:sp>
       <p:sp>
         <p:nvSpPr>
-          <p:cNvPr id="23" name="Text 17"/>
-          <p:cNvSpPr/>
-          <p:nvPr/>
-        </p:nvSpPr>
-        <p:spPr>
-          <a:xfrm>
-            <a:off x="6492240" y="4846320"/>
+          <p:cNvPr id="13" name="Text 9"/>
+          <p:cNvSpPr/>
+          <p:nvPr/>
+        </p:nvSpPr>
+        <p:spPr>
+          <a:xfrm>
+            <a:off x="6492240" y="2560320"/>
             <a:ext cx="4800600" cy="960120"/>
           </a:xfrm>
           <a:prstGeom prst="rect">
@@ -7256,7 +6682,7 @@
           <a:bodyPr wrap="square" rtlCol="0" anchor="ctr"/>
           <a:lstStyle/>
           <a:p>
-            <a:pPr indent="0" marL="0">
+            <a:pPr marL="0" indent="0">
               <a:lnSpc>
                 <a:spcPct val="120000"/>
               </a:lnSpc>
@@ -7271,6 +6697,300 @@
                 <a:ea typeface="Calibri" pitchFamily="34" charset="-122"/>
                 <a:cs typeface="Calibri" pitchFamily="34" charset="-120"/>
               </a:rPr>
+              <a:t>Inventory systems lack live environmental context, failing to predict localized demand shifts such as sudden weather disruptions.</a:t>
+            </a:r>
+            <a:endParaRPr lang="en-US" sz="1150" dirty="0"/>
+          </a:p>
+        </p:txBody>
+      </p:sp>
+      <p:sp>
+        <p:nvSpPr>
+          <p:cNvPr id="14" name="Shape 10"/>
+          <p:cNvSpPr/>
+          <p:nvPr/>
+        </p:nvSpPr>
+        <p:spPr>
+          <a:xfrm>
+            <a:off x="548640" y="3977640"/>
+            <a:ext cx="5349240" cy="1965960"/>
+          </a:xfrm>
+          <a:prstGeom prst="roundRect">
+            <a:avLst>
+              <a:gd name="adj" fmla="val 4186"/>
+            </a:avLst>
+          </a:prstGeom>
+          <a:solidFill>
+            <a:srgbClr val="141A21"/>
+          </a:solidFill>
+          <a:ln/>
+        </p:spPr>
+      </p:sp>
+      <p:sp>
+        <p:nvSpPr>
+          <p:cNvPr id="15" name="Shape 11"/>
+          <p:cNvSpPr/>
+          <p:nvPr/>
+        </p:nvSpPr>
+        <p:spPr>
+          <a:xfrm>
+            <a:off x="822960" y="4251960"/>
+            <a:ext cx="502920" cy="502920"/>
+          </a:xfrm>
+          <a:prstGeom prst="ellipse">
+            <a:avLst/>
+          </a:prstGeom>
+          <a:solidFill>
+            <a:srgbClr val="2ECC71"/>
+          </a:solidFill>
+          <a:ln/>
+        </p:spPr>
+      </p:sp>
+      <p:pic>
+        <p:nvPicPr>
+          <p:cNvPr id="16" name="Image 2" descr="preencoded.png"/>
+          <p:cNvPicPr>
+            <a:picLocks noChangeAspect="1"/>
+          </p:cNvPicPr>
+          <p:nvPr/>
+        </p:nvPicPr>
+        <p:blipFill>
+          <a:blip r:embed="rId5"/>
+          <a:stretch>
+            <a:fillRect/>
+          </a:stretch>
+        </p:blipFill>
+        <p:spPr>
+          <a:xfrm>
+            <a:off x="943661" y="4372661"/>
+            <a:ext cx="261518" cy="261518"/>
+          </a:xfrm>
+          <a:prstGeom prst="rect">
+            <a:avLst/>
+          </a:prstGeom>
+        </p:spPr>
+      </p:pic>
+      <p:sp>
+        <p:nvSpPr>
+          <p:cNvPr id="17" name="Text 12"/>
+          <p:cNvSpPr/>
+          <p:nvPr/>
+        </p:nvSpPr>
+        <p:spPr>
+          <a:xfrm>
+            <a:off x="1508760" y="4233672"/>
+            <a:ext cx="4160520" cy="502920"/>
+          </a:xfrm>
+          <a:prstGeom prst="rect">
+            <a:avLst/>
+          </a:prstGeom>
+          <a:noFill/>
+          <a:ln/>
+        </p:spPr>
+        <p:txBody>
+          <a:bodyPr wrap="square" lIns="0" tIns="0" rIns="0" bIns="0" rtlCol="0" anchor="ctr"/>
+          <a:lstStyle/>
+          <a:p>
+            <a:pPr marL="0" indent="0">
+              <a:buNone/>
+            </a:pPr>
+            <a:r>
+              <a:rPr lang="en-US" sz="1500" b="1" dirty="0">
+                <a:solidFill>
+                  <a:srgbClr val="F2F5F3"/>
+                </a:solidFill>
+                <a:latin typeface="Calibri" pitchFamily="34" charset="0"/>
+                <a:ea typeface="Calibri" pitchFamily="34" charset="-122"/>
+                <a:cs typeface="Calibri" pitchFamily="34" charset="-120"/>
+              </a:rPr>
+              <a:t>Step-by-step micro-management</a:t>
+            </a:r>
+            <a:endParaRPr lang="en-US" sz="1500" dirty="0"/>
+          </a:p>
+        </p:txBody>
+      </p:sp>
+      <p:sp>
+        <p:nvSpPr>
+          <p:cNvPr id="18" name="Text 13"/>
+          <p:cNvSpPr/>
+          <p:nvPr/>
+        </p:nvSpPr>
+        <p:spPr>
+          <a:xfrm>
+            <a:off x="822960" y="4846320"/>
+            <a:ext cx="4800600" cy="960120"/>
+          </a:xfrm>
+          <a:prstGeom prst="rect">
+            <a:avLst/>
+          </a:prstGeom>
+          <a:noFill/>
+          <a:ln/>
+        </p:spPr>
+        <p:txBody>
+          <a:bodyPr wrap="square" rtlCol="0" anchor="ctr"/>
+          <a:lstStyle/>
+          <a:p>
+            <a:pPr marL="0" indent="0">
+              <a:lnSpc>
+                <a:spcPct val="120000"/>
+              </a:lnSpc>
+              <a:buNone/>
+            </a:pPr>
+            <a:r>
+              <a:rPr lang="en-US" sz="1150" dirty="0">
+                <a:solidFill>
+                  <a:srgbClr val="9AA5AC"/>
+                </a:solidFill>
+                <a:latin typeface="Calibri" pitchFamily="34" charset="0"/>
+                <a:ea typeface="Calibri" pitchFamily="34" charset="-122"/>
+                <a:cs typeface="Calibri" pitchFamily="34" charset="-120"/>
+              </a:rPr>
+              <a:t>Donation setups require administrators to issue every pickup and verify every route manually, with no end-to-end delegation.</a:t>
+            </a:r>
+            <a:endParaRPr lang="en-US" sz="1150" dirty="0"/>
+          </a:p>
+        </p:txBody>
+      </p:sp>
+      <p:sp>
+        <p:nvSpPr>
+          <p:cNvPr id="19" name="Shape 14"/>
+          <p:cNvSpPr/>
+          <p:nvPr/>
+        </p:nvSpPr>
+        <p:spPr>
+          <a:xfrm>
+            <a:off x="6217920" y="3977640"/>
+            <a:ext cx="5349240" cy="1965960"/>
+          </a:xfrm>
+          <a:prstGeom prst="roundRect">
+            <a:avLst>
+              <a:gd name="adj" fmla="val 4186"/>
+            </a:avLst>
+          </a:prstGeom>
+          <a:solidFill>
+            <a:srgbClr val="141A21"/>
+          </a:solidFill>
+          <a:ln/>
+        </p:spPr>
+      </p:sp>
+      <p:sp>
+        <p:nvSpPr>
+          <p:cNvPr id="20" name="Shape 15"/>
+          <p:cNvSpPr/>
+          <p:nvPr/>
+        </p:nvSpPr>
+        <p:spPr>
+          <a:xfrm>
+            <a:off x="6492240" y="4251960"/>
+            <a:ext cx="502920" cy="502920"/>
+          </a:xfrm>
+          <a:prstGeom prst="ellipse">
+            <a:avLst/>
+          </a:prstGeom>
+          <a:solidFill>
+            <a:srgbClr val="2ECC71"/>
+          </a:solidFill>
+          <a:ln/>
+        </p:spPr>
+      </p:sp>
+      <p:pic>
+        <p:nvPicPr>
+          <p:cNvPr id="21" name="Image 3" descr="preencoded.png"/>
+          <p:cNvPicPr>
+            <a:picLocks noChangeAspect="1"/>
+          </p:cNvPicPr>
+          <p:nvPr/>
+        </p:nvPicPr>
+        <p:blipFill>
+          <a:blip r:embed="rId6"/>
+          <a:stretch>
+            <a:fillRect/>
+          </a:stretch>
+        </p:blipFill>
+        <p:spPr>
+          <a:xfrm>
+            <a:off x="6612941" y="4372661"/>
+            <a:ext cx="261518" cy="261518"/>
+          </a:xfrm>
+          <a:prstGeom prst="rect">
+            <a:avLst/>
+          </a:prstGeom>
+        </p:spPr>
+      </p:pic>
+      <p:sp>
+        <p:nvSpPr>
+          <p:cNvPr id="22" name="Text 16"/>
+          <p:cNvSpPr/>
+          <p:nvPr/>
+        </p:nvSpPr>
+        <p:spPr>
+          <a:xfrm>
+            <a:off x="7178040" y="4233672"/>
+            <a:ext cx="4160520" cy="502920"/>
+          </a:xfrm>
+          <a:prstGeom prst="rect">
+            <a:avLst/>
+          </a:prstGeom>
+          <a:noFill/>
+          <a:ln/>
+        </p:spPr>
+        <p:txBody>
+          <a:bodyPr wrap="square" lIns="0" tIns="0" rIns="0" bIns="0" rtlCol="0" anchor="ctr"/>
+          <a:lstStyle/>
+          <a:p>
+            <a:pPr marL="0" indent="0">
+              <a:buNone/>
+            </a:pPr>
+            <a:r>
+              <a:rPr lang="en-US" sz="1500" b="1" dirty="0">
+                <a:solidFill>
+                  <a:srgbClr val="F2F5F3"/>
+                </a:solidFill>
+                <a:latin typeface="Calibri" pitchFamily="34" charset="0"/>
+                <a:ea typeface="Calibri" pitchFamily="34" charset="-122"/>
+                <a:cs typeface="Calibri" pitchFamily="34" charset="-120"/>
+              </a:rPr>
+              <a:t>The widening resource gap</a:t>
+            </a:r>
+            <a:endParaRPr lang="en-US" sz="1500" dirty="0"/>
+          </a:p>
+        </p:txBody>
+      </p:sp>
+      <p:sp>
+        <p:nvSpPr>
+          <p:cNvPr id="23" name="Text 17"/>
+          <p:cNvSpPr/>
+          <p:nvPr/>
+        </p:nvSpPr>
+        <p:spPr>
+          <a:xfrm>
+            <a:off x="6492240" y="4846320"/>
+            <a:ext cx="4800600" cy="960120"/>
+          </a:xfrm>
+          <a:prstGeom prst="rect">
+            <a:avLst/>
+          </a:prstGeom>
+          <a:noFill/>
+          <a:ln/>
+        </p:spPr>
+        <p:txBody>
+          <a:bodyPr wrap="square" rtlCol="0" anchor="ctr"/>
+          <a:lstStyle/>
+          <a:p>
+            <a:pPr marL="0" indent="0">
+              <a:lnSpc>
+                <a:spcPct val="120000"/>
+              </a:lnSpc>
+              <a:buNone/>
+            </a:pPr>
+            <a:r>
+              <a:rPr lang="en-US" sz="1150" dirty="0">
+                <a:solidFill>
+                  <a:srgbClr val="9AA5AC"/>
+                </a:solidFill>
+                <a:latin typeface="Calibri" pitchFamily="34" charset="0"/>
+                <a:ea typeface="Calibri" pitchFamily="34" charset="-122"/>
+                <a:cs typeface="Calibri" pitchFamily="34" charset="-120"/>
+              </a:rPr>
               <a:t>As operational waste across metro centers grows, coordination lag causes perishable assets to expire before reaching non-profits.</a:t>
             </a:r>
             <a:endParaRPr lang="en-US" sz="1150" dirty="0"/>
@@ -7298,7 +7018,7 @@
           <a:bodyPr wrap="square" rtlCol="0" anchor="ctr"/>
           <a:lstStyle/>
           <a:p>
-            <a:pPr algn="r" indent="0" marL="0">
+            <a:pPr marL="0" indent="0" algn="r">
               <a:buNone/>
             </a:pPr>
             <a:r>
@@ -7332,6 +7052,7 @@
         <a:solidFill>
           <a:srgbClr val="0B0F14"/>
         </a:solidFill>
+        <a:effectLst/>
       </p:bgPr>
     </p:bg>
     <p:spTree>
@@ -7369,11 +7090,11 @@
           <a:bodyPr wrap="square" rtlCol="0" anchor="ctr"/>
           <a:lstStyle/>
           <a:p>
-            <a:pPr indent="0" marL="0">
-              <a:buNone/>
-            </a:pPr>
-            <a:r>
-              <a:rPr lang="en-US" sz="1300" b="1" spc="200" kern="0" dirty="0">
+            <a:pPr marL="0" indent="0">
+              <a:buNone/>
+            </a:pPr>
+            <a:r>
+              <a:rPr lang="en-US" sz="1300" b="1" kern="0" spc="200" dirty="0">
                 <a:solidFill>
                   <a:srgbClr val="2ECC71"/>
                 </a:solidFill>
@@ -7408,7 +7129,7 @@
           <a:bodyPr wrap="square" rtlCol="0" anchor="ctr"/>
           <a:lstStyle/>
           <a:p>
-            <a:pPr indent="0" marL="0">
+            <a:pPr marL="0" indent="0">
               <a:buNone/>
             </a:pPr>
             <a:r>
@@ -7469,7 +7190,7 @@
           <a:bodyPr wrap="square" lIns="0" tIns="0" rIns="0" bIns="0" rtlCol="0" anchor="ctr"/>
           <a:lstStyle/>
           <a:p>
-            <a:pPr algn="ctr" indent="0" marL="0">
+            <a:pPr marL="0" indent="0" algn="ctr">
               <a:buNone/>
             </a:pPr>
             <a:r>
@@ -7508,7 +7229,7 @@
           <a:bodyPr wrap="square" rtlCol="0" anchor="ctr"/>
           <a:lstStyle/>
           <a:p>
-            <a:pPr indent="0" marL="0">
+            <a:pPr marL="0" indent="0">
               <a:lnSpc>
                 <a:spcPct val="115000"/>
               </a:lnSpc>
@@ -7595,7 +7316,7 @@
           <a:bodyPr wrap="square" lIns="0" tIns="0" rIns="0" bIns="0" rtlCol="0" anchor="ctr"/>
           <a:lstStyle/>
           <a:p>
-            <a:pPr algn="ctr" indent="0" marL="0">
+            <a:pPr marL="0" indent="0" algn="ctr">
               <a:buNone/>
             </a:pPr>
             <a:r>
@@ -7634,7 +7355,7 @@
           <a:bodyPr wrap="square" rtlCol="0" anchor="ctr"/>
           <a:lstStyle/>
           <a:p>
-            <a:pPr indent="0" marL="0">
+            <a:pPr marL="0" indent="0">
               <a:lnSpc>
                 <a:spcPct val="115000"/>
               </a:lnSpc>
@@ -7721,7 +7442,7 @@
           <a:bodyPr wrap="square" lIns="0" tIns="0" rIns="0" bIns="0" rtlCol="0" anchor="ctr"/>
           <a:lstStyle/>
           <a:p>
-            <a:pPr algn="ctr" indent="0" marL="0">
+            <a:pPr marL="0" indent="0" algn="ctr">
               <a:buNone/>
             </a:pPr>
             <a:r>
@@ -7760,7 +7481,7 @@
           <a:bodyPr wrap="square" rtlCol="0" anchor="ctr"/>
           <a:lstStyle/>
           <a:p>
-            <a:pPr indent="0" marL="0">
+            <a:pPr marL="0" indent="0">
               <a:lnSpc>
                 <a:spcPct val="115000"/>
               </a:lnSpc>
@@ -7847,7 +7568,7 @@
           <a:bodyPr wrap="square" lIns="0" tIns="0" rIns="0" bIns="0" rtlCol="0" anchor="ctr"/>
           <a:lstStyle/>
           <a:p>
-            <a:pPr algn="ctr" indent="0" marL="0">
+            <a:pPr marL="0" indent="0" algn="ctr">
               <a:buNone/>
             </a:pPr>
             <a:r>
@@ -7886,7 +7607,7 @@
           <a:bodyPr wrap="square" rtlCol="0" anchor="ctr"/>
           <a:lstStyle/>
           <a:p>
-            <a:pPr indent="0" marL="0">
+            <a:pPr marL="0" indent="0">
               <a:lnSpc>
                 <a:spcPct val="115000"/>
               </a:lnSpc>
@@ -7973,7 +7694,7 @@
           <a:bodyPr wrap="square" lIns="0" tIns="0" rIns="0" bIns="0" rtlCol="0" anchor="ctr"/>
           <a:lstStyle/>
           <a:p>
-            <a:pPr algn="ctr" indent="0" marL="0">
+            <a:pPr marL="0" indent="0" algn="ctr">
               <a:buNone/>
             </a:pPr>
             <a:r>
@@ -8012,7 +7733,7 @@
           <a:bodyPr wrap="square" rtlCol="0" anchor="ctr"/>
           <a:lstStyle/>
           <a:p>
-            <a:pPr indent="0" marL="0">
+            <a:pPr marL="0" indent="0">
               <a:lnSpc>
                 <a:spcPct val="115000"/>
               </a:lnSpc>
@@ -8054,7 +7775,7 @@
           <a:bodyPr wrap="square" rtlCol="0" anchor="ctr"/>
           <a:lstStyle/>
           <a:p>
-            <a:pPr algn="r" indent="0" marL="0">
+            <a:pPr marL="0" indent="0" algn="r">
               <a:buNone/>
             </a:pPr>
             <a:r>
@@ -8088,6 +7809,7 @@
         <a:solidFill>
           <a:srgbClr val="0B0F14"/>
         </a:solidFill>
+        <a:effectLst/>
       </p:bgPr>
     </p:bg>
     <p:spTree>
@@ -8125,11 +7847,11 @@
           <a:bodyPr wrap="square" rtlCol="0" anchor="ctr"/>
           <a:lstStyle/>
           <a:p>
-            <a:pPr indent="0" marL="0">
-              <a:buNone/>
-            </a:pPr>
-            <a:r>
-              <a:rPr lang="en-US" sz="1300" b="1" spc="200" kern="0" dirty="0">
+            <a:pPr marL="0" indent="0">
+              <a:buNone/>
+            </a:pPr>
+            <a:r>
+              <a:rPr lang="en-US" sz="1300" b="1" kern="0" spc="200" dirty="0">
                 <a:solidFill>
                   <a:srgbClr val="2ECC71"/>
                 </a:solidFill>
@@ -8164,7 +7886,7 @@
           <a:bodyPr wrap="square" rtlCol="0" anchor="ctr"/>
           <a:lstStyle/>
           <a:p>
-            <a:pPr indent="0" marL="0">
+            <a:pPr marL="0" indent="0">
               <a:buNone/>
             </a:pPr>
             <a:r>
@@ -8203,7 +7925,7 @@
           <a:bodyPr wrap="square" rtlCol="0" anchor="ctr"/>
           <a:lstStyle/>
           <a:p>
-            <a:pPr indent="0" marL="0">
+            <a:pPr marL="0" indent="0">
               <a:lnSpc>
                 <a:spcPct val="125000"/>
               </a:lnSpc>
@@ -8268,373 +7990,7 @@
       </p:sp>
       <p:pic>
         <p:nvPicPr>
-          <p:cNvPr id="7" name="Image 0" descr="preencoded.png">    </p:cNvPr>
-          <p:cNvPicPr>
-            <a:picLocks noChangeAspect="1"/>
-          </p:cNvPicPr>
-          <p:nvPr/>
-        </p:nvPicPr>
-        <p:blipFill>
-          <a:blip r:embed="rId1"/>
-          <a:stretch>
-            <a:fillRect/>
-          </a:stretch>
-        </p:blipFill>
-        <p:spPr>
-          <a:xfrm>
-            <a:off x="1446581" y="3229661"/>
-            <a:ext cx="261518" cy="261518"/>
-          </a:xfrm>
-          <a:prstGeom prst="rect">
-            <a:avLst/>
-          </a:prstGeom>
-        </p:spPr>
-      </p:pic>
-      <p:sp>
-        <p:nvSpPr>
-          <p:cNvPr id="8" name="Text 5"/>
-          <p:cNvSpPr/>
-          <p:nvPr/>
-        </p:nvSpPr>
-        <p:spPr>
-          <a:xfrm>
-            <a:off x="685800" y="3749040"/>
-            <a:ext cx="1783080" cy="320040"/>
-          </a:xfrm>
-          <a:prstGeom prst="rect">
-            <a:avLst/>
-          </a:prstGeom>
-          <a:noFill/>
-          <a:ln/>
-        </p:spPr>
-        <p:txBody>
-          <a:bodyPr wrap="square" lIns="0" tIns="0" rIns="0" bIns="0" rtlCol="0" anchor="ctr"/>
-          <a:lstStyle/>
-          <a:p>
-            <a:pPr algn="ctr" indent="0" marL="0">
-              <a:buNone/>
-            </a:pPr>
-            <a:r>
-              <a:rPr lang="en-US" sz="1300" b="1" dirty="0">
-                <a:solidFill>
-                  <a:srgbClr val="F2F5F3"/>
-                </a:solidFill>
-                <a:latin typeface="Calibri" pitchFamily="34" charset="0"/>
-                <a:ea typeface="Calibri" pitchFamily="34" charset="-122"/>
-                <a:cs typeface="Calibri" pitchFamily="34" charset="-120"/>
-              </a:rPr>
-              <a:t>Register</a:t>
-            </a:r>
-            <a:endParaRPr lang="en-US" sz="1300" dirty="0"/>
-          </a:p>
-        </p:txBody>
-      </p:sp>
-      <p:sp>
-        <p:nvSpPr>
-          <p:cNvPr id="9" name="Text 6"/>
-          <p:cNvSpPr/>
-          <p:nvPr/>
-        </p:nvSpPr>
-        <p:spPr>
-          <a:xfrm>
-            <a:off x="685800" y="4050792"/>
-            <a:ext cx="1783080" cy="658368"/>
-          </a:xfrm>
-          <a:prstGeom prst="rect">
-            <a:avLst/>
-          </a:prstGeom>
-          <a:noFill/>
-          <a:ln/>
-        </p:spPr>
-        <p:txBody>
-          <a:bodyPr wrap="square" rtlCol="0" anchor="ctr"/>
-          <a:lstStyle/>
-          <a:p>
-            <a:pPr algn="ctr" indent="0" marL="0">
-              <a:lnSpc>
-                <a:spcPct val="115000"/>
-              </a:lnSpc>
-              <a:buNone/>
-            </a:pPr>
-            <a:r>
-              <a:rPr lang="en-US" sz="950" dirty="0">
-                <a:solidFill>
-                  <a:srgbClr val="9AA5AC"/>
-                </a:solidFill>
-                <a:latin typeface="Calibri" pitchFamily="34" charset="0"/>
-                <a:ea typeface="Calibri" pitchFamily="34" charset="-122"/>
-                <a:cs typeface="Calibri" pitchFamily="34" charset="-120"/>
-              </a:rPr>
-              <a:t>Restaurant logs surplus inventory</a:t>
-            </a:r>
-            <a:endParaRPr lang="en-US" sz="950" dirty="0"/>
-          </a:p>
-        </p:txBody>
-      </p:sp>
-      <p:sp>
-        <p:nvSpPr>
-          <p:cNvPr id="10" name="Text 7"/>
-          <p:cNvSpPr/>
-          <p:nvPr/>
-        </p:nvSpPr>
-        <p:spPr>
-          <a:xfrm>
-            <a:off x="2606040" y="3566160"/>
-            <a:ext cx="182880" cy="365760"/>
-          </a:xfrm>
-          <a:prstGeom prst="rect">
-            <a:avLst/>
-          </a:prstGeom>
-          <a:noFill/>
-          <a:ln/>
-        </p:spPr>
-        <p:txBody>
-          <a:bodyPr wrap="square" rtlCol="0" anchor="ctr"/>
-          <a:lstStyle/>
-          <a:p>
-            <a:pPr algn="ctr" indent="0" marL="0">
-              <a:buNone/>
-            </a:pPr>
-            <a:r>
-              <a:rPr lang="en-US" sz="1400" dirty="0">
-                <a:solidFill>
-                  <a:srgbClr val="2ECC71"/>
-                </a:solidFill>
-              </a:rPr>
-              <a:t>→</a:t>
-            </a:r>
-            <a:endParaRPr lang="en-US" sz="1400" dirty="0"/>
-          </a:p>
-        </p:txBody>
-      </p:sp>
-      <p:sp>
-        <p:nvSpPr>
-          <p:cNvPr id="11" name="Shape 8"/>
-          <p:cNvSpPr/>
-          <p:nvPr/>
-        </p:nvSpPr>
-        <p:spPr>
-          <a:xfrm>
-            <a:off x="2788920" y="2880360"/>
-            <a:ext cx="2057400" cy="1920240"/>
-          </a:xfrm>
-          <a:prstGeom prst="roundRect">
-            <a:avLst>
-              <a:gd name="adj" fmla="val 3810"/>
-            </a:avLst>
-          </a:prstGeom>
-          <a:solidFill>
-            <a:srgbClr val="141A21"/>
-          </a:solidFill>
-          <a:ln/>
-        </p:spPr>
-      </p:sp>
-      <p:sp>
-        <p:nvSpPr>
-          <p:cNvPr id="12" name="Shape 9"/>
-          <p:cNvSpPr/>
-          <p:nvPr/>
-        </p:nvSpPr>
-        <p:spPr>
-          <a:xfrm>
-            <a:off x="3566160" y="3108960"/>
-            <a:ext cx="502920" cy="502920"/>
-          </a:xfrm>
-          <a:prstGeom prst="ellipse">
-            <a:avLst/>
-          </a:prstGeom>
-          <a:solidFill>
-            <a:srgbClr val="2ECC71"/>
-          </a:solidFill>
-          <a:ln/>
-        </p:spPr>
-      </p:sp>
-      <p:pic>
-        <p:nvPicPr>
-          <p:cNvPr id="13" name="Image 1" descr="preencoded.png">    </p:cNvPr>
-          <p:cNvPicPr>
-            <a:picLocks noChangeAspect="1"/>
-          </p:cNvPicPr>
-          <p:nvPr/>
-        </p:nvPicPr>
-        <p:blipFill>
-          <a:blip r:embed="rId2"/>
-          <a:stretch>
-            <a:fillRect/>
-          </a:stretch>
-        </p:blipFill>
-        <p:spPr>
-          <a:xfrm>
-            <a:off x="3686861" y="3229661"/>
-            <a:ext cx="261518" cy="261518"/>
-          </a:xfrm>
-          <a:prstGeom prst="rect">
-            <a:avLst/>
-          </a:prstGeom>
-        </p:spPr>
-      </p:pic>
-      <p:sp>
-        <p:nvSpPr>
-          <p:cNvPr id="14" name="Text 10"/>
-          <p:cNvSpPr/>
-          <p:nvPr/>
-        </p:nvSpPr>
-        <p:spPr>
-          <a:xfrm>
-            <a:off x="2926080" y="3749040"/>
-            <a:ext cx="1783080" cy="320040"/>
-          </a:xfrm>
-          <a:prstGeom prst="rect">
-            <a:avLst/>
-          </a:prstGeom>
-          <a:noFill/>
-          <a:ln/>
-        </p:spPr>
-        <p:txBody>
-          <a:bodyPr wrap="square" lIns="0" tIns="0" rIns="0" bIns="0" rtlCol="0" anchor="ctr"/>
-          <a:lstStyle/>
-          <a:p>
-            <a:pPr algn="ctr" indent="0" marL="0">
-              <a:buNone/>
-            </a:pPr>
-            <a:r>
-              <a:rPr lang="en-US" sz="1300" b="1" dirty="0">
-                <a:solidFill>
-                  <a:srgbClr val="F2F5F3"/>
-                </a:solidFill>
-                <a:latin typeface="Calibri" pitchFamily="34" charset="0"/>
-                <a:ea typeface="Calibri" pitchFamily="34" charset="-122"/>
-                <a:cs typeface="Calibri" pitchFamily="34" charset="-120"/>
-              </a:rPr>
-              <a:t>Plan</a:t>
-            </a:r>
-            <a:endParaRPr lang="en-US" sz="1300" dirty="0"/>
-          </a:p>
-        </p:txBody>
-      </p:sp>
-      <p:sp>
-        <p:nvSpPr>
-          <p:cNvPr id="15" name="Text 11"/>
-          <p:cNvSpPr/>
-          <p:nvPr/>
-        </p:nvSpPr>
-        <p:spPr>
-          <a:xfrm>
-            <a:off x="2926080" y="4050792"/>
-            <a:ext cx="1783080" cy="658368"/>
-          </a:xfrm>
-          <a:prstGeom prst="rect">
-            <a:avLst/>
-          </a:prstGeom>
-          <a:noFill/>
-          <a:ln/>
-        </p:spPr>
-        <p:txBody>
-          <a:bodyPr wrap="square" rtlCol="0" anchor="ctr"/>
-          <a:lstStyle/>
-          <a:p>
-            <a:pPr algn="ctr" indent="0" marL="0">
-              <a:lnSpc>
-                <a:spcPct val="115000"/>
-              </a:lnSpc>
-              <a:buNone/>
-            </a:pPr>
-            <a:r>
-              <a:rPr lang="en-US" sz="950" dirty="0">
-                <a:solidFill>
-                  <a:srgbClr val="9AA5AC"/>
-                </a:solidFill>
-                <a:latin typeface="Calibri" pitchFamily="34" charset="0"/>
-                <a:ea typeface="Calibri" pitchFamily="34" charset="-122"/>
-                <a:cs typeface="Calibri" pitchFamily="34" charset="-120"/>
-              </a:rPr>
-              <a:t>Swarm identifies destination capacity</a:t>
-            </a:r>
-            <a:endParaRPr lang="en-US" sz="950" dirty="0"/>
-          </a:p>
-        </p:txBody>
-      </p:sp>
-      <p:sp>
-        <p:nvSpPr>
-          <p:cNvPr id="16" name="Text 12"/>
-          <p:cNvSpPr/>
-          <p:nvPr/>
-        </p:nvSpPr>
-        <p:spPr>
-          <a:xfrm>
-            <a:off x="4846320" y="3566160"/>
-            <a:ext cx="182880" cy="365760"/>
-          </a:xfrm>
-          <a:prstGeom prst="rect">
-            <a:avLst/>
-          </a:prstGeom>
-          <a:noFill/>
-          <a:ln/>
-        </p:spPr>
-        <p:txBody>
-          <a:bodyPr wrap="square" rtlCol="0" anchor="ctr"/>
-          <a:lstStyle/>
-          <a:p>
-            <a:pPr algn="ctr" indent="0" marL="0">
-              <a:buNone/>
-            </a:pPr>
-            <a:r>
-              <a:rPr lang="en-US" sz="1400" dirty="0">
-                <a:solidFill>
-                  <a:srgbClr val="2ECC71"/>
-                </a:solidFill>
-              </a:rPr>
-              <a:t>→</a:t>
-            </a:r>
-            <a:endParaRPr lang="en-US" sz="1400" dirty="0"/>
-          </a:p>
-        </p:txBody>
-      </p:sp>
-      <p:sp>
-        <p:nvSpPr>
-          <p:cNvPr id="17" name="Shape 13"/>
-          <p:cNvSpPr/>
-          <p:nvPr/>
-        </p:nvSpPr>
-        <p:spPr>
-          <a:xfrm>
-            <a:off x="5029200" y="2880360"/>
-            <a:ext cx="2057400" cy="1920240"/>
-          </a:xfrm>
-          <a:prstGeom prst="roundRect">
-            <a:avLst>
-              <a:gd name="adj" fmla="val 3810"/>
-            </a:avLst>
-          </a:prstGeom>
-          <a:solidFill>
-            <a:srgbClr val="141A21"/>
-          </a:solidFill>
-          <a:ln/>
-        </p:spPr>
-      </p:sp>
-      <p:sp>
-        <p:nvSpPr>
-          <p:cNvPr id="18" name="Shape 14"/>
-          <p:cNvSpPr/>
-          <p:nvPr/>
-        </p:nvSpPr>
-        <p:spPr>
-          <a:xfrm>
-            <a:off x="5806440" y="3108960"/>
-            <a:ext cx="502920" cy="502920"/>
-          </a:xfrm>
-          <a:prstGeom prst="ellipse">
-            <a:avLst/>
-          </a:prstGeom>
-          <a:solidFill>
-            <a:srgbClr val="2ECC71"/>
-          </a:solidFill>
-          <a:ln/>
-        </p:spPr>
-      </p:sp>
-      <p:pic>
-        <p:nvPicPr>
-          <p:cNvPr id="19" name="Image 2" descr="preencoded.png">    </p:cNvPr>
+          <p:cNvPr id="7" name="Image 0" descr="preencoded.png"/>
           <p:cNvPicPr>
             <a:picLocks noChangeAspect="1"/>
           </p:cNvPicPr>
@@ -8648,7 +8004,7 @@
         </p:blipFill>
         <p:spPr>
           <a:xfrm>
-            <a:off x="5927141" y="3229661"/>
+            <a:off x="1446581" y="3229661"/>
             <a:ext cx="261518" cy="261518"/>
           </a:xfrm>
           <a:prstGeom prst="rect">
@@ -8658,13 +8014,13 @@
       </p:pic>
       <p:sp>
         <p:nvSpPr>
-          <p:cNvPr id="20" name="Text 15"/>
-          <p:cNvSpPr/>
-          <p:nvPr/>
-        </p:nvSpPr>
-        <p:spPr>
-          <a:xfrm>
-            <a:off x="5166360" y="3749040"/>
+          <p:cNvPr id="8" name="Text 5"/>
+          <p:cNvSpPr/>
+          <p:nvPr/>
+        </p:nvSpPr>
+        <p:spPr>
+          <a:xfrm>
+            <a:off x="685800" y="3749040"/>
             <a:ext cx="1783080" cy="320040"/>
           </a:xfrm>
           <a:prstGeom prst="rect">
@@ -8677,7 +8033,7 @@
           <a:bodyPr wrap="square" lIns="0" tIns="0" rIns="0" bIns="0" rtlCol="0" anchor="ctr"/>
           <a:lstStyle/>
           <a:p>
-            <a:pPr algn="ctr" indent="0" marL="0">
+            <a:pPr marL="0" indent="0" algn="ctr">
               <a:buNone/>
             </a:pPr>
             <a:r>
@@ -8689,7 +8045,7 @@
                 <a:ea typeface="Calibri" pitchFamily="34" charset="-122"/>
                 <a:cs typeface="Calibri" pitchFamily="34" charset="-120"/>
               </a:rPr>
-              <a:t>Negotiate</a:t>
+              <a:t>Register</a:t>
             </a:r>
             <a:endParaRPr lang="en-US" sz="1300" dirty="0"/>
           </a:p>
@@ -8697,13 +8053,13 @@
       </p:sp>
       <p:sp>
         <p:nvSpPr>
-          <p:cNvPr id="21" name="Text 16"/>
-          <p:cNvSpPr/>
-          <p:nvPr/>
-        </p:nvSpPr>
-        <p:spPr>
-          <a:xfrm>
-            <a:off x="5166360" y="4050792"/>
+          <p:cNvPr id="9" name="Text 6"/>
+          <p:cNvSpPr/>
+          <p:nvPr/>
+        </p:nvSpPr>
+        <p:spPr>
+          <a:xfrm>
+            <a:off x="685800" y="4050792"/>
             <a:ext cx="1783080" cy="658368"/>
           </a:xfrm>
           <a:prstGeom prst="rect">
@@ -8716,7 +8072,7 @@
           <a:bodyPr wrap="square" rtlCol="0" anchor="ctr"/>
           <a:lstStyle/>
           <a:p>
-            <a:pPr algn="ctr" indent="0" marL="0">
+            <a:pPr marL="0" indent="0" algn="ctr">
               <a:lnSpc>
                 <a:spcPct val="115000"/>
               </a:lnSpc>
@@ -8731,7 +8087,7 @@
                 <a:ea typeface="Calibri" pitchFamily="34" charset="-122"/>
                 <a:cs typeface="Calibri" pitchFamily="34" charset="-120"/>
               </a:rPr>
-              <a:t>Agents route couriers &amp; confirm handoff</a:t>
+              <a:t>Restaurant logs surplus inventory</a:t>
             </a:r>
             <a:endParaRPr lang="en-US" sz="950" dirty="0"/>
           </a:p>
@@ -8739,13 +8095,13 @@
       </p:sp>
       <p:sp>
         <p:nvSpPr>
-          <p:cNvPr id="22" name="Text 17"/>
-          <p:cNvSpPr/>
-          <p:nvPr/>
-        </p:nvSpPr>
-        <p:spPr>
-          <a:xfrm>
-            <a:off x="7086600" y="3566160"/>
+          <p:cNvPr id="10" name="Text 7"/>
+          <p:cNvSpPr/>
+          <p:nvPr/>
+        </p:nvSpPr>
+        <p:spPr>
+          <a:xfrm>
+            <a:off x="2606040" y="3566160"/>
             <a:ext cx="182880" cy="365760"/>
           </a:xfrm>
           <a:prstGeom prst="rect">
@@ -8758,7 +8114,7 @@
           <a:bodyPr wrap="square" rtlCol="0" anchor="ctr"/>
           <a:lstStyle/>
           <a:p>
-            <a:pPr algn="ctr" indent="0" marL="0">
+            <a:pPr marL="0" indent="0" algn="ctr">
               <a:buNone/>
             </a:pPr>
             <a:r>
@@ -8775,13 +8131,13 @@
       </p:sp>
       <p:sp>
         <p:nvSpPr>
-          <p:cNvPr id="23" name="Shape 18"/>
-          <p:cNvSpPr/>
-          <p:nvPr/>
-        </p:nvSpPr>
-        <p:spPr>
-          <a:xfrm>
-            <a:off x="7269480" y="2880360"/>
+          <p:cNvPr id="11" name="Shape 8"/>
+          <p:cNvSpPr/>
+          <p:nvPr/>
+        </p:nvSpPr>
+        <p:spPr>
+          <a:xfrm>
+            <a:off x="2788920" y="2880360"/>
             <a:ext cx="2057400" cy="1920240"/>
           </a:xfrm>
           <a:prstGeom prst="roundRect">
@@ -8797,13 +8153,13 @@
       </p:sp>
       <p:sp>
         <p:nvSpPr>
-          <p:cNvPr id="24" name="Shape 19"/>
-          <p:cNvSpPr/>
-          <p:nvPr/>
-        </p:nvSpPr>
-        <p:spPr>
-          <a:xfrm>
-            <a:off x="8046720" y="3108960"/>
+          <p:cNvPr id="12" name="Shape 9"/>
+          <p:cNvSpPr/>
+          <p:nvPr/>
+        </p:nvSpPr>
+        <p:spPr>
+          <a:xfrm>
+            <a:off x="3566160" y="3108960"/>
             <a:ext cx="502920" cy="502920"/>
           </a:xfrm>
           <a:prstGeom prst="ellipse">
@@ -8817,7 +8173,7 @@
       </p:sp>
       <p:pic>
         <p:nvPicPr>
-          <p:cNvPr id="25" name="Image 3" descr="preencoded.png">    </p:cNvPr>
+          <p:cNvPr id="13" name="Image 1" descr="preencoded.png"/>
           <p:cNvPicPr>
             <a:picLocks noChangeAspect="1"/>
           </p:cNvPicPr>
@@ -8831,7 +8187,7 @@
         </p:blipFill>
         <p:spPr>
           <a:xfrm>
-            <a:off x="8167421" y="3229661"/>
+            <a:off x="3686861" y="3229661"/>
             <a:ext cx="261518" cy="261518"/>
           </a:xfrm>
           <a:prstGeom prst="rect">
@@ -8841,13 +8197,13 @@
       </p:pic>
       <p:sp>
         <p:nvSpPr>
-          <p:cNvPr id="26" name="Text 20"/>
-          <p:cNvSpPr/>
-          <p:nvPr/>
-        </p:nvSpPr>
-        <p:spPr>
-          <a:xfrm>
-            <a:off x="7406640" y="3749040"/>
+          <p:cNvPr id="14" name="Text 10"/>
+          <p:cNvSpPr/>
+          <p:nvPr/>
+        </p:nvSpPr>
+        <p:spPr>
+          <a:xfrm>
+            <a:off x="2926080" y="3749040"/>
             <a:ext cx="1783080" cy="320040"/>
           </a:xfrm>
           <a:prstGeom prst="rect">
@@ -8860,7 +8216,7 @@
           <a:bodyPr wrap="square" lIns="0" tIns="0" rIns="0" bIns="0" rtlCol="0" anchor="ctr"/>
           <a:lstStyle/>
           <a:p>
-            <a:pPr algn="ctr" indent="0" marL="0">
+            <a:pPr marL="0" indent="0" algn="ctr">
               <a:buNone/>
             </a:pPr>
             <a:r>
@@ -8872,7 +8228,7 @@
                 <a:ea typeface="Calibri" pitchFamily="34" charset="-122"/>
                 <a:cs typeface="Calibri" pitchFamily="34" charset="-120"/>
               </a:rPr>
-              <a:t>Track</a:t>
+              <a:t>Plan</a:t>
             </a:r>
             <a:endParaRPr lang="en-US" sz="1300" dirty="0"/>
           </a:p>
@@ -8880,13 +8236,13 @@
       </p:sp>
       <p:sp>
         <p:nvSpPr>
-          <p:cNvPr id="27" name="Text 21"/>
-          <p:cNvSpPr/>
-          <p:nvPr/>
-        </p:nvSpPr>
-        <p:spPr>
-          <a:xfrm>
-            <a:off x="7406640" y="4050792"/>
+          <p:cNvPr id="15" name="Text 11"/>
+          <p:cNvSpPr/>
+          <p:nvPr/>
+        </p:nvSpPr>
+        <p:spPr>
+          <a:xfrm>
+            <a:off x="2926080" y="4050792"/>
             <a:ext cx="1783080" cy="658368"/>
           </a:xfrm>
           <a:prstGeom prst="rect">
@@ -8899,7 +8255,7 @@
           <a:bodyPr wrap="square" rtlCol="0" anchor="ctr"/>
           <a:lstStyle/>
           <a:p>
-            <a:pPr algn="ctr" indent="0" marL="0">
+            <a:pPr marL="0" indent="0" algn="ctr">
               <a:lnSpc>
                 <a:spcPct val="115000"/>
               </a:lnSpc>
@@ -8914,7 +8270,7 @@
                 <a:ea typeface="Calibri" pitchFamily="34" charset="-122"/>
                 <a:cs typeface="Calibri" pitchFamily="34" charset="-120"/>
               </a:rPr>
-              <a:t>Live ledgers monitor transit &amp; intake</a:t>
+              <a:t>Swarm identifies destination capacity</a:t>
             </a:r>
             <a:endParaRPr lang="en-US" sz="950" dirty="0"/>
           </a:p>
@@ -8922,13 +8278,13 @@
       </p:sp>
       <p:sp>
         <p:nvSpPr>
-          <p:cNvPr id="28" name="Text 22"/>
-          <p:cNvSpPr/>
-          <p:nvPr/>
-        </p:nvSpPr>
-        <p:spPr>
-          <a:xfrm>
-            <a:off x="9326880" y="3566160"/>
+          <p:cNvPr id="16" name="Text 12"/>
+          <p:cNvSpPr/>
+          <p:nvPr/>
+        </p:nvSpPr>
+        <p:spPr>
+          <a:xfrm>
+            <a:off x="4846320" y="3566160"/>
             <a:ext cx="182880" cy="365760"/>
           </a:xfrm>
           <a:prstGeom prst="rect">
@@ -8941,7 +8297,7 @@
           <a:bodyPr wrap="square" rtlCol="0" anchor="ctr"/>
           <a:lstStyle/>
           <a:p>
-            <a:pPr algn="ctr" indent="0" marL="0">
+            <a:pPr marL="0" indent="0" algn="ctr">
               <a:buNone/>
             </a:pPr>
             <a:r>
@@ -8958,13 +8314,13 @@
       </p:sp>
       <p:sp>
         <p:nvSpPr>
-          <p:cNvPr id="29" name="Shape 23"/>
-          <p:cNvSpPr/>
-          <p:nvPr/>
-        </p:nvSpPr>
-        <p:spPr>
-          <a:xfrm>
-            <a:off x="9509760" y="2880360"/>
+          <p:cNvPr id="17" name="Shape 13"/>
+          <p:cNvSpPr/>
+          <p:nvPr/>
+        </p:nvSpPr>
+        <p:spPr>
+          <a:xfrm>
+            <a:off x="5029200" y="2880360"/>
             <a:ext cx="2057400" cy="1920240"/>
           </a:xfrm>
           <a:prstGeom prst="roundRect">
@@ -8980,13 +8336,13 @@
       </p:sp>
       <p:sp>
         <p:nvSpPr>
-          <p:cNvPr id="30" name="Shape 24"/>
-          <p:cNvSpPr/>
-          <p:nvPr/>
-        </p:nvSpPr>
-        <p:spPr>
-          <a:xfrm>
-            <a:off x="10287000" y="3108960"/>
+          <p:cNvPr id="18" name="Shape 14"/>
+          <p:cNvSpPr/>
+          <p:nvPr/>
+        </p:nvSpPr>
+        <p:spPr>
+          <a:xfrm>
+            <a:off x="5806440" y="3108960"/>
             <a:ext cx="502920" cy="502920"/>
           </a:xfrm>
           <a:prstGeom prst="ellipse">
@@ -9000,7 +8356,7 @@
       </p:sp>
       <p:pic>
         <p:nvPicPr>
-          <p:cNvPr id="31" name="Image 4" descr="preencoded.png">    </p:cNvPr>
+          <p:cNvPr id="19" name="Image 2" descr="preencoded.png"/>
           <p:cNvPicPr>
             <a:picLocks noChangeAspect="1"/>
           </p:cNvPicPr>
@@ -9014,6 +8370,372 @@
         </p:blipFill>
         <p:spPr>
           <a:xfrm>
+            <a:off x="5927141" y="3229661"/>
+            <a:ext cx="261518" cy="261518"/>
+          </a:xfrm>
+          <a:prstGeom prst="rect">
+            <a:avLst/>
+          </a:prstGeom>
+        </p:spPr>
+      </p:pic>
+      <p:sp>
+        <p:nvSpPr>
+          <p:cNvPr id="20" name="Text 15"/>
+          <p:cNvSpPr/>
+          <p:nvPr/>
+        </p:nvSpPr>
+        <p:spPr>
+          <a:xfrm>
+            <a:off x="5166360" y="3749040"/>
+            <a:ext cx="1783080" cy="320040"/>
+          </a:xfrm>
+          <a:prstGeom prst="rect">
+            <a:avLst/>
+          </a:prstGeom>
+          <a:noFill/>
+          <a:ln/>
+        </p:spPr>
+        <p:txBody>
+          <a:bodyPr wrap="square" lIns="0" tIns="0" rIns="0" bIns="0" rtlCol="0" anchor="ctr"/>
+          <a:lstStyle/>
+          <a:p>
+            <a:pPr marL="0" indent="0" algn="ctr">
+              <a:buNone/>
+            </a:pPr>
+            <a:r>
+              <a:rPr lang="en-US" sz="1300" b="1" dirty="0">
+                <a:solidFill>
+                  <a:srgbClr val="F2F5F3"/>
+                </a:solidFill>
+                <a:latin typeface="Calibri" pitchFamily="34" charset="0"/>
+                <a:ea typeface="Calibri" pitchFamily="34" charset="-122"/>
+                <a:cs typeface="Calibri" pitchFamily="34" charset="-120"/>
+              </a:rPr>
+              <a:t>Negotiate</a:t>
+            </a:r>
+            <a:endParaRPr lang="en-US" sz="1300" dirty="0"/>
+          </a:p>
+        </p:txBody>
+      </p:sp>
+      <p:sp>
+        <p:nvSpPr>
+          <p:cNvPr id="21" name="Text 16"/>
+          <p:cNvSpPr/>
+          <p:nvPr/>
+        </p:nvSpPr>
+        <p:spPr>
+          <a:xfrm>
+            <a:off x="5166360" y="4050792"/>
+            <a:ext cx="1783080" cy="658368"/>
+          </a:xfrm>
+          <a:prstGeom prst="rect">
+            <a:avLst/>
+          </a:prstGeom>
+          <a:noFill/>
+          <a:ln/>
+        </p:spPr>
+        <p:txBody>
+          <a:bodyPr wrap="square" rtlCol="0" anchor="ctr"/>
+          <a:lstStyle/>
+          <a:p>
+            <a:pPr marL="0" indent="0" algn="ctr">
+              <a:lnSpc>
+                <a:spcPct val="115000"/>
+              </a:lnSpc>
+              <a:buNone/>
+            </a:pPr>
+            <a:r>
+              <a:rPr lang="en-US" sz="950" dirty="0">
+                <a:solidFill>
+                  <a:srgbClr val="9AA5AC"/>
+                </a:solidFill>
+                <a:latin typeface="Calibri" pitchFamily="34" charset="0"/>
+                <a:ea typeface="Calibri" pitchFamily="34" charset="-122"/>
+                <a:cs typeface="Calibri" pitchFamily="34" charset="-120"/>
+              </a:rPr>
+              <a:t>Agents route couriers &amp; confirm handoff</a:t>
+            </a:r>
+            <a:endParaRPr lang="en-US" sz="950" dirty="0"/>
+          </a:p>
+        </p:txBody>
+      </p:sp>
+      <p:sp>
+        <p:nvSpPr>
+          <p:cNvPr id="22" name="Text 17"/>
+          <p:cNvSpPr/>
+          <p:nvPr/>
+        </p:nvSpPr>
+        <p:spPr>
+          <a:xfrm>
+            <a:off x="7086600" y="3566160"/>
+            <a:ext cx="182880" cy="365760"/>
+          </a:xfrm>
+          <a:prstGeom prst="rect">
+            <a:avLst/>
+          </a:prstGeom>
+          <a:noFill/>
+          <a:ln/>
+        </p:spPr>
+        <p:txBody>
+          <a:bodyPr wrap="square" rtlCol="0" anchor="ctr"/>
+          <a:lstStyle/>
+          <a:p>
+            <a:pPr marL="0" indent="0" algn="ctr">
+              <a:buNone/>
+            </a:pPr>
+            <a:r>
+              <a:rPr lang="en-US" sz="1400" dirty="0">
+                <a:solidFill>
+                  <a:srgbClr val="2ECC71"/>
+                </a:solidFill>
+              </a:rPr>
+              <a:t>→</a:t>
+            </a:r>
+            <a:endParaRPr lang="en-US" sz="1400" dirty="0"/>
+          </a:p>
+        </p:txBody>
+      </p:sp>
+      <p:sp>
+        <p:nvSpPr>
+          <p:cNvPr id="23" name="Shape 18"/>
+          <p:cNvSpPr/>
+          <p:nvPr/>
+        </p:nvSpPr>
+        <p:spPr>
+          <a:xfrm>
+            <a:off x="7269480" y="2880360"/>
+            <a:ext cx="2057400" cy="1920240"/>
+          </a:xfrm>
+          <a:prstGeom prst="roundRect">
+            <a:avLst>
+              <a:gd name="adj" fmla="val 3810"/>
+            </a:avLst>
+          </a:prstGeom>
+          <a:solidFill>
+            <a:srgbClr val="141A21"/>
+          </a:solidFill>
+          <a:ln/>
+        </p:spPr>
+      </p:sp>
+      <p:sp>
+        <p:nvSpPr>
+          <p:cNvPr id="24" name="Shape 19"/>
+          <p:cNvSpPr/>
+          <p:nvPr/>
+        </p:nvSpPr>
+        <p:spPr>
+          <a:xfrm>
+            <a:off x="8046720" y="3108960"/>
+            <a:ext cx="502920" cy="502920"/>
+          </a:xfrm>
+          <a:prstGeom prst="ellipse">
+            <a:avLst/>
+          </a:prstGeom>
+          <a:solidFill>
+            <a:srgbClr val="2ECC71"/>
+          </a:solidFill>
+          <a:ln/>
+        </p:spPr>
+      </p:sp>
+      <p:pic>
+        <p:nvPicPr>
+          <p:cNvPr id="25" name="Image 3" descr="preencoded.png"/>
+          <p:cNvPicPr>
+            <a:picLocks noChangeAspect="1"/>
+          </p:cNvPicPr>
+          <p:nvPr/>
+        </p:nvPicPr>
+        <p:blipFill>
+          <a:blip r:embed="rId6"/>
+          <a:stretch>
+            <a:fillRect/>
+          </a:stretch>
+        </p:blipFill>
+        <p:spPr>
+          <a:xfrm>
+            <a:off x="8167421" y="3229661"/>
+            <a:ext cx="261518" cy="261518"/>
+          </a:xfrm>
+          <a:prstGeom prst="rect">
+            <a:avLst/>
+          </a:prstGeom>
+        </p:spPr>
+      </p:pic>
+      <p:sp>
+        <p:nvSpPr>
+          <p:cNvPr id="26" name="Text 20"/>
+          <p:cNvSpPr/>
+          <p:nvPr/>
+        </p:nvSpPr>
+        <p:spPr>
+          <a:xfrm>
+            <a:off x="7406640" y="3749040"/>
+            <a:ext cx="1783080" cy="320040"/>
+          </a:xfrm>
+          <a:prstGeom prst="rect">
+            <a:avLst/>
+          </a:prstGeom>
+          <a:noFill/>
+          <a:ln/>
+        </p:spPr>
+        <p:txBody>
+          <a:bodyPr wrap="square" lIns="0" tIns="0" rIns="0" bIns="0" rtlCol="0" anchor="ctr"/>
+          <a:lstStyle/>
+          <a:p>
+            <a:pPr marL="0" indent="0" algn="ctr">
+              <a:buNone/>
+            </a:pPr>
+            <a:r>
+              <a:rPr lang="en-US" sz="1300" b="1" dirty="0">
+                <a:solidFill>
+                  <a:srgbClr val="F2F5F3"/>
+                </a:solidFill>
+                <a:latin typeface="Calibri" pitchFamily="34" charset="0"/>
+                <a:ea typeface="Calibri" pitchFamily="34" charset="-122"/>
+                <a:cs typeface="Calibri" pitchFamily="34" charset="-120"/>
+              </a:rPr>
+              <a:t>Track</a:t>
+            </a:r>
+            <a:endParaRPr lang="en-US" sz="1300" dirty="0"/>
+          </a:p>
+        </p:txBody>
+      </p:sp>
+      <p:sp>
+        <p:nvSpPr>
+          <p:cNvPr id="27" name="Text 21"/>
+          <p:cNvSpPr/>
+          <p:nvPr/>
+        </p:nvSpPr>
+        <p:spPr>
+          <a:xfrm>
+            <a:off x="7406640" y="4050792"/>
+            <a:ext cx="1783080" cy="658368"/>
+          </a:xfrm>
+          <a:prstGeom prst="rect">
+            <a:avLst/>
+          </a:prstGeom>
+          <a:noFill/>
+          <a:ln/>
+        </p:spPr>
+        <p:txBody>
+          <a:bodyPr wrap="square" rtlCol="0" anchor="ctr"/>
+          <a:lstStyle/>
+          <a:p>
+            <a:pPr marL="0" indent="0" algn="ctr">
+              <a:lnSpc>
+                <a:spcPct val="115000"/>
+              </a:lnSpc>
+              <a:buNone/>
+            </a:pPr>
+            <a:r>
+              <a:rPr lang="en-US" sz="950" dirty="0">
+                <a:solidFill>
+                  <a:srgbClr val="9AA5AC"/>
+                </a:solidFill>
+                <a:latin typeface="Calibri" pitchFamily="34" charset="0"/>
+                <a:ea typeface="Calibri" pitchFamily="34" charset="-122"/>
+                <a:cs typeface="Calibri" pitchFamily="34" charset="-120"/>
+              </a:rPr>
+              <a:t>Live ledgers monitor transit &amp; intake</a:t>
+            </a:r>
+            <a:endParaRPr lang="en-US" sz="950" dirty="0"/>
+          </a:p>
+        </p:txBody>
+      </p:sp>
+      <p:sp>
+        <p:nvSpPr>
+          <p:cNvPr id="28" name="Text 22"/>
+          <p:cNvSpPr/>
+          <p:nvPr/>
+        </p:nvSpPr>
+        <p:spPr>
+          <a:xfrm>
+            <a:off x="9326880" y="3566160"/>
+            <a:ext cx="182880" cy="365760"/>
+          </a:xfrm>
+          <a:prstGeom prst="rect">
+            <a:avLst/>
+          </a:prstGeom>
+          <a:noFill/>
+          <a:ln/>
+        </p:spPr>
+        <p:txBody>
+          <a:bodyPr wrap="square" rtlCol="0" anchor="ctr"/>
+          <a:lstStyle/>
+          <a:p>
+            <a:pPr marL="0" indent="0" algn="ctr">
+              <a:buNone/>
+            </a:pPr>
+            <a:r>
+              <a:rPr lang="en-US" sz="1400" dirty="0">
+                <a:solidFill>
+                  <a:srgbClr val="2ECC71"/>
+                </a:solidFill>
+              </a:rPr>
+              <a:t>→</a:t>
+            </a:r>
+            <a:endParaRPr lang="en-US" sz="1400" dirty="0"/>
+          </a:p>
+        </p:txBody>
+      </p:sp>
+      <p:sp>
+        <p:nvSpPr>
+          <p:cNvPr id="29" name="Shape 23"/>
+          <p:cNvSpPr/>
+          <p:nvPr/>
+        </p:nvSpPr>
+        <p:spPr>
+          <a:xfrm>
+            <a:off x="9509760" y="2880360"/>
+            <a:ext cx="2057400" cy="1920240"/>
+          </a:xfrm>
+          <a:prstGeom prst="roundRect">
+            <a:avLst>
+              <a:gd name="adj" fmla="val 3810"/>
+            </a:avLst>
+          </a:prstGeom>
+          <a:solidFill>
+            <a:srgbClr val="141A21"/>
+          </a:solidFill>
+          <a:ln/>
+        </p:spPr>
+      </p:sp>
+      <p:sp>
+        <p:nvSpPr>
+          <p:cNvPr id="30" name="Shape 24"/>
+          <p:cNvSpPr/>
+          <p:nvPr/>
+        </p:nvSpPr>
+        <p:spPr>
+          <a:xfrm>
+            <a:off x="10287000" y="3108960"/>
+            <a:ext cx="502920" cy="502920"/>
+          </a:xfrm>
+          <a:prstGeom prst="ellipse">
+            <a:avLst/>
+          </a:prstGeom>
+          <a:solidFill>
+            <a:srgbClr val="2ECC71"/>
+          </a:solidFill>
+          <a:ln/>
+        </p:spPr>
+      </p:sp>
+      <p:pic>
+        <p:nvPicPr>
+          <p:cNvPr id="31" name="Image 4" descr="preencoded.png"/>
+          <p:cNvPicPr>
+            <a:picLocks noChangeAspect="1"/>
+          </p:cNvPicPr>
+          <p:nvPr/>
+        </p:nvPicPr>
+        <p:blipFill>
+          <a:blip r:embed="rId7"/>
+          <a:stretch>
+            <a:fillRect/>
+          </a:stretch>
+        </p:blipFill>
+        <p:spPr>
+          <a:xfrm>
             <a:off x="10407701" y="3229661"/>
             <a:ext cx="261518" cy="261518"/>
           </a:xfrm>
@@ -9043,7 +8765,7 @@
           <a:bodyPr wrap="square" lIns="0" tIns="0" rIns="0" bIns="0" rtlCol="0" anchor="ctr"/>
           <a:lstStyle/>
           <a:p>
-            <a:pPr algn="ctr" indent="0" marL="0">
+            <a:pPr marL="0" indent="0" algn="ctr">
               <a:buNone/>
             </a:pPr>
             <a:r>
@@ -9082,7 +8804,7 @@
           <a:bodyPr wrap="square" rtlCol="0" anchor="ctr"/>
           <a:lstStyle/>
           <a:p>
-            <a:pPr algn="ctr" indent="0" marL="0">
+            <a:pPr marL="0" indent="0" algn="ctr">
               <a:lnSpc>
                 <a:spcPct val="115000"/>
               </a:lnSpc>
@@ -9146,7 +8868,7 @@
           <a:bodyPr wrap="square" rtlCol="0" anchor="ctr"/>
           <a:lstStyle/>
           <a:p>
-            <a:pPr indent="0" marL="0">
+            <a:pPr marL="0" indent="0">
               <a:buNone/>
             </a:pPr>
             <a:r>
@@ -9160,9 +8882,6 @@
               </a:rPr>
               <a:t>Reference implementation: </a:t>
             </a:r>
-            <a:pPr indent="0" marL="0">
-              <a:buNone/>
-            </a:pPr>
             <a:r>
               <a:rPr lang="en-US" sz="1250" dirty="0">
                 <a:solidFill>
@@ -9199,7 +8918,7 @@
           <a:bodyPr wrap="square" rtlCol="0" anchor="ctr"/>
           <a:lstStyle/>
           <a:p>
-            <a:pPr algn="r" indent="0" marL="0">
+            <a:pPr marL="0" indent="0" algn="r">
               <a:buNone/>
             </a:pPr>
             <a:r>
@@ -9233,6 +8952,7 @@
         <a:solidFill>
           <a:srgbClr val="0B0F14"/>
         </a:solidFill>
+        <a:effectLst/>
       </p:bgPr>
     </p:bg>
     <p:spTree>
@@ -9270,11 +8990,11 @@
           <a:bodyPr wrap="square" rtlCol="0" anchor="ctr"/>
           <a:lstStyle/>
           <a:p>
-            <a:pPr indent="0" marL="0">
-              <a:buNone/>
-            </a:pPr>
-            <a:r>
-              <a:rPr lang="en-US" sz="1300" b="1" spc="200" kern="0" dirty="0">
+            <a:pPr marL="0" indent="0">
+              <a:buNone/>
+            </a:pPr>
+            <a:r>
+              <a:rPr lang="en-US" sz="1300" b="1" kern="0" spc="200" dirty="0">
                 <a:solidFill>
                   <a:srgbClr val="2ECC71"/>
                 </a:solidFill>
@@ -9309,7 +9029,7 @@
           <a:bodyPr wrap="square" rtlCol="0" anchor="ctr"/>
           <a:lstStyle/>
           <a:p>
-            <a:pPr indent="0" marL="0">
+            <a:pPr marL="0" indent="0">
               <a:buNone/>
             </a:pPr>
             <a:r>
@@ -9348,7 +9068,7 @@
           <a:bodyPr wrap="square" rtlCol="0" anchor="ctr"/>
           <a:lstStyle/>
           <a:p>
-            <a:pPr indent="0" marL="0">
+            <a:pPr marL="0" indent="0">
               <a:buNone/>
             </a:pPr>
             <a:r>
@@ -9368,14 +9088,14 @@
       </p:sp>
       <p:pic>
         <p:nvPicPr>
-          <p:cNvPr id="5" name="Image 0" descr="/mnt/user-data/uploads/2.png">    </p:cNvPr>
+          <p:cNvPr id="5" name="Image 0" descr="/mnt/user-data/uploads/2.png"/>
           <p:cNvPicPr>
             <a:picLocks noChangeAspect="1"/>
           </p:cNvPicPr>
           <p:nvPr/>
         </p:nvPicPr>
         <p:blipFill>
-          <a:blip r:embed="rId1"/>
+          <a:blip r:embed="rId3"/>
           <a:stretch>
             <a:fillRect/>
           </a:stretch>
@@ -9389,7 +9109,7 @@
             <a:avLst/>
           </a:prstGeom>
           <a:effectLst>
-            <a:outerShdw sx="100000" sy="100000" kx="0" ky="0" algn="bl" rotWithShape="0" blurRad="127000" dist="38100" dir="5400000">
+            <a:outerShdw blurRad="127000" dist="38100" dir="5400000" algn="bl" rotWithShape="0">
               <a:srgbClr val="000000">
                 <a:alpha val="35000"/>
               </a:srgbClr>
@@ -9418,7 +9138,7 @@
           <a:bodyPr wrap="square" rtlCol="0" anchor="ctr"/>
           <a:lstStyle/>
           <a:p>
-            <a:pPr indent="0" marL="0">
+            <a:pPr marL="0" indent="0">
               <a:buNone/>
             </a:pPr>
             <a:r>
@@ -9432,9 +9152,6 @@
               </a:rPr>
               <a:t>•  </a:t>
             </a:r>
-            <a:pPr indent="0" marL="0">
-              <a:buNone/>
-            </a:pPr>
             <a:r>
               <a:rPr lang="en-US" sz="1300" dirty="0">
                 <a:solidFill>
@@ -9471,7 +9188,7 @@
           <a:bodyPr wrap="square" rtlCol="0" anchor="ctr"/>
           <a:lstStyle/>
           <a:p>
-            <a:pPr indent="0" marL="0">
+            <a:pPr marL="0" indent="0">
               <a:buNone/>
             </a:pPr>
             <a:r>
@@ -9485,9 +9202,6 @@
               </a:rPr>
               <a:t>•  </a:t>
             </a:r>
-            <a:pPr indent="0" marL="0">
-              <a:buNone/>
-            </a:pPr>
             <a:r>
               <a:rPr lang="en-US" sz="1300" dirty="0">
                 <a:solidFill>
@@ -9524,7 +9238,7 @@
           <a:bodyPr wrap="square" rtlCol="0" anchor="ctr"/>
           <a:lstStyle/>
           <a:p>
-            <a:pPr indent="0" marL="0">
+            <a:pPr marL="0" indent="0">
               <a:buNone/>
             </a:pPr>
             <a:r>
@@ -9538,9 +9252,6 @@
               </a:rPr>
               <a:t>•  </a:t>
             </a:r>
-            <a:pPr indent="0" marL="0">
-              <a:buNone/>
-            </a:pPr>
             <a:r>
               <a:rPr lang="en-US" sz="1300" dirty="0">
                 <a:solidFill>
@@ -9577,7 +9288,7 @@
           <a:bodyPr wrap="square" rtlCol="0" anchor="ctr"/>
           <a:lstStyle/>
           <a:p>
-            <a:pPr algn="r" indent="0" marL="0">
+            <a:pPr marL="0" indent="0" algn="r">
               <a:buNone/>
             </a:pPr>
             <a:r>
@@ -9611,6 +9322,7 @@
         <a:solidFill>
           <a:srgbClr val="0B0F14"/>
         </a:solidFill>
+        <a:effectLst/>
       </p:bgPr>
     </p:bg>
     <p:spTree>
@@ -9648,11 +9360,11 @@
           <a:bodyPr wrap="square" rtlCol="0" anchor="ctr"/>
           <a:lstStyle/>
           <a:p>
-            <a:pPr indent="0" marL="0">
-              <a:buNone/>
-            </a:pPr>
-            <a:r>
-              <a:rPr lang="en-US" sz="1300" b="1" spc="200" kern="0" dirty="0">
+            <a:pPr marL="0" indent="0">
+              <a:buNone/>
+            </a:pPr>
+            <a:r>
+              <a:rPr lang="en-US" sz="1300" b="1" kern="0" spc="200" dirty="0">
                 <a:solidFill>
                   <a:srgbClr val="2ECC71"/>
                 </a:solidFill>
@@ -9687,7 +9399,7 @@
           <a:bodyPr wrap="square" rtlCol="0" anchor="ctr"/>
           <a:lstStyle/>
           <a:p>
-            <a:pPr indent="0" marL="0">
+            <a:pPr marL="0" indent="0">
               <a:buNone/>
             </a:pPr>
             <a:r>
@@ -9707,147 +9419,7 @@
       </p:sp>
       <p:pic>
         <p:nvPicPr>
-          <p:cNvPr id="4" name="Image 0" descr="/mnt/user-data/uploads/3.png">    </p:cNvPr>
-          <p:cNvPicPr>
-            <a:picLocks noChangeAspect="1"/>
-          </p:cNvPicPr>
-          <p:nvPr/>
-        </p:nvPicPr>
-        <p:blipFill>
-          <a:blip r:embed="rId1"/>
-          <a:stretch>
-            <a:fillRect/>
-          </a:stretch>
-        </p:blipFill>
-        <p:spPr>
-          <a:xfrm>
-            <a:off x="548640" y="1691640"/>
-            <a:ext cx="3657600" cy="1644015"/>
-          </a:xfrm>
-          <a:prstGeom prst="rect">
-            <a:avLst/>
-          </a:prstGeom>
-          <a:effectLst>
-            <a:outerShdw sx="100000" sy="100000" kx="0" ky="0" algn="bl" rotWithShape="0" blurRad="101600" dist="38100" dir="5400000">
-              <a:srgbClr val="000000">
-                <a:alpha val="35000"/>
-              </a:srgbClr>
-            </a:outerShdw>
-          </a:effectLst>
-        </p:spPr>
-      </p:pic>
-      <p:sp>
-        <p:nvSpPr>
-          <p:cNvPr id="5" name="Text 2"/>
-          <p:cNvSpPr/>
-          <p:nvPr/>
-        </p:nvSpPr>
-        <p:spPr>
-          <a:xfrm>
-            <a:off x="548640" y="3445383"/>
-            <a:ext cx="3657600" cy="457200"/>
-          </a:xfrm>
-          <a:prstGeom prst="rect">
-            <a:avLst/>
-          </a:prstGeom>
-          <a:noFill/>
-          <a:ln/>
-        </p:spPr>
-        <p:txBody>
-          <a:bodyPr wrap="square" rtlCol="0" anchor="ctr"/>
-          <a:lstStyle/>
-          <a:p>
-            <a:pPr algn="ctr" indent="0" marL="0">
-              <a:buNone/>
-            </a:pPr>
-            <a:r>
-              <a:rPr lang="en-US" sz="1100" i="1" dirty="0">
-                <a:solidFill>
-                  <a:srgbClr val="9AA5AC"/>
-                </a:solidFill>
-                <a:latin typeface="Calibri" pitchFamily="34" charset="0"/>
-                <a:ea typeface="Calibri" pitchFamily="34" charset="-122"/>
-                <a:cs typeface="Calibri" pitchFamily="34" charset="-120"/>
-              </a:rPr>
-              <a:t>Restaurant partner registration</a:t>
-            </a:r>
-            <a:endParaRPr lang="en-US" sz="1100" dirty="0"/>
-          </a:p>
-        </p:txBody>
-      </p:sp>
-      <p:pic>
-        <p:nvPicPr>
-          <p:cNvPr id="6" name="Image 1" descr="/mnt/user-data/uploads/4.png">    </p:cNvPr>
-          <p:cNvPicPr>
-            <a:picLocks noChangeAspect="1"/>
-          </p:cNvPicPr>
-          <p:nvPr/>
-        </p:nvPicPr>
-        <p:blipFill>
-          <a:blip r:embed="rId2"/>
-          <a:stretch>
-            <a:fillRect/>
-          </a:stretch>
-        </p:blipFill>
-        <p:spPr>
-          <a:xfrm>
-            <a:off x="4434840" y="1691640"/>
-            <a:ext cx="3657600" cy="1645920"/>
-          </a:xfrm>
-          <a:prstGeom prst="rect">
-            <a:avLst/>
-          </a:prstGeom>
-          <a:effectLst>
-            <a:outerShdw sx="100000" sy="100000" kx="0" ky="0" algn="bl" rotWithShape="0" blurRad="101600" dist="38100" dir="5400000">
-              <a:srgbClr val="000000">
-                <a:alpha val="35000"/>
-              </a:srgbClr>
-            </a:outerShdw>
-          </a:effectLst>
-        </p:spPr>
-      </p:pic>
-      <p:sp>
-        <p:nvSpPr>
-          <p:cNvPr id="7" name="Text 3"/>
-          <p:cNvSpPr/>
-          <p:nvPr/>
-        </p:nvSpPr>
-        <p:spPr>
-          <a:xfrm>
-            <a:off x="4434840" y="3447288"/>
-            <a:ext cx="3657600" cy="457200"/>
-          </a:xfrm>
-          <a:prstGeom prst="rect">
-            <a:avLst/>
-          </a:prstGeom>
-          <a:noFill/>
-          <a:ln/>
-        </p:spPr>
-        <p:txBody>
-          <a:bodyPr wrap="square" rtlCol="0" anchor="ctr"/>
-          <a:lstStyle/>
-          <a:p>
-            <a:pPr algn="ctr" indent="0" marL="0">
-              <a:buNone/>
-            </a:pPr>
-            <a:r>
-              <a:rPr lang="en-US" sz="1100" i="1" dirty="0">
-                <a:solidFill>
-                  <a:srgbClr val="9AA5AC"/>
-                </a:solidFill>
-                <a:latin typeface="Calibri" pitchFamily="34" charset="0"/>
-                <a:ea typeface="Calibri" pitchFamily="34" charset="-122"/>
-                <a:cs typeface="Calibri" pitchFamily="34" charset="-120"/>
-              </a:rPr>
-              <a:t>NGO partner registration</a:t>
-            </a:r>
-            <a:endParaRPr lang="en-US" sz="1100" dirty="0"/>
-          </a:p>
-        </p:txBody>
-      </p:sp>
-      <p:pic>
-        <p:nvPicPr>
-          <p:cNvPr id="8" name="Image 2" descr="/mnt/user-data/uploads/5.png">    </p:cNvPr>
+          <p:cNvPr id="4" name="Image 0" descr="/mnt/user-data/uploads/3.png"/>
           <p:cNvPicPr>
             <a:picLocks noChangeAspect="1"/>
           </p:cNvPicPr>
@@ -9861,14 +9433,14 @@
         </p:blipFill>
         <p:spPr>
           <a:xfrm>
-            <a:off x="8321040" y="1691640"/>
-            <a:ext cx="3657600" cy="1624965"/>
+            <a:off x="548640" y="1691640"/>
+            <a:ext cx="3657600" cy="1644015"/>
           </a:xfrm>
           <a:prstGeom prst="rect">
             <a:avLst/>
           </a:prstGeom>
           <a:effectLst>
-            <a:outerShdw sx="100000" sy="100000" kx="0" ky="0" algn="bl" rotWithShape="0" blurRad="101600" dist="38100" dir="5400000">
+            <a:outerShdw blurRad="101600" dist="38100" dir="5400000" algn="bl" rotWithShape="0">
               <a:srgbClr val="000000">
                 <a:alpha val="35000"/>
               </a:srgbClr>
@@ -9878,6 +9450,146 @@
       </p:pic>
       <p:sp>
         <p:nvSpPr>
+          <p:cNvPr id="5" name="Text 2"/>
+          <p:cNvSpPr/>
+          <p:nvPr/>
+        </p:nvSpPr>
+        <p:spPr>
+          <a:xfrm>
+            <a:off x="548640" y="3445383"/>
+            <a:ext cx="3657600" cy="457200"/>
+          </a:xfrm>
+          <a:prstGeom prst="rect">
+            <a:avLst/>
+          </a:prstGeom>
+          <a:noFill/>
+          <a:ln/>
+        </p:spPr>
+        <p:txBody>
+          <a:bodyPr wrap="square" rtlCol="0" anchor="ctr"/>
+          <a:lstStyle/>
+          <a:p>
+            <a:pPr marL="0" indent="0" algn="ctr">
+              <a:buNone/>
+            </a:pPr>
+            <a:r>
+              <a:rPr lang="en-US" sz="1100" i="1" dirty="0">
+                <a:solidFill>
+                  <a:srgbClr val="9AA5AC"/>
+                </a:solidFill>
+                <a:latin typeface="Calibri" pitchFamily="34" charset="0"/>
+                <a:ea typeface="Calibri" pitchFamily="34" charset="-122"/>
+                <a:cs typeface="Calibri" pitchFamily="34" charset="-120"/>
+              </a:rPr>
+              <a:t>Restaurant partner registration</a:t>
+            </a:r>
+            <a:endParaRPr lang="en-US" sz="1100" dirty="0"/>
+          </a:p>
+        </p:txBody>
+      </p:sp>
+      <p:pic>
+        <p:nvPicPr>
+          <p:cNvPr id="6" name="Image 1" descr="/mnt/user-data/uploads/4.png"/>
+          <p:cNvPicPr>
+            <a:picLocks noChangeAspect="1"/>
+          </p:cNvPicPr>
+          <p:nvPr/>
+        </p:nvPicPr>
+        <p:blipFill>
+          <a:blip r:embed="rId4"/>
+          <a:stretch>
+            <a:fillRect/>
+          </a:stretch>
+        </p:blipFill>
+        <p:spPr>
+          <a:xfrm>
+            <a:off x="4434840" y="1691640"/>
+            <a:ext cx="3657600" cy="1645920"/>
+          </a:xfrm>
+          <a:prstGeom prst="rect">
+            <a:avLst/>
+          </a:prstGeom>
+          <a:effectLst>
+            <a:outerShdw blurRad="101600" dist="38100" dir="5400000" algn="bl" rotWithShape="0">
+              <a:srgbClr val="000000">
+                <a:alpha val="35000"/>
+              </a:srgbClr>
+            </a:outerShdw>
+          </a:effectLst>
+        </p:spPr>
+      </p:pic>
+      <p:sp>
+        <p:nvSpPr>
+          <p:cNvPr id="7" name="Text 3"/>
+          <p:cNvSpPr/>
+          <p:nvPr/>
+        </p:nvSpPr>
+        <p:spPr>
+          <a:xfrm>
+            <a:off x="4434840" y="3447288"/>
+            <a:ext cx="3657600" cy="457200"/>
+          </a:xfrm>
+          <a:prstGeom prst="rect">
+            <a:avLst/>
+          </a:prstGeom>
+          <a:noFill/>
+          <a:ln/>
+        </p:spPr>
+        <p:txBody>
+          <a:bodyPr wrap="square" rtlCol="0" anchor="ctr"/>
+          <a:lstStyle/>
+          <a:p>
+            <a:pPr marL="0" indent="0" algn="ctr">
+              <a:buNone/>
+            </a:pPr>
+            <a:r>
+              <a:rPr lang="en-US" sz="1100" i="1" dirty="0">
+                <a:solidFill>
+                  <a:srgbClr val="9AA5AC"/>
+                </a:solidFill>
+                <a:latin typeface="Calibri" pitchFamily="34" charset="0"/>
+                <a:ea typeface="Calibri" pitchFamily="34" charset="-122"/>
+                <a:cs typeface="Calibri" pitchFamily="34" charset="-120"/>
+              </a:rPr>
+              <a:t>NGO partner registration</a:t>
+            </a:r>
+            <a:endParaRPr lang="en-US" sz="1100" dirty="0"/>
+          </a:p>
+        </p:txBody>
+      </p:sp>
+      <p:pic>
+        <p:nvPicPr>
+          <p:cNvPr id="8" name="Image 2" descr="/mnt/user-data/uploads/5.png"/>
+          <p:cNvPicPr>
+            <a:picLocks noChangeAspect="1"/>
+          </p:cNvPicPr>
+          <p:nvPr/>
+        </p:nvPicPr>
+        <p:blipFill>
+          <a:blip r:embed="rId5"/>
+          <a:stretch>
+            <a:fillRect/>
+          </a:stretch>
+        </p:blipFill>
+        <p:spPr>
+          <a:xfrm>
+            <a:off x="8321040" y="1691640"/>
+            <a:ext cx="3657600" cy="1624965"/>
+          </a:xfrm>
+          <a:prstGeom prst="rect">
+            <a:avLst/>
+          </a:prstGeom>
+          <a:effectLst>
+            <a:outerShdw blurRad="101600" dist="38100" dir="5400000" algn="bl" rotWithShape="0">
+              <a:srgbClr val="000000">
+                <a:alpha val="35000"/>
+              </a:srgbClr>
+            </a:outerShdw>
+          </a:effectLst>
+        </p:spPr>
+      </p:pic>
+      <p:sp>
+        <p:nvSpPr>
           <p:cNvPr id="9" name="Text 4"/>
           <p:cNvSpPr/>
           <p:nvPr/>
@@ -9897,7 +9609,7 @@
           <a:bodyPr wrap="square" rtlCol="0" anchor="ctr"/>
           <a:lstStyle/>
           <a:p>
-            <a:pPr algn="ctr" indent="0" marL="0">
+            <a:pPr marL="0" indent="0" algn="ctr">
               <a:buNone/>
             </a:pPr>
             <a:r>
@@ -9936,7 +9648,7 @@
           <a:bodyPr wrap="square" rtlCol="0" anchor="ctr"/>
           <a:lstStyle/>
           <a:p>
-            <a:pPr algn="r" indent="0" marL="0">
+            <a:pPr marL="0" indent="0" algn="r">
               <a:buNone/>
             </a:pPr>
             <a:r>
@@ -9970,6 +9682,7 @@
         <a:solidFill>
           <a:srgbClr val="0B0F14"/>
         </a:solidFill>
+        <a:effectLst/>
       </p:bgPr>
     </p:bg>
     <p:spTree>
@@ -10007,11 +9720,11 @@
           <a:bodyPr wrap="square" rtlCol="0" anchor="ctr"/>
           <a:lstStyle/>
           <a:p>
-            <a:pPr indent="0" marL="0">
-              <a:buNone/>
-            </a:pPr>
-            <a:r>
-              <a:rPr lang="en-US" sz="1300" b="1" spc="200" kern="0" dirty="0">
+            <a:pPr marL="0" indent="0">
+              <a:buNone/>
+            </a:pPr>
+            <a:r>
+              <a:rPr lang="en-US" sz="1300" b="1" kern="0" spc="200" dirty="0">
                 <a:solidFill>
                   <a:srgbClr val="2ECC71"/>
                 </a:solidFill>
@@ -10046,7 +9759,7 @@
           <a:bodyPr wrap="square" rtlCol="0" anchor="ctr"/>
           <a:lstStyle/>
           <a:p>
-            <a:pPr indent="0" marL="0">
+            <a:pPr marL="0" indent="0">
               <a:buNone/>
             </a:pPr>
             <a:r>
@@ -10066,14 +9779,14 @@
       </p:sp>
       <p:pic>
         <p:nvPicPr>
-          <p:cNvPr id="4" name="Image 0" descr="/mnt/user-data/uploads/6.png">    </p:cNvPr>
+          <p:cNvPr id="4" name="Image 0" descr="/mnt/user-data/uploads/6.png"/>
           <p:cNvPicPr>
             <a:picLocks noChangeAspect="1"/>
           </p:cNvPicPr>
           <p:nvPr/>
         </p:nvPicPr>
         <p:blipFill>
-          <a:blip r:embed="rId1"/>
+          <a:blip r:embed="rId3"/>
           <a:stretch>
             <a:fillRect/>
           </a:stretch>
@@ -10087,7 +9800,7 @@
             <a:avLst/>
           </a:prstGeom>
           <a:effectLst>
-            <a:outerShdw sx="100000" sy="100000" kx="0" ky="0" algn="bl" rotWithShape="0" blurRad="101600" dist="38100" dir="5400000">
+            <a:outerShdw blurRad="101600" dist="38100" dir="5400000" algn="bl" rotWithShape="0">
               <a:srgbClr val="000000">
                 <a:alpha val="35000"/>
               </a:srgbClr>
@@ -10116,7 +9829,7 @@
           <a:bodyPr wrap="square" rtlCol="0" anchor="ctr"/>
           <a:lstStyle/>
           <a:p>
-            <a:pPr algn="ctr" indent="0" marL="0">
+            <a:pPr marL="0" indent="0" algn="ctr">
               <a:buNone/>
             </a:pPr>
             <a:r>
@@ -10136,14 +9849,14 @@
       </p:sp>
       <p:pic>
         <p:nvPicPr>
-          <p:cNvPr id="6" name="Image 1" descr="/mnt/user-data/uploads/7.png">    </p:cNvPr>
+          <p:cNvPr id="6" name="Image 1" descr="/mnt/user-data/uploads/7.png"/>
           <p:cNvPicPr>
             <a:picLocks noChangeAspect="1"/>
           </p:cNvPicPr>
           <p:nvPr/>
         </p:nvPicPr>
         <p:blipFill>
-          <a:blip r:embed="rId2"/>
+          <a:blip r:embed="rId4"/>
           <a:stretch>
             <a:fillRect/>
           </a:stretch>
@@ -10157,7 +9870,7 @@
             <a:avLst/>
           </a:prstGeom>
           <a:effectLst>
-            <a:outerShdw sx="100000" sy="100000" kx="0" ky="0" algn="bl" rotWithShape="0" blurRad="101600" dist="38100" dir="5400000">
+            <a:outerShdw blurRad="101600" dist="38100" dir="5400000" algn="bl" rotWithShape="0">
               <a:srgbClr val="000000">
                 <a:alpha val="35000"/>
               </a:srgbClr>
@@ -10186,7 +9899,7 @@
           <a:bodyPr wrap="square" rtlCol="0" anchor="ctr"/>
           <a:lstStyle/>
           <a:p>
-            <a:pPr algn="ctr" indent="0" marL="0">
+            <a:pPr marL="0" indent="0" algn="ctr">
               <a:buNone/>
             </a:pPr>
             <a:r>
@@ -10225,7 +9938,7 @@
           <a:bodyPr wrap="square" rtlCol="0" anchor="ctr"/>
           <a:lstStyle/>
           <a:p>
-            <a:pPr algn="r" indent="0" marL="0">
+            <a:pPr marL="0" indent="0" algn="r">
               <a:buNone/>
             </a:pPr>
             <a:r>
@@ -10259,6 +9972,7 @@
         <a:solidFill>
           <a:srgbClr val="0B0F14"/>
         </a:solidFill>
+        <a:effectLst/>
       </p:bgPr>
     </p:bg>
     <p:spTree>
@@ -10296,11 +10010,11 @@
           <a:bodyPr wrap="square" rtlCol="0" anchor="ctr"/>
           <a:lstStyle/>
           <a:p>
-            <a:pPr indent="0" marL="0">
-              <a:buNone/>
-            </a:pPr>
-            <a:r>
-              <a:rPr lang="en-US" sz="1300" b="1" spc="200" kern="0" dirty="0">
+            <a:pPr marL="0" indent="0">
+              <a:buNone/>
+            </a:pPr>
+            <a:r>
+              <a:rPr lang="en-US" sz="1300" b="1" kern="0" spc="200" dirty="0">
                 <a:solidFill>
                   <a:srgbClr val="2ECC71"/>
                 </a:solidFill>
@@ -10335,7 +10049,7 @@
           <a:bodyPr wrap="square" rtlCol="0" anchor="ctr"/>
           <a:lstStyle/>
           <a:p>
-            <a:pPr indent="0" marL="0">
+            <a:pPr marL="0" indent="0">
               <a:buNone/>
             </a:pPr>
             <a:r>
@@ -10355,14 +10069,14 @@
       </p:sp>
       <p:pic>
         <p:nvPicPr>
-          <p:cNvPr id="4" name="Image 0" descr="/mnt/user-data/uploads/9.png">    </p:cNvPr>
+          <p:cNvPr id="4" name="Image 0" descr="/mnt/user-data/uploads/9.png"/>
           <p:cNvPicPr>
             <a:picLocks noChangeAspect="1"/>
           </p:cNvPicPr>
           <p:nvPr/>
         </p:nvPicPr>
         <p:blipFill>
-          <a:blip r:embed="rId1"/>
+          <a:blip r:embed="rId3"/>
           <a:stretch>
             <a:fillRect/>
           </a:stretch>
@@ -10376,7 +10090,7 @@
             <a:avLst/>
           </a:prstGeom>
           <a:effectLst>
-            <a:outerShdw sx="100000" sy="100000" kx="0" ky="0" algn="bl" rotWithShape="0" blurRad="127000" dist="38100" dir="5400000">
+            <a:outerShdw blurRad="127000" dist="38100" dir="5400000" algn="bl" rotWithShape="0">
               <a:srgbClr val="000000">
                 <a:alpha val="35000"/>
               </a:srgbClr>
@@ -10405,7 +10119,7 @@
           <a:bodyPr wrap="square" rtlCol="0" anchor="ctr"/>
           <a:lstStyle/>
           <a:p>
-            <a:pPr algn="ctr" indent="0" marL="0">
+            <a:pPr marL="0" indent="0" algn="ctr">
               <a:buNone/>
             </a:pPr>
             <a:r>
@@ -10444,7 +10158,7 @@
           <a:bodyPr wrap="square" rtlCol="0" anchor="ctr"/>
           <a:lstStyle/>
           <a:p>
-            <a:pPr algn="r" indent="0" marL="0">
+            <a:pPr marL="0" indent="0" algn="r">
               <a:buNone/>
             </a:pPr>
             <a:r>
@@ -10763,4 +10477,299 @@
     </a:ext>
   </a:extLst>
 </a:theme>
+</file>
+
+<file path=ppt/theme/theme2.xml><?xml version="1.0" encoding="utf-8"?>
+<a:theme xmlns:a="http://schemas.openxmlformats.org/drawingml/2006/main" name="Office Theme">
+  <a:themeElements>
+    <a:clrScheme name="Office">
+      <a:dk1>
+        <a:sysClr val="windowText" lastClr="000000"/>
+      </a:dk1>
+      <a:lt1>
+        <a:sysClr val="window" lastClr="FFFFFF"/>
+      </a:lt1>
+      <a:dk2>
+        <a:srgbClr val="44546A"/>
+      </a:dk2>
+      <a:lt2>
+        <a:srgbClr val="E7E6E6"/>
+      </a:lt2>
+      <a:accent1>
+        <a:srgbClr val="4472C4"/>
+      </a:accent1>
+      <a:accent2>
+        <a:srgbClr val="ED7D31"/>
+      </a:accent2>
+      <a:accent3>
+        <a:srgbClr val="A5A5A5"/>
+      </a:accent3>
+      <a:accent4>
+        <a:srgbClr val="FFC000"/>
+      </a:accent4>
+      <a:accent5>
+        <a:srgbClr val="5B9BD5"/>
+      </a:accent5>
+      <a:accent6>
+        <a:srgbClr val="70AD47"/>
+      </a:accent6>
+      <a:hlink>
+        <a:srgbClr val="0563C1"/>
+      </a:hlink>
+      <a:folHlink>
+        <a:srgbClr val="954F72"/>
+      </a:folHlink>
+    </a:clrScheme>
+    <a:fontScheme name="Office">
+      <a:majorFont>
+        <a:latin typeface="Calibri Light" panose="020F0302020204030204"/>
+        <a:ea typeface=""/>
+        <a:cs typeface=""/>
+        <a:font script="Jpan" typeface="游ゴシック Light"/>
+        <a:font script="Hang" typeface="맑은 고딕"/>
+        <a:font script="Hans" typeface="等线 Light"/>
+        <a:font script="Hant" typeface="新細明體"/>
+        <a:font script="Arab" typeface="Times New Roman"/>
+        <a:font script="Hebr" typeface="Times New Roman"/>
+        <a:font script="Thai" typeface="Angsana New"/>
+        <a:font script="Ethi" typeface="Nyala"/>
+        <a:font script="Beng" typeface="Vrinda"/>
+        <a:font script="Gujr" typeface="Shruti"/>
+        <a:font script="Khmr" typeface="MoolBoran"/>
+        <a:font script="Knda" typeface="Tunga"/>
+        <a:font script="Guru" typeface="Raavi"/>
+        <a:font script="Cans" typeface="Euphemia"/>
+        <a:font script="Cher" typeface="Plantagenet Cherokee"/>
+        <a:font script="Yiii" typeface="Microsoft Yi Baiti"/>
+        <a:font script="Tibt" typeface="Microsoft Himalaya"/>
+        <a:font script="Thaa" typeface="MV Boli"/>
+        <a:font script="Deva" typeface="Mangal"/>
+        <a:font script="Telu" typeface="Gautami"/>
+        <a:font script="Taml" typeface="Latha"/>
+        <a:font script="Syrc" typeface="Estrangelo Edessa"/>
+        <a:font script="Orya" typeface="Kalinga"/>
+        <a:font script="Mlym" typeface="Kartika"/>
+        <a:font script="Laoo" typeface="DokChampa"/>
+        <a:font script="Sinh" typeface="Iskoola Pota"/>
+        <a:font script="Mong" typeface="Mongolian Baiti"/>
+        <a:font script="Viet" typeface="Times New Roman"/>
+        <a:font script="Uigh" typeface="Microsoft Uighur"/>
+        <a:font script="Geor" typeface="Sylfaen"/>
+        <a:font script="Armn" typeface="Arial"/>
+        <a:font script="Bugi" typeface="Leelawadee UI"/>
+        <a:font script="Bopo" typeface="Microsoft JhengHei"/>
+        <a:font script="Java" typeface="Javanese Text"/>
+        <a:font script="Lisu" typeface="Segoe UI"/>
+        <a:font script="Mymr" typeface="Myanmar Text"/>
+        <a:font script="Nkoo" typeface="Ebrima"/>
+        <a:font script="Olck" typeface="Nirmala UI"/>
+        <a:font script="Osma" typeface="Ebrima"/>
+        <a:font script="Phag" typeface="Phagspa"/>
+        <a:font script="Syrn" typeface="Estrangelo Edessa"/>
+        <a:font script="Syrj" typeface="Estrangelo Edessa"/>
+        <a:font script="Syre" typeface="Estrangelo Edessa"/>
+        <a:font script="Sora" typeface="Nirmala UI"/>
+        <a:font script="Tale" typeface="Microsoft Tai Le"/>
+        <a:font script="Talu" typeface="Microsoft New Tai Lue"/>
+        <a:font script="Tfng" typeface="Ebrima"/>
+      </a:majorFont>
+      <a:minorFont>
+        <a:latin typeface="Calibri" panose="020F0502020204030204"/>
+        <a:ea typeface=""/>
+        <a:cs typeface=""/>
+        <a:font script="Jpan" typeface="游ゴシック"/>
+        <a:font script="Hang" typeface="맑은 고딕"/>
+        <a:font script="Hans" typeface="等线"/>
+        <a:font script="Hant" typeface="新細明體"/>
+        <a:font script="Arab" typeface="Arial"/>
+        <a:font script="Hebr" typeface="Arial"/>
+        <a:font script="Thai" typeface="Cordia New"/>
+        <a:font script="Ethi" typeface="Nyala"/>
+        <a:font script="Beng" typeface="Vrinda"/>
+        <a:font script="Gujr" typeface="Shruti"/>
+        <a:font script="Khmr" typeface="DaunPenh"/>
+        <a:font script="Knda" typeface="Tunga"/>
+        <a:font script="Guru" typeface="Raavi"/>
+        <a:font script="Cans" typeface="Euphemia"/>
+        <a:font script="Cher" typeface="Plantagenet Cherokee"/>
+        <a:font script="Yiii" typeface="Microsoft Yi Baiti"/>
+        <a:font script="Tibt" typeface="Microsoft Himalaya"/>
+        <a:font script="Thaa" typeface="MV Boli"/>
+        <a:font script="Deva" typeface="Mangal"/>
+        <a:font script="Telu" typeface="Gautami"/>
+        <a:font script="Taml" typeface="Latha"/>
+        <a:font script="Syrc" typeface="Estrangelo Edessa"/>
+        <a:font script="Orya" typeface="Kalinga"/>
+        <a:font script="Mlym" typeface="Kartika"/>
+        <a:font script="Laoo" typeface="DokChampa"/>
+        <a:font script="Sinh" typeface="Iskoola Pota"/>
+        <a:font script="Mong" typeface="Mongolian Baiti"/>
+        <a:font script="Viet" typeface="Arial"/>
+        <a:font script="Uigh" typeface="Microsoft Uighur"/>
+        <a:font script="Geor" typeface="Sylfaen"/>
+        <a:font script="Armn" typeface="Arial"/>
+        <a:font script="Bugi" typeface="Leelawadee UI"/>
+        <a:font script="Bopo" typeface="Microsoft JhengHei"/>
+        <a:font script="Java" typeface="Javanese Text"/>
+        <a:font script="Lisu" typeface="Segoe UI"/>
+        <a:font script="Mymr" typeface="Myanmar Text"/>
+        <a:font script="Nkoo" typeface="Ebrima"/>
+        <a:font script="Olck" typeface="Nirmala UI"/>
+        <a:font script="Osma" typeface="Ebrima"/>
+        <a:font script="Phag" typeface="Phagspa"/>
+        <a:font script="Syrn" typeface="Estrangelo Edessa"/>
+        <a:font script="Syrj" typeface="Estrangelo Edessa"/>
+        <a:font script="Syre" typeface="Estrangelo Edessa"/>
+        <a:font script="Sora" typeface="Nirmala UI"/>
+        <a:font script="Tale" typeface="Microsoft Tai Le"/>
+        <a:font script="Talu" typeface="Microsoft New Tai Lue"/>
+        <a:font script="Tfng" typeface="Ebrima"/>
+      </a:minorFont>
+    </a:fontScheme>
+    <a:fmtScheme name="Office">
+      <a:fillStyleLst>
+        <a:solidFill>
+          <a:schemeClr val="phClr"/>
+        </a:solidFill>
+        <a:gradFill rotWithShape="1">
+          <a:gsLst>
+            <a:gs pos="0">
+              <a:schemeClr val="phClr">
+                <a:lumMod val="110000"/>
+                <a:satMod val="105000"/>
+                <a:tint val="67000"/>
+              </a:schemeClr>
+            </a:gs>
+            <a:gs pos="50000">
+              <a:schemeClr val="phClr">
+                <a:lumMod val="105000"/>
+                <a:satMod val="103000"/>
+                <a:tint val="73000"/>
+              </a:schemeClr>
+            </a:gs>
+            <a:gs pos="100000">
+              <a:schemeClr val="phClr">
+                <a:lumMod val="105000"/>
+                <a:satMod val="109000"/>
+                <a:tint val="81000"/>
+              </a:schemeClr>
+            </a:gs>
+          </a:gsLst>
+          <a:lin ang="5400000" scaled="0"/>
+        </a:gradFill>
+        <a:gradFill rotWithShape="1">
+          <a:gsLst>
+            <a:gs pos="0">
+              <a:schemeClr val="phClr">
+                <a:satMod val="103000"/>
+                <a:lumMod val="102000"/>
+                <a:tint val="94000"/>
+              </a:schemeClr>
+            </a:gs>
+            <a:gs pos="50000">
+              <a:schemeClr val="phClr">
+                <a:satMod val="110000"/>
+                <a:lumMod val="100000"/>
+                <a:shade val="100000"/>
+              </a:schemeClr>
+            </a:gs>
+            <a:gs pos="100000">
+              <a:schemeClr val="phClr">
+                <a:lumMod val="99000"/>
+                <a:satMod val="120000"/>
+                <a:shade val="78000"/>
+              </a:schemeClr>
+            </a:gs>
+          </a:gsLst>
+          <a:lin ang="5400000" scaled="0"/>
+        </a:gradFill>
+      </a:fillStyleLst>
+      <a:lnStyleLst>
+        <a:ln w="6350" cap="flat" cmpd="sng" algn="ctr">
+          <a:solidFill>
+            <a:schemeClr val="phClr"/>
+          </a:solidFill>
+          <a:prstDash val="solid"/>
+          <a:miter lim="800000"/>
+        </a:ln>
+        <a:ln w="12700" cap="flat" cmpd="sng" algn="ctr">
+          <a:solidFill>
+            <a:schemeClr val="phClr"/>
+          </a:solidFill>
+          <a:prstDash val="solid"/>
+          <a:miter lim="800000"/>
+        </a:ln>
+        <a:ln w="19050" cap="flat" cmpd="sng" algn="ctr">
+          <a:solidFill>
+            <a:schemeClr val="phClr"/>
+          </a:solidFill>
+          <a:prstDash val="solid"/>
+          <a:miter lim="800000"/>
+        </a:ln>
+      </a:lnStyleLst>
+      <a:effectStyleLst>
+        <a:effectStyle>
+          <a:effectLst/>
+        </a:effectStyle>
+        <a:effectStyle>
+          <a:effectLst/>
+        </a:effectStyle>
+        <a:effectStyle>
+          <a:effectLst>
+            <a:outerShdw blurRad="57150" dist="19050" dir="5400000" algn="ctr" rotWithShape="0">
+              <a:srgbClr val="000000">
+                <a:alpha val="63000"/>
+              </a:srgbClr>
+            </a:outerShdw>
+          </a:effectLst>
+        </a:effectStyle>
+      </a:effectStyleLst>
+      <a:bgFillStyleLst>
+        <a:solidFill>
+          <a:schemeClr val="phClr"/>
+        </a:solidFill>
+        <a:solidFill>
+          <a:schemeClr val="phClr">
+            <a:tint val="95000"/>
+            <a:satMod val="170000"/>
+          </a:schemeClr>
+        </a:solidFill>
+        <a:gradFill rotWithShape="1">
+          <a:gsLst>
+            <a:gs pos="0">
+              <a:schemeClr val="phClr">
+                <a:tint val="93000"/>
+                <a:satMod val="150000"/>
+                <a:shade val="98000"/>
+                <a:lumMod val="102000"/>
+              </a:schemeClr>
+            </a:gs>
+            <a:gs pos="50000">
+              <a:schemeClr val="phClr">
+                <a:tint val="98000"/>
+                <a:satMod val="130000"/>
+                <a:shade val="90000"/>
+                <a:lumMod val="103000"/>
+              </a:schemeClr>
+            </a:gs>
+            <a:gs pos="100000">
+              <a:schemeClr val="phClr">
+                <a:shade val="63000"/>
+                <a:satMod val="120000"/>
+              </a:schemeClr>
+            </a:gs>
+          </a:gsLst>
+          <a:lin ang="5400000" scaled="0"/>
+        </a:gradFill>
+      </a:bgFillStyleLst>
+    </a:fmtScheme>
+  </a:themeElements>
+  <a:objectDefaults/>
+  <a:extraClrSchemeLst/>
+  <a:extLst>
+    <a:ext uri="{05A4C25C-085E-4340-85A3-A5531E510DB2}">
+      <thm15:themeFamily xmlns:thm15="http://schemas.microsoft.com/office/thememl/2012/main" name="Office Theme" id="{62F939B6-93AF-4DB8-9C6B-D6C7DFDC589F}" vid="{4A3C46E8-61CC-4603-A589-7422A47A8E4A}"/>
+    </a:ext>
+  </a:extLst>
+</a:theme>
 </file>